--- a/demo_site/files/slides/lecture27_fiveworlds.pptx
+++ b/demo_site/files/slides/lecture27_fiveworlds.pptx
@@ -1,11 +1,11 @@
 
 <file path=ppt/presentation.xml><?xml version="1.0" encoding="utf-8"?>
-<p:presentation xmlns:a="http://schemas.openxmlformats.org/drawingml/2006/main" xmlns:r="http://schemas.openxmlformats.org/officeDocument/2006/relationships" xmlns:p="http://schemas.openxmlformats.org/presentationml/2006/main" embedTrueTypeFonts="1">
+<p:presentation xmlns:a="http://schemas.openxmlformats.org/drawingml/2006/main" xmlns:r="http://schemas.openxmlformats.org/officeDocument/2006/relationships" xmlns:p="http://schemas.openxmlformats.org/presentationml/2006/main" embedTrueTypeFonts="1" saveSubsetFonts="1">
   <p:sldMasterIdLst>
     <p:sldMasterId id="2147483648" r:id="rId1"/>
   </p:sldMasterIdLst>
   <p:notesMasterIdLst>
-    <p:notesMasterId r:id="rId26"/>
+    <p:notesMasterId r:id="rId27"/>
   </p:notesMasterIdLst>
   <p:sldIdLst>
     <p:sldId id="257" r:id="rId2"/>
@@ -29,16 +29,17 @@
     <p:sldId id="797" r:id="rId20"/>
     <p:sldId id="798" r:id="rId21"/>
     <p:sldId id="799" r:id="rId22"/>
-    <p:sldId id="800" r:id="rId23"/>
-    <p:sldId id="801" r:id="rId24"/>
-    <p:sldId id="803" r:id="rId25"/>
+    <p:sldId id="972" r:id="rId23"/>
+    <p:sldId id="800" r:id="rId24"/>
+    <p:sldId id="801" r:id="rId25"/>
+    <p:sldId id="803" r:id="rId26"/>
   </p:sldIdLst>
   <p:sldSz cx="12192000" cy="6858000"/>
   <p:notesSz cx="6858000" cy="9144000"/>
   <p:embeddedFontLst>
     <p:embeddedFont>
       <p:font typeface="Cambria Math" panose="02040503050406030204" pitchFamily="18" charset="0"/>
-      <p:regular r:id="rId27"/>
+      <p:regular r:id="rId28"/>
     </p:embeddedFont>
   </p:embeddedFontLst>
   <p:defaultTextStyle>
@@ -138,18 +139,7 @@
   </p:defaultTextStyle>
   <p:extLst>
     <p:ext uri="{EFAFB233-063F-42B5-8137-9DF3F51BA10A}">
-      <p15:sldGuideLst xmlns:p15="http://schemas.microsoft.com/office/powerpoint/2012/main">
-        <p15:guide id="1" orient="horz" pos="2160" userDrawn="1">
-          <p15:clr>
-            <a:srgbClr val="A4A3A4"/>
-          </p15:clr>
-        </p15:guide>
-        <p15:guide id="2" pos="3840" userDrawn="1">
-          <p15:clr>
-            <a:srgbClr val="A4A3A4"/>
-          </p15:clr>
-        </p15:guide>
-      </p15:sldGuideLst>
+      <p15:sldGuideLst xmlns:p15="http://schemas.microsoft.com/office/powerpoint/2012/main"/>
     </p:ext>
   </p:extLst>
 </p:presentation>
@@ -190,7 +180,7 @@
         <p:spPr>
           <a:xfrm>
             <a:off x="0" y="0"/>
-            <a:ext cx="2971800" cy="457200"/>
+            <a:ext cx="2971800" cy="458788"/>
           </a:xfrm>
           <a:prstGeom prst="rect">
             <a:avLst/>
@@ -221,7 +211,7 @@
         <p:spPr>
           <a:xfrm>
             <a:off x="3884613" y="0"/>
-            <a:ext cx="2971800" cy="457200"/>
+            <a:ext cx="2971800" cy="458788"/>
           </a:xfrm>
           <a:prstGeom prst="rect">
             <a:avLst/>
@@ -235,9 +225,9 @@
             </a:lvl1pPr>
           </a:lstStyle>
           <a:p>
-            <a:fld id="{9A9F7FD5-2840-4607-A4CD-0A8A66D9D61D}" type="datetimeFigureOut">
+            <a:fld id="{6FB87CB2-66CB-454F-85D3-19EE1B79E95D}" type="datetimeFigureOut">
               <a:rPr lang="en-US" smtClean="0"/>
-              <a:t>12/6/2024</a:t>
+              <a:t>3/13/2026</a:t>
             </a:fld>
             <a:endParaRPr lang="en-US"/>
           </a:p>
@@ -255,8 +245,8 @@
         </p:nvSpPr>
         <p:spPr>
           <a:xfrm>
-            <a:off x="381000" y="685800"/>
-            <a:ext cx="6096000" cy="3429000"/>
+            <a:off x="685800" y="1143000"/>
+            <a:ext cx="5486400" cy="3086100"/>
           </a:xfrm>
           <a:prstGeom prst="rect">
             <a:avLst/>
@@ -288,8 +278,8 @@
         </p:nvSpPr>
         <p:spPr>
           <a:xfrm>
-            <a:off x="685800" y="4343400"/>
-            <a:ext cx="5486400" cy="4114800"/>
+            <a:off x="685800" y="4400550"/>
+            <a:ext cx="5486400" cy="3600450"/>
           </a:xfrm>
           <a:prstGeom prst="rect">
             <a:avLst/>
@@ -348,7 +338,7 @@
         <p:spPr>
           <a:xfrm>
             <a:off x="0" y="8685213"/>
-            <a:ext cx="2971800" cy="457200"/>
+            <a:ext cx="2971800" cy="458787"/>
           </a:xfrm>
           <a:prstGeom prst="rect">
             <a:avLst/>
@@ -379,7 +369,7 @@
         <p:spPr>
           <a:xfrm>
             <a:off x="3884613" y="8685213"/>
-            <a:ext cx="2971800" cy="457200"/>
+            <a:ext cx="2971800" cy="458787"/>
           </a:xfrm>
           <a:prstGeom prst="rect">
             <a:avLst/>
@@ -393,7 +383,7 @@
             </a:lvl1pPr>
           </a:lstStyle>
           <a:p>
-            <a:fld id="{BC7E913D-325D-4B30-8E23-50203DB584FD}" type="slidenum">
+            <a:fld id="{B5E27D9C-F8C9-4B2B-A91A-E477EB70CE25}" type="slidenum">
               <a:rPr lang="en-US" smtClean="0"/>
               <a:t>‹#›</a:t>
             </a:fld>
@@ -404,7 +394,7 @@
     </p:spTree>
     <p:extLst>
       <p:ext uri="{BB962C8B-B14F-4D97-AF65-F5344CB8AC3E}">
-        <p14:creationId xmlns:p14="http://schemas.microsoft.com/office/powerpoint/2010/main" val="3691005946"/>
+        <p14:creationId xmlns:p14="http://schemas.microsoft.com/office/powerpoint/2010/main" val="735016123"/>
       </p:ext>
     </p:extLst>
   </p:cSld>
@@ -607,7 +597,13 @@
       </p:grpSpPr>
       <p:sp>
         <p:nvSpPr>
-          <p:cNvPr id="2" name="Title 1"/>
+          <p:cNvPr id="2" name="Title 1">
+            <a:extLst>
+              <a:ext uri="{FF2B5EF4-FFF2-40B4-BE49-F238E27FC236}">
+                <a16:creationId xmlns:a16="http://schemas.microsoft.com/office/drawing/2014/main" id="{407A8D94-701F-50B7-FF63-239144983595}"/>
+              </a:ext>
+            </a:extLst>
+          </p:cNvPr>
           <p:cNvSpPr>
             <a:spLocks noGrp="1"/>
           </p:cNvSpPr>
@@ -617,13 +613,17 @@
         </p:nvSpPr>
         <p:spPr>
           <a:xfrm>
-            <a:off x="914400" y="2130426"/>
-            <a:ext cx="10363200" cy="1470025"/>
+            <a:off x="1524000" y="1122363"/>
+            <a:ext cx="9144000" cy="2387600"/>
           </a:xfrm>
         </p:spPr>
         <p:txBody>
-          <a:bodyPr/>
-          <a:lstStyle/>
+          <a:bodyPr anchor="b"/>
+          <a:lstStyle>
+            <a:lvl1pPr algn="ctr">
+              <a:defRPr sz="6000"/>
+            </a:lvl1pPr>
+          </a:lstStyle>
           <a:p>
             <a:r>
               <a:rPr lang="en-US"/>
@@ -634,7 +634,13 @@
       </p:sp>
       <p:sp>
         <p:nvSpPr>
-          <p:cNvPr id="3" name="Subtitle 2"/>
+          <p:cNvPr id="3" name="Subtitle 2">
+            <a:extLst>
+              <a:ext uri="{FF2B5EF4-FFF2-40B4-BE49-F238E27FC236}">
+                <a16:creationId xmlns:a16="http://schemas.microsoft.com/office/drawing/2014/main" id="{FF1BD39A-A942-599F-149A-747401D54607}"/>
+              </a:ext>
+            </a:extLst>
+          </p:cNvPr>
           <p:cNvSpPr>
             <a:spLocks noGrp="1"/>
           </p:cNvSpPr>
@@ -644,8 +650,8 @@
         </p:nvSpPr>
         <p:spPr>
           <a:xfrm>
-            <a:off x="1828800" y="3886200"/>
-            <a:ext cx="8534400" cy="1752600"/>
+            <a:off x="1524000" y="3602038"/>
+            <a:ext cx="9144000" cy="1655762"/>
           </a:xfrm>
         </p:spPr>
         <p:txBody>
@@ -653,93 +659,39 @@
           <a:lstStyle>
             <a:lvl1pPr marL="0" indent="0" algn="ctr">
               <a:buNone/>
-              <a:defRPr>
-                <a:solidFill>
-                  <a:schemeClr val="tx1">
-                    <a:tint val="75000"/>
-                  </a:schemeClr>
-                </a:solidFill>
-              </a:defRPr>
+              <a:defRPr sz="2400"/>
             </a:lvl1pPr>
             <a:lvl2pPr marL="457200" indent="0" algn="ctr">
               <a:buNone/>
-              <a:defRPr>
-                <a:solidFill>
-                  <a:schemeClr val="tx1">
-                    <a:tint val="75000"/>
-                  </a:schemeClr>
-                </a:solidFill>
-              </a:defRPr>
+              <a:defRPr sz="2000"/>
             </a:lvl2pPr>
             <a:lvl3pPr marL="914400" indent="0" algn="ctr">
               <a:buNone/>
-              <a:defRPr>
-                <a:solidFill>
-                  <a:schemeClr val="tx1">
-                    <a:tint val="75000"/>
-                  </a:schemeClr>
-                </a:solidFill>
-              </a:defRPr>
+              <a:defRPr sz="1800"/>
             </a:lvl3pPr>
             <a:lvl4pPr marL="1371600" indent="0" algn="ctr">
               <a:buNone/>
-              <a:defRPr>
-                <a:solidFill>
-                  <a:schemeClr val="tx1">
-                    <a:tint val="75000"/>
-                  </a:schemeClr>
-                </a:solidFill>
-              </a:defRPr>
+              <a:defRPr sz="1600"/>
             </a:lvl4pPr>
             <a:lvl5pPr marL="1828800" indent="0" algn="ctr">
               <a:buNone/>
-              <a:defRPr>
-                <a:solidFill>
-                  <a:schemeClr val="tx1">
-                    <a:tint val="75000"/>
-                  </a:schemeClr>
-                </a:solidFill>
-              </a:defRPr>
+              <a:defRPr sz="1600"/>
             </a:lvl5pPr>
             <a:lvl6pPr marL="2286000" indent="0" algn="ctr">
               <a:buNone/>
-              <a:defRPr>
-                <a:solidFill>
-                  <a:schemeClr val="tx1">
-                    <a:tint val="75000"/>
-                  </a:schemeClr>
-                </a:solidFill>
-              </a:defRPr>
+              <a:defRPr sz="1600"/>
             </a:lvl6pPr>
             <a:lvl7pPr marL="2743200" indent="0" algn="ctr">
               <a:buNone/>
-              <a:defRPr>
-                <a:solidFill>
-                  <a:schemeClr val="tx1">
-                    <a:tint val="75000"/>
-                  </a:schemeClr>
-                </a:solidFill>
-              </a:defRPr>
+              <a:defRPr sz="1600"/>
             </a:lvl7pPr>
             <a:lvl8pPr marL="3200400" indent="0" algn="ctr">
               <a:buNone/>
-              <a:defRPr>
-                <a:solidFill>
-                  <a:schemeClr val="tx1">
-                    <a:tint val="75000"/>
-                  </a:schemeClr>
-                </a:solidFill>
-              </a:defRPr>
+              <a:defRPr sz="1600"/>
             </a:lvl8pPr>
             <a:lvl9pPr marL="3657600" indent="0" algn="ctr">
               <a:buNone/>
-              <a:defRPr>
-                <a:solidFill>
-                  <a:schemeClr val="tx1">
-                    <a:tint val="75000"/>
-                  </a:schemeClr>
-                </a:solidFill>
-              </a:defRPr>
+              <a:defRPr sz="1600"/>
             </a:lvl9pPr>
           </a:lstStyle>
           <a:p>
@@ -752,7 +704,13 @@
       </p:sp>
       <p:sp>
         <p:nvSpPr>
-          <p:cNvPr id="4" name="Date Placeholder 3"/>
+          <p:cNvPr id="4" name="Date Placeholder 3">
+            <a:extLst>
+              <a:ext uri="{FF2B5EF4-FFF2-40B4-BE49-F238E27FC236}">
+                <a16:creationId xmlns:a16="http://schemas.microsoft.com/office/drawing/2014/main" id="{2F35134E-8798-2A87-98AE-0B134785D2DF}"/>
+              </a:ext>
+            </a:extLst>
+          </p:cNvPr>
           <p:cNvSpPr>
             <a:spLocks noGrp="1"/>
           </p:cNvSpPr>
@@ -765,9 +723,9 @@
           <a:bodyPr/>
           <a:lstStyle/>
           <a:p>
-            <a:fld id="{088A2421-D2CD-4522-A1BA-E4F59ED821B7}" type="datetime1">
+            <a:fld id="{28421D02-69CC-42C9-85CE-4F8B68ED22B8}" type="datetimeFigureOut">
               <a:rPr lang="en-US" smtClean="0"/>
-              <a:t>12/6/2024</a:t>
+              <a:t>3/13/2026</a:t>
             </a:fld>
             <a:endParaRPr lang="en-US"/>
           </a:p>
@@ -775,7 +733,13 @@
       </p:sp>
       <p:sp>
         <p:nvSpPr>
-          <p:cNvPr id="5" name="Footer Placeholder 4"/>
+          <p:cNvPr id="5" name="Footer Placeholder 4">
+            <a:extLst>
+              <a:ext uri="{FF2B5EF4-FFF2-40B4-BE49-F238E27FC236}">
+                <a16:creationId xmlns:a16="http://schemas.microsoft.com/office/drawing/2014/main" id="{E46803DE-E5A1-A42D-17E0-52D8A15FEEDF}"/>
+              </a:ext>
+            </a:extLst>
+          </p:cNvPr>
           <p:cNvSpPr>
             <a:spLocks noGrp="1"/>
           </p:cNvSpPr>
@@ -794,7 +758,13 @@
       </p:sp>
       <p:sp>
         <p:nvSpPr>
-          <p:cNvPr id="6" name="Slide Number Placeholder 5"/>
+          <p:cNvPr id="6" name="Slide Number Placeholder 5">
+            <a:extLst>
+              <a:ext uri="{FF2B5EF4-FFF2-40B4-BE49-F238E27FC236}">
+                <a16:creationId xmlns:a16="http://schemas.microsoft.com/office/drawing/2014/main" id="{9E08009D-BD52-D020-26A4-CCFF2596A0F5}"/>
+              </a:ext>
+            </a:extLst>
+          </p:cNvPr>
           <p:cNvSpPr>
             <a:spLocks noGrp="1"/>
           </p:cNvSpPr>
@@ -807,7 +777,7 @@
           <a:bodyPr/>
           <a:lstStyle/>
           <a:p>
-            <a:fld id="{86BADE50-950A-4D58-BFB2-FA2C6A8B385D}" type="slidenum">
+            <a:fld id="{48A6B0C1-9E0A-4C4A-808A-34C0E77FF2FF}" type="slidenum">
               <a:rPr lang="en-US" smtClean="0"/>
               <a:t>‹#›</a:t>
             </a:fld>
@@ -818,7 +788,7 @@
     </p:spTree>
     <p:extLst>
       <p:ext uri="{BB962C8B-B14F-4D97-AF65-F5344CB8AC3E}">
-        <p14:creationId xmlns:p14="http://schemas.microsoft.com/office/powerpoint/2010/main" val="2245229933"/>
+        <p14:creationId xmlns:p14="http://schemas.microsoft.com/office/powerpoint/2010/main" val="1675308419"/>
       </p:ext>
     </p:extLst>
   </p:cSld>
@@ -847,7 +817,13 @@
       </p:grpSpPr>
       <p:sp>
         <p:nvSpPr>
-          <p:cNvPr id="2" name="Title 1"/>
+          <p:cNvPr id="2" name="Title 1">
+            <a:extLst>
+              <a:ext uri="{FF2B5EF4-FFF2-40B4-BE49-F238E27FC236}">
+                <a16:creationId xmlns:a16="http://schemas.microsoft.com/office/drawing/2014/main" id="{C8FC0788-F665-F0AA-D34E-18CDC381E388}"/>
+              </a:ext>
+            </a:extLst>
+          </p:cNvPr>
           <p:cNvSpPr>
             <a:spLocks noGrp="1"/>
           </p:cNvSpPr>
@@ -869,7 +845,13 @@
       </p:sp>
       <p:sp>
         <p:nvSpPr>
-          <p:cNvPr id="3" name="Vertical Text Placeholder 2"/>
+          <p:cNvPr id="3" name="Vertical Text Placeholder 2">
+            <a:extLst>
+              <a:ext uri="{FF2B5EF4-FFF2-40B4-BE49-F238E27FC236}">
+                <a16:creationId xmlns:a16="http://schemas.microsoft.com/office/drawing/2014/main" id="{32D25BE1-D418-6610-B976-595A42D78D33}"/>
+              </a:ext>
+            </a:extLst>
+          </p:cNvPr>
           <p:cNvSpPr>
             <a:spLocks noGrp="1"/>
           </p:cNvSpPr>
@@ -920,7 +902,13 @@
       </p:sp>
       <p:sp>
         <p:nvSpPr>
-          <p:cNvPr id="4" name="Date Placeholder 3"/>
+          <p:cNvPr id="4" name="Date Placeholder 3">
+            <a:extLst>
+              <a:ext uri="{FF2B5EF4-FFF2-40B4-BE49-F238E27FC236}">
+                <a16:creationId xmlns:a16="http://schemas.microsoft.com/office/drawing/2014/main" id="{8F6C710E-4740-E186-8004-9F098E4B8AA8}"/>
+              </a:ext>
+            </a:extLst>
+          </p:cNvPr>
           <p:cNvSpPr>
             <a:spLocks noGrp="1"/>
           </p:cNvSpPr>
@@ -933,9 +921,9 @@
           <a:bodyPr/>
           <a:lstStyle/>
           <a:p>
-            <a:fld id="{BF0967E4-28CB-45C9-B82C-D6B22AD4F0EB}" type="datetime1">
+            <a:fld id="{28421D02-69CC-42C9-85CE-4F8B68ED22B8}" type="datetimeFigureOut">
               <a:rPr lang="en-US" smtClean="0"/>
-              <a:t>12/6/2024</a:t>
+              <a:t>3/13/2026</a:t>
             </a:fld>
             <a:endParaRPr lang="en-US"/>
           </a:p>
@@ -943,7 +931,13 @@
       </p:sp>
       <p:sp>
         <p:nvSpPr>
-          <p:cNvPr id="5" name="Footer Placeholder 4"/>
+          <p:cNvPr id="5" name="Footer Placeholder 4">
+            <a:extLst>
+              <a:ext uri="{FF2B5EF4-FFF2-40B4-BE49-F238E27FC236}">
+                <a16:creationId xmlns:a16="http://schemas.microsoft.com/office/drawing/2014/main" id="{63D57D91-6BF0-5F67-0BAA-BA3B5985E820}"/>
+              </a:ext>
+            </a:extLst>
+          </p:cNvPr>
           <p:cNvSpPr>
             <a:spLocks noGrp="1"/>
           </p:cNvSpPr>
@@ -962,7 +956,13 @@
       </p:sp>
       <p:sp>
         <p:nvSpPr>
-          <p:cNvPr id="6" name="Slide Number Placeholder 5"/>
+          <p:cNvPr id="6" name="Slide Number Placeholder 5">
+            <a:extLst>
+              <a:ext uri="{FF2B5EF4-FFF2-40B4-BE49-F238E27FC236}">
+                <a16:creationId xmlns:a16="http://schemas.microsoft.com/office/drawing/2014/main" id="{C44EB95B-64CF-ED1B-895D-0C15FB84A947}"/>
+              </a:ext>
+            </a:extLst>
+          </p:cNvPr>
           <p:cNvSpPr>
             <a:spLocks noGrp="1"/>
           </p:cNvSpPr>
@@ -975,7 +975,7 @@
           <a:bodyPr/>
           <a:lstStyle/>
           <a:p>
-            <a:fld id="{86BADE50-950A-4D58-BFB2-FA2C6A8B385D}" type="slidenum">
+            <a:fld id="{48A6B0C1-9E0A-4C4A-808A-34C0E77FF2FF}" type="slidenum">
               <a:rPr lang="en-US" smtClean="0"/>
               <a:t>‹#›</a:t>
             </a:fld>
@@ -986,7 +986,7 @@
     </p:spTree>
     <p:extLst>
       <p:ext uri="{BB962C8B-B14F-4D97-AF65-F5344CB8AC3E}">
-        <p14:creationId xmlns:p14="http://schemas.microsoft.com/office/powerpoint/2010/main" val="1265469927"/>
+        <p14:creationId xmlns:p14="http://schemas.microsoft.com/office/powerpoint/2010/main" val="1896071156"/>
       </p:ext>
     </p:extLst>
   </p:cSld>
@@ -1015,7 +1015,13 @@
       </p:grpSpPr>
       <p:sp>
         <p:nvSpPr>
-          <p:cNvPr id="2" name="Vertical Title 1"/>
+          <p:cNvPr id="2" name="Vertical Title 1">
+            <a:extLst>
+              <a:ext uri="{FF2B5EF4-FFF2-40B4-BE49-F238E27FC236}">
+                <a16:creationId xmlns:a16="http://schemas.microsoft.com/office/drawing/2014/main" id="{2C6B0D1A-0325-047A-3C56-DB7DC37D1F02}"/>
+              </a:ext>
+            </a:extLst>
+          </p:cNvPr>
           <p:cNvSpPr>
             <a:spLocks noGrp="1"/>
           </p:cNvSpPr>
@@ -1025,8 +1031,8 @@
         </p:nvSpPr>
         <p:spPr>
           <a:xfrm>
-            <a:off x="8839200" y="274639"/>
-            <a:ext cx="2743200" cy="5851525"/>
+            <a:off x="8724900" y="365125"/>
+            <a:ext cx="2628900" cy="5811838"/>
           </a:xfrm>
         </p:spPr>
         <p:txBody>
@@ -1042,7 +1048,13 @@
       </p:sp>
       <p:sp>
         <p:nvSpPr>
-          <p:cNvPr id="3" name="Vertical Text Placeholder 2"/>
+          <p:cNvPr id="3" name="Vertical Text Placeholder 2">
+            <a:extLst>
+              <a:ext uri="{FF2B5EF4-FFF2-40B4-BE49-F238E27FC236}">
+                <a16:creationId xmlns:a16="http://schemas.microsoft.com/office/drawing/2014/main" id="{542D4EC8-DF7A-722B-0985-B7E8ED8800CD}"/>
+              </a:ext>
+            </a:extLst>
+          </p:cNvPr>
           <p:cNvSpPr>
             <a:spLocks noGrp="1"/>
           </p:cNvSpPr>
@@ -1052,8 +1064,8 @@
         </p:nvSpPr>
         <p:spPr>
           <a:xfrm>
-            <a:off x="609600" y="274639"/>
-            <a:ext cx="8026400" cy="5851525"/>
+            <a:off x="838200" y="365125"/>
+            <a:ext cx="7734300" cy="5811838"/>
           </a:xfrm>
         </p:spPr>
         <p:txBody>
@@ -1098,7 +1110,13 @@
       </p:sp>
       <p:sp>
         <p:nvSpPr>
-          <p:cNvPr id="4" name="Date Placeholder 3"/>
+          <p:cNvPr id="4" name="Date Placeholder 3">
+            <a:extLst>
+              <a:ext uri="{FF2B5EF4-FFF2-40B4-BE49-F238E27FC236}">
+                <a16:creationId xmlns:a16="http://schemas.microsoft.com/office/drawing/2014/main" id="{4E9F5D96-5B5D-A0E1-6B7E-F894B33DE4BE}"/>
+              </a:ext>
+            </a:extLst>
+          </p:cNvPr>
           <p:cNvSpPr>
             <a:spLocks noGrp="1"/>
           </p:cNvSpPr>
@@ -1111,9 +1129,9 @@
           <a:bodyPr/>
           <a:lstStyle/>
           <a:p>
-            <a:fld id="{2454C693-B405-44E1-A127-B7CE8B45C1E1}" type="datetime1">
+            <a:fld id="{28421D02-69CC-42C9-85CE-4F8B68ED22B8}" type="datetimeFigureOut">
               <a:rPr lang="en-US" smtClean="0"/>
-              <a:t>12/6/2024</a:t>
+              <a:t>3/13/2026</a:t>
             </a:fld>
             <a:endParaRPr lang="en-US"/>
           </a:p>
@@ -1121,7 +1139,13 @@
       </p:sp>
       <p:sp>
         <p:nvSpPr>
-          <p:cNvPr id="5" name="Footer Placeholder 4"/>
+          <p:cNvPr id="5" name="Footer Placeholder 4">
+            <a:extLst>
+              <a:ext uri="{FF2B5EF4-FFF2-40B4-BE49-F238E27FC236}">
+                <a16:creationId xmlns:a16="http://schemas.microsoft.com/office/drawing/2014/main" id="{0841E58B-FD1B-5158-9002-DB7909020EFB}"/>
+              </a:ext>
+            </a:extLst>
+          </p:cNvPr>
           <p:cNvSpPr>
             <a:spLocks noGrp="1"/>
           </p:cNvSpPr>
@@ -1140,7 +1164,13 @@
       </p:sp>
       <p:sp>
         <p:nvSpPr>
-          <p:cNvPr id="6" name="Slide Number Placeholder 5"/>
+          <p:cNvPr id="6" name="Slide Number Placeholder 5">
+            <a:extLst>
+              <a:ext uri="{FF2B5EF4-FFF2-40B4-BE49-F238E27FC236}">
+                <a16:creationId xmlns:a16="http://schemas.microsoft.com/office/drawing/2014/main" id="{0526E6E6-5DB2-B08C-E98E-4CE4CABABD3F}"/>
+              </a:ext>
+            </a:extLst>
+          </p:cNvPr>
           <p:cNvSpPr>
             <a:spLocks noGrp="1"/>
           </p:cNvSpPr>
@@ -1153,7 +1183,7 @@
           <a:bodyPr/>
           <a:lstStyle/>
           <a:p>
-            <a:fld id="{86BADE50-950A-4D58-BFB2-FA2C6A8B385D}" type="slidenum">
+            <a:fld id="{48A6B0C1-9E0A-4C4A-808A-34C0E77FF2FF}" type="slidenum">
               <a:rPr lang="en-US" smtClean="0"/>
               <a:t>‹#›</a:t>
             </a:fld>
@@ -1164,7 +1194,7 @@
     </p:spTree>
     <p:extLst>
       <p:ext uri="{BB962C8B-B14F-4D97-AF65-F5344CB8AC3E}">
-        <p14:creationId xmlns:p14="http://schemas.microsoft.com/office/powerpoint/2010/main" val="2444477724"/>
+        <p14:creationId xmlns:p14="http://schemas.microsoft.com/office/powerpoint/2010/main" val="3380940199"/>
       </p:ext>
     </p:extLst>
   </p:cSld>
@@ -1279,7 +1309,7 @@
     </p:spTree>
     <p:extLst>
       <p:ext uri="{BB962C8B-B14F-4D97-AF65-F5344CB8AC3E}">
-        <p14:creationId xmlns:p14="http://schemas.microsoft.com/office/powerpoint/2010/main" val="2833307592"/>
+        <p14:creationId xmlns:p14="http://schemas.microsoft.com/office/powerpoint/2010/main" val="1615786148"/>
       </p:ext>
     </p:extLst>
   </p:cSld>
@@ -1308,7 +1338,13 @@
       </p:grpSpPr>
       <p:sp>
         <p:nvSpPr>
-          <p:cNvPr id="2" name="Title 1"/>
+          <p:cNvPr id="2" name="Title 1">
+            <a:extLst>
+              <a:ext uri="{FF2B5EF4-FFF2-40B4-BE49-F238E27FC236}">
+                <a16:creationId xmlns:a16="http://schemas.microsoft.com/office/drawing/2014/main" id="{75ED3513-3DBF-F295-0635-A76FAD8F751B}"/>
+              </a:ext>
+            </a:extLst>
+          </p:cNvPr>
           <p:cNvSpPr>
             <a:spLocks noGrp="1"/>
           </p:cNvSpPr>
@@ -1330,7 +1366,13 @@
       </p:sp>
       <p:sp>
         <p:nvSpPr>
-          <p:cNvPr id="3" name="Content Placeholder 2"/>
+          <p:cNvPr id="3" name="Content Placeholder 2">
+            <a:extLst>
+              <a:ext uri="{FF2B5EF4-FFF2-40B4-BE49-F238E27FC236}">
+                <a16:creationId xmlns:a16="http://schemas.microsoft.com/office/drawing/2014/main" id="{483A398C-CAEC-53AA-8A8B-28B4B6EFE84F}"/>
+              </a:ext>
+            </a:extLst>
+          </p:cNvPr>
           <p:cNvSpPr>
             <a:spLocks noGrp="1"/>
           </p:cNvSpPr>
@@ -1381,7 +1423,13 @@
       </p:sp>
       <p:sp>
         <p:nvSpPr>
-          <p:cNvPr id="4" name="Date Placeholder 3"/>
+          <p:cNvPr id="4" name="Date Placeholder 3">
+            <a:extLst>
+              <a:ext uri="{FF2B5EF4-FFF2-40B4-BE49-F238E27FC236}">
+                <a16:creationId xmlns:a16="http://schemas.microsoft.com/office/drawing/2014/main" id="{8042AEDF-9628-E07A-C6FB-A23F1B37D36C}"/>
+              </a:ext>
+            </a:extLst>
+          </p:cNvPr>
           <p:cNvSpPr>
             <a:spLocks noGrp="1"/>
           </p:cNvSpPr>
@@ -1394,9 +1442,9 @@
           <a:bodyPr/>
           <a:lstStyle/>
           <a:p>
-            <a:fld id="{0B5AF985-6D44-417A-9881-D208468CBA07}" type="datetime1">
+            <a:fld id="{28421D02-69CC-42C9-85CE-4F8B68ED22B8}" type="datetimeFigureOut">
               <a:rPr lang="en-US" smtClean="0"/>
-              <a:t>12/6/2024</a:t>
+              <a:t>3/13/2026</a:t>
             </a:fld>
             <a:endParaRPr lang="en-US"/>
           </a:p>
@@ -1404,7 +1452,13 @@
       </p:sp>
       <p:sp>
         <p:nvSpPr>
-          <p:cNvPr id="5" name="Footer Placeholder 4"/>
+          <p:cNvPr id="5" name="Footer Placeholder 4">
+            <a:extLst>
+              <a:ext uri="{FF2B5EF4-FFF2-40B4-BE49-F238E27FC236}">
+                <a16:creationId xmlns:a16="http://schemas.microsoft.com/office/drawing/2014/main" id="{59AD4231-DF5D-E75E-40A2-4490E3864786}"/>
+              </a:ext>
+            </a:extLst>
+          </p:cNvPr>
           <p:cNvSpPr>
             <a:spLocks noGrp="1"/>
           </p:cNvSpPr>
@@ -1423,7 +1477,13 @@
       </p:sp>
       <p:sp>
         <p:nvSpPr>
-          <p:cNvPr id="6" name="Slide Number Placeholder 5"/>
+          <p:cNvPr id="6" name="Slide Number Placeholder 5">
+            <a:extLst>
+              <a:ext uri="{FF2B5EF4-FFF2-40B4-BE49-F238E27FC236}">
+                <a16:creationId xmlns:a16="http://schemas.microsoft.com/office/drawing/2014/main" id="{A3461DB8-8E9A-0329-3CC7-DD8BE3960F1C}"/>
+              </a:ext>
+            </a:extLst>
+          </p:cNvPr>
           <p:cNvSpPr>
             <a:spLocks noGrp="1"/>
           </p:cNvSpPr>
@@ -1436,7 +1496,7 @@
           <a:bodyPr/>
           <a:lstStyle/>
           <a:p>
-            <a:fld id="{86BADE50-950A-4D58-BFB2-FA2C6A8B385D}" type="slidenum">
+            <a:fld id="{48A6B0C1-9E0A-4C4A-808A-34C0E77FF2FF}" type="slidenum">
               <a:rPr lang="en-US" smtClean="0"/>
               <a:t>‹#›</a:t>
             </a:fld>
@@ -1447,7 +1507,7 @@
     </p:spTree>
     <p:extLst>
       <p:ext uri="{BB962C8B-B14F-4D97-AF65-F5344CB8AC3E}">
-        <p14:creationId xmlns:p14="http://schemas.microsoft.com/office/powerpoint/2010/main" val="952323387"/>
+        <p14:creationId xmlns:p14="http://schemas.microsoft.com/office/powerpoint/2010/main" val="305728001"/>
       </p:ext>
     </p:extLst>
   </p:cSld>
@@ -1476,7 +1536,13 @@
       </p:grpSpPr>
       <p:sp>
         <p:nvSpPr>
-          <p:cNvPr id="2" name="Title 1"/>
+          <p:cNvPr id="2" name="Title 1">
+            <a:extLst>
+              <a:ext uri="{FF2B5EF4-FFF2-40B4-BE49-F238E27FC236}">
+                <a16:creationId xmlns:a16="http://schemas.microsoft.com/office/drawing/2014/main" id="{189B190C-5088-0FD4-FA3D-07D222B9FA35}"/>
+              </a:ext>
+            </a:extLst>
+          </p:cNvPr>
           <p:cNvSpPr>
             <a:spLocks noGrp="1"/>
           </p:cNvSpPr>
@@ -1486,15 +1552,15 @@
         </p:nvSpPr>
         <p:spPr>
           <a:xfrm>
-            <a:off x="963084" y="4406901"/>
-            <a:ext cx="10363200" cy="1362075"/>
+            <a:off x="831850" y="1709738"/>
+            <a:ext cx="10515600" cy="2852737"/>
           </a:xfrm>
         </p:spPr>
         <p:txBody>
-          <a:bodyPr anchor="t"/>
+          <a:bodyPr anchor="b"/>
           <a:lstStyle>
-            <a:lvl1pPr algn="l">
-              <a:defRPr sz="4000" b="1" cap="all"/>
+            <a:lvl1pPr>
+              <a:defRPr sz="6000"/>
             </a:lvl1pPr>
           </a:lstStyle>
           <a:p>
@@ -1507,7 +1573,13 @@
       </p:sp>
       <p:sp>
         <p:nvSpPr>
-          <p:cNvPr id="3" name="Text Placeholder 2"/>
+          <p:cNvPr id="3" name="Text Placeholder 2">
+            <a:extLst>
+              <a:ext uri="{FF2B5EF4-FFF2-40B4-BE49-F238E27FC236}">
+                <a16:creationId xmlns:a16="http://schemas.microsoft.com/office/drawing/2014/main" id="{EEE2422D-2D16-CCA8-2A1C-E13A1E0646C6}"/>
+              </a:ext>
+            </a:extLst>
+          </p:cNvPr>
           <p:cNvSpPr>
             <a:spLocks noGrp="1"/>
           </p:cNvSpPr>
@@ -1517,16 +1589,16 @@
         </p:nvSpPr>
         <p:spPr>
           <a:xfrm>
-            <a:off x="963084" y="2906713"/>
-            <a:ext cx="10363200" cy="1500187"/>
+            <a:off x="831850" y="4589463"/>
+            <a:ext cx="10515600" cy="1500187"/>
           </a:xfrm>
         </p:spPr>
         <p:txBody>
-          <a:bodyPr anchor="b"/>
+          <a:bodyPr/>
           <a:lstStyle>
             <a:lvl1pPr marL="0" indent="0">
               <a:buNone/>
-              <a:defRPr sz="2000">
+              <a:defRPr sz="2400">
                 <a:solidFill>
                   <a:schemeClr val="tx1">
                     <a:tint val="75000"/>
@@ -1536,7 +1608,7 @@
             </a:lvl1pPr>
             <a:lvl2pPr marL="457200" indent="0">
               <a:buNone/>
-              <a:defRPr sz="1800">
+              <a:defRPr sz="2000">
                 <a:solidFill>
                   <a:schemeClr val="tx1">
                     <a:tint val="75000"/>
@@ -1546,7 +1618,7 @@
             </a:lvl2pPr>
             <a:lvl3pPr marL="914400" indent="0">
               <a:buNone/>
-              <a:defRPr sz="1600">
+              <a:defRPr sz="1800">
                 <a:solidFill>
                   <a:schemeClr val="tx1">
                     <a:tint val="75000"/>
@@ -1556,7 +1628,7 @@
             </a:lvl3pPr>
             <a:lvl4pPr marL="1371600" indent="0">
               <a:buNone/>
-              <a:defRPr sz="1400">
+              <a:defRPr sz="1600">
                 <a:solidFill>
                   <a:schemeClr val="tx1">
                     <a:tint val="75000"/>
@@ -1566,7 +1638,7 @@
             </a:lvl4pPr>
             <a:lvl5pPr marL="1828800" indent="0">
               <a:buNone/>
-              <a:defRPr sz="1400">
+              <a:defRPr sz="1600">
                 <a:solidFill>
                   <a:schemeClr val="tx1">
                     <a:tint val="75000"/>
@@ -1576,7 +1648,7 @@
             </a:lvl5pPr>
             <a:lvl6pPr marL="2286000" indent="0">
               <a:buNone/>
-              <a:defRPr sz="1400">
+              <a:defRPr sz="1600">
                 <a:solidFill>
                   <a:schemeClr val="tx1">
                     <a:tint val="75000"/>
@@ -1586,7 +1658,7 @@
             </a:lvl6pPr>
             <a:lvl7pPr marL="2743200" indent="0">
               <a:buNone/>
-              <a:defRPr sz="1400">
+              <a:defRPr sz="1600">
                 <a:solidFill>
                   <a:schemeClr val="tx1">
                     <a:tint val="75000"/>
@@ -1596,7 +1668,7 @@
             </a:lvl7pPr>
             <a:lvl8pPr marL="3200400" indent="0">
               <a:buNone/>
-              <a:defRPr sz="1400">
+              <a:defRPr sz="1600">
                 <a:solidFill>
                   <a:schemeClr val="tx1">
                     <a:tint val="75000"/>
@@ -1606,7 +1678,7 @@
             </a:lvl8pPr>
             <a:lvl9pPr marL="3657600" indent="0">
               <a:buNone/>
-              <a:defRPr sz="1400">
+              <a:defRPr sz="1600">
                 <a:solidFill>
                   <a:schemeClr val="tx1">
                     <a:tint val="75000"/>
@@ -1626,7 +1698,13 @@
       </p:sp>
       <p:sp>
         <p:nvSpPr>
-          <p:cNvPr id="4" name="Date Placeholder 3"/>
+          <p:cNvPr id="4" name="Date Placeholder 3">
+            <a:extLst>
+              <a:ext uri="{FF2B5EF4-FFF2-40B4-BE49-F238E27FC236}">
+                <a16:creationId xmlns:a16="http://schemas.microsoft.com/office/drawing/2014/main" id="{F56C9900-661D-64EA-83FB-0318C266A8D4}"/>
+              </a:ext>
+            </a:extLst>
+          </p:cNvPr>
           <p:cNvSpPr>
             <a:spLocks noGrp="1"/>
           </p:cNvSpPr>
@@ -1639,9 +1717,9 @@
           <a:bodyPr/>
           <a:lstStyle/>
           <a:p>
-            <a:fld id="{3A604A86-E8D2-4E57-8D6D-61E2D175474B}" type="datetime1">
+            <a:fld id="{28421D02-69CC-42C9-85CE-4F8B68ED22B8}" type="datetimeFigureOut">
               <a:rPr lang="en-US" smtClean="0"/>
-              <a:t>12/6/2024</a:t>
+              <a:t>3/13/2026</a:t>
             </a:fld>
             <a:endParaRPr lang="en-US"/>
           </a:p>
@@ -1649,7 +1727,13 @@
       </p:sp>
       <p:sp>
         <p:nvSpPr>
-          <p:cNvPr id="5" name="Footer Placeholder 4"/>
+          <p:cNvPr id="5" name="Footer Placeholder 4">
+            <a:extLst>
+              <a:ext uri="{FF2B5EF4-FFF2-40B4-BE49-F238E27FC236}">
+                <a16:creationId xmlns:a16="http://schemas.microsoft.com/office/drawing/2014/main" id="{6CAF216F-818C-AE83-8D4F-42EC3C94239E}"/>
+              </a:ext>
+            </a:extLst>
+          </p:cNvPr>
           <p:cNvSpPr>
             <a:spLocks noGrp="1"/>
           </p:cNvSpPr>
@@ -1668,7 +1752,13 @@
       </p:sp>
       <p:sp>
         <p:nvSpPr>
-          <p:cNvPr id="6" name="Slide Number Placeholder 5"/>
+          <p:cNvPr id="6" name="Slide Number Placeholder 5">
+            <a:extLst>
+              <a:ext uri="{FF2B5EF4-FFF2-40B4-BE49-F238E27FC236}">
+                <a16:creationId xmlns:a16="http://schemas.microsoft.com/office/drawing/2014/main" id="{EB1494A3-F80F-EC41-DDC0-726FC63A831E}"/>
+              </a:ext>
+            </a:extLst>
+          </p:cNvPr>
           <p:cNvSpPr>
             <a:spLocks noGrp="1"/>
           </p:cNvSpPr>
@@ -1681,7 +1771,7 @@
           <a:bodyPr/>
           <a:lstStyle/>
           <a:p>
-            <a:fld id="{86BADE50-950A-4D58-BFB2-FA2C6A8B385D}" type="slidenum">
+            <a:fld id="{48A6B0C1-9E0A-4C4A-808A-34C0E77FF2FF}" type="slidenum">
               <a:rPr lang="en-US" smtClean="0"/>
               <a:t>‹#›</a:t>
             </a:fld>
@@ -1692,7 +1782,7 @@
     </p:spTree>
     <p:extLst>
       <p:ext uri="{BB962C8B-B14F-4D97-AF65-F5344CB8AC3E}">
-        <p14:creationId xmlns:p14="http://schemas.microsoft.com/office/powerpoint/2010/main" val="4168147138"/>
+        <p14:creationId xmlns:p14="http://schemas.microsoft.com/office/powerpoint/2010/main" val="1195910252"/>
       </p:ext>
     </p:extLst>
   </p:cSld>
@@ -1721,7 +1811,13 @@
       </p:grpSpPr>
       <p:sp>
         <p:nvSpPr>
-          <p:cNvPr id="2" name="Title 1"/>
+          <p:cNvPr id="2" name="Title 1">
+            <a:extLst>
+              <a:ext uri="{FF2B5EF4-FFF2-40B4-BE49-F238E27FC236}">
+                <a16:creationId xmlns:a16="http://schemas.microsoft.com/office/drawing/2014/main" id="{14BF6897-8ADC-82FB-24C1-148BB152CAE7}"/>
+              </a:ext>
+            </a:extLst>
+          </p:cNvPr>
           <p:cNvSpPr>
             <a:spLocks noGrp="1"/>
           </p:cNvSpPr>
@@ -1743,7 +1839,13 @@
       </p:sp>
       <p:sp>
         <p:nvSpPr>
-          <p:cNvPr id="3" name="Content Placeholder 2"/>
+          <p:cNvPr id="3" name="Content Placeholder 2">
+            <a:extLst>
+              <a:ext uri="{FF2B5EF4-FFF2-40B4-BE49-F238E27FC236}">
+                <a16:creationId xmlns:a16="http://schemas.microsoft.com/office/drawing/2014/main" id="{12607461-A71F-ECE6-AE85-5EA3DB5E18D6}"/>
+              </a:ext>
+            </a:extLst>
+          </p:cNvPr>
           <p:cNvSpPr>
             <a:spLocks noGrp="1"/>
           </p:cNvSpPr>
@@ -1753,41 +1855,13 @@
         </p:nvSpPr>
         <p:spPr>
           <a:xfrm>
-            <a:off x="609600" y="1600201"/>
-            <a:ext cx="5384800" cy="4525963"/>
+            <a:off x="838200" y="1825625"/>
+            <a:ext cx="5181600" cy="4351338"/>
           </a:xfrm>
         </p:spPr>
         <p:txBody>
           <a:bodyPr/>
-          <a:lstStyle>
-            <a:lvl1pPr>
-              <a:defRPr sz="2800"/>
-            </a:lvl1pPr>
-            <a:lvl2pPr>
-              <a:defRPr sz="2400"/>
-            </a:lvl2pPr>
-            <a:lvl3pPr>
-              <a:defRPr sz="2000"/>
-            </a:lvl3pPr>
-            <a:lvl4pPr>
-              <a:defRPr sz="1800"/>
-            </a:lvl4pPr>
-            <a:lvl5pPr>
-              <a:defRPr sz="1800"/>
-            </a:lvl5pPr>
-            <a:lvl6pPr>
-              <a:defRPr sz="1800"/>
-            </a:lvl6pPr>
-            <a:lvl7pPr>
-              <a:defRPr sz="1800"/>
-            </a:lvl7pPr>
-            <a:lvl8pPr>
-              <a:defRPr sz="1800"/>
-            </a:lvl8pPr>
-            <a:lvl9pPr>
-              <a:defRPr sz="1800"/>
-            </a:lvl9pPr>
-          </a:lstStyle>
+          <a:lstStyle/>
           <a:p>
             <a:pPr lvl="0"/>
             <a:r>
@@ -1827,7 +1901,13 @@
       </p:sp>
       <p:sp>
         <p:nvSpPr>
-          <p:cNvPr id="4" name="Content Placeholder 3"/>
+          <p:cNvPr id="4" name="Content Placeholder 3">
+            <a:extLst>
+              <a:ext uri="{FF2B5EF4-FFF2-40B4-BE49-F238E27FC236}">
+                <a16:creationId xmlns:a16="http://schemas.microsoft.com/office/drawing/2014/main" id="{3BD9E8EA-550B-F0DB-2472-AE2D0456E7C6}"/>
+              </a:ext>
+            </a:extLst>
+          </p:cNvPr>
           <p:cNvSpPr>
             <a:spLocks noGrp="1"/>
           </p:cNvSpPr>
@@ -1837,41 +1917,13 @@
         </p:nvSpPr>
         <p:spPr>
           <a:xfrm>
-            <a:off x="6197600" y="1600201"/>
-            <a:ext cx="5384800" cy="4525963"/>
+            <a:off x="6172200" y="1825625"/>
+            <a:ext cx="5181600" cy="4351338"/>
           </a:xfrm>
         </p:spPr>
         <p:txBody>
           <a:bodyPr/>
-          <a:lstStyle>
-            <a:lvl1pPr>
-              <a:defRPr sz="2800"/>
-            </a:lvl1pPr>
-            <a:lvl2pPr>
-              <a:defRPr sz="2400"/>
-            </a:lvl2pPr>
-            <a:lvl3pPr>
-              <a:defRPr sz="2000"/>
-            </a:lvl3pPr>
-            <a:lvl4pPr>
-              <a:defRPr sz="1800"/>
-            </a:lvl4pPr>
-            <a:lvl5pPr>
-              <a:defRPr sz="1800"/>
-            </a:lvl5pPr>
-            <a:lvl6pPr>
-              <a:defRPr sz="1800"/>
-            </a:lvl6pPr>
-            <a:lvl7pPr>
-              <a:defRPr sz="1800"/>
-            </a:lvl7pPr>
-            <a:lvl8pPr>
-              <a:defRPr sz="1800"/>
-            </a:lvl8pPr>
-            <a:lvl9pPr>
-              <a:defRPr sz="1800"/>
-            </a:lvl9pPr>
-          </a:lstStyle>
+          <a:lstStyle/>
           <a:p>
             <a:pPr lvl="0"/>
             <a:r>
@@ -1911,7 +1963,13 @@
       </p:sp>
       <p:sp>
         <p:nvSpPr>
-          <p:cNvPr id="5" name="Date Placeholder 4"/>
+          <p:cNvPr id="5" name="Date Placeholder 4">
+            <a:extLst>
+              <a:ext uri="{FF2B5EF4-FFF2-40B4-BE49-F238E27FC236}">
+                <a16:creationId xmlns:a16="http://schemas.microsoft.com/office/drawing/2014/main" id="{8FBA28DD-EC75-9F30-A7D3-C90A8D02DC59}"/>
+              </a:ext>
+            </a:extLst>
+          </p:cNvPr>
           <p:cNvSpPr>
             <a:spLocks noGrp="1"/>
           </p:cNvSpPr>
@@ -1924,9 +1982,9 @@
           <a:bodyPr/>
           <a:lstStyle/>
           <a:p>
-            <a:fld id="{DC921DF3-1FB0-45DC-97EF-461960E13574}" type="datetime1">
+            <a:fld id="{28421D02-69CC-42C9-85CE-4F8B68ED22B8}" type="datetimeFigureOut">
               <a:rPr lang="en-US" smtClean="0"/>
-              <a:t>12/6/2024</a:t>
+              <a:t>3/13/2026</a:t>
             </a:fld>
             <a:endParaRPr lang="en-US"/>
           </a:p>
@@ -1934,7 +1992,13 @@
       </p:sp>
       <p:sp>
         <p:nvSpPr>
-          <p:cNvPr id="6" name="Footer Placeholder 5"/>
+          <p:cNvPr id="6" name="Footer Placeholder 5">
+            <a:extLst>
+              <a:ext uri="{FF2B5EF4-FFF2-40B4-BE49-F238E27FC236}">
+                <a16:creationId xmlns:a16="http://schemas.microsoft.com/office/drawing/2014/main" id="{4B3D4F3C-0167-D8D5-E58E-83645CE37A47}"/>
+              </a:ext>
+            </a:extLst>
+          </p:cNvPr>
           <p:cNvSpPr>
             <a:spLocks noGrp="1"/>
           </p:cNvSpPr>
@@ -1953,7 +2017,13 @@
       </p:sp>
       <p:sp>
         <p:nvSpPr>
-          <p:cNvPr id="7" name="Slide Number Placeholder 6"/>
+          <p:cNvPr id="7" name="Slide Number Placeholder 6">
+            <a:extLst>
+              <a:ext uri="{FF2B5EF4-FFF2-40B4-BE49-F238E27FC236}">
+                <a16:creationId xmlns:a16="http://schemas.microsoft.com/office/drawing/2014/main" id="{6496DDF0-EBE9-4CB3-A532-8F8C26FCF3A1}"/>
+              </a:ext>
+            </a:extLst>
+          </p:cNvPr>
           <p:cNvSpPr>
             <a:spLocks noGrp="1"/>
           </p:cNvSpPr>
@@ -1966,7 +2036,7 @@
           <a:bodyPr/>
           <a:lstStyle/>
           <a:p>
-            <a:fld id="{86BADE50-950A-4D58-BFB2-FA2C6A8B385D}" type="slidenum">
+            <a:fld id="{48A6B0C1-9E0A-4C4A-808A-34C0E77FF2FF}" type="slidenum">
               <a:rPr lang="en-US" smtClean="0"/>
               <a:t>‹#›</a:t>
             </a:fld>
@@ -1977,7 +2047,7 @@
     </p:spTree>
     <p:extLst>
       <p:ext uri="{BB962C8B-B14F-4D97-AF65-F5344CB8AC3E}">
-        <p14:creationId xmlns:p14="http://schemas.microsoft.com/office/powerpoint/2010/main" val="3119124462"/>
+        <p14:creationId xmlns:p14="http://schemas.microsoft.com/office/powerpoint/2010/main" val="3621648924"/>
       </p:ext>
     </p:extLst>
   </p:cSld>
@@ -2006,7 +2076,13 @@
       </p:grpSpPr>
       <p:sp>
         <p:nvSpPr>
-          <p:cNvPr id="2" name="Title 1"/>
+          <p:cNvPr id="2" name="Title 1">
+            <a:extLst>
+              <a:ext uri="{FF2B5EF4-FFF2-40B4-BE49-F238E27FC236}">
+                <a16:creationId xmlns:a16="http://schemas.microsoft.com/office/drawing/2014/main" id="{5ABEBC21-07E8-90D6-8FD3-4B7809D35580}"/>
+              </a:ext>
+            </a:extLst>
+          </p:cNvPr>
           <p:cNvSpPr>
             <a:spLocks noGrp="1"/>
           </p:cNvSpPr>
@@ -2014,14 +2090,15 @@
             <p:ph type="title"/>
           </p:nvPr>
         </p:nvSpPr>
-        <p:spPr/>
+        <p:spPr>
+          <a:xfrm>
+            <a:off x="839788" y="365125"/>
+            <a:ext cx="10515600" cy="1325563"/>
+          </a:xfrm>
+        </p:spPr>
         <p:txBody>
           <a:bodyPr/>
-          <a:lstStyle>
-            <a:lvl1pPr>
-              <a:defRPr/>
-            </a:lvl1pPr>
-          </a:lstStyle>
+          <a:lstStyle/>
           <a:p>
             <a:r>
               <a:rPr lang="en-US"/>
@@ -2032,7 +2109,13 @@
       </p:sp>
       <p:sp>
         <p:nvSpPr>
-          <p:cNvPr id="3" name="Text Placeholder 2"/>
+          <p:cNvPr id="3" name="Text Placeholder 2">
+            <a:extLst>
+              <a:ext uri="{FF2B5EF4-FFF2-40B4-BE49-F238E27FC236}">
+                <a16:creationId xmlns:a16="http://schemas.microsoft.com/office/drawing/2014/main" id="{658688B1-01DC-A6B4-1C44-C73416EC04F4}"/>
+              </a:ext>
+            </a:extLst>
+          </p:cNvPr>
           <p:cNvSpPr>
             <a:spLocks noGrp="1"/>
           </p:cNvSpPr>
@@ -2042,8 +2125,8 @@
         </p:nvSpPr>
         <p:spPr>
           <a:xfrm>
-            <a:off x="609600" y="1535113"/>
-            <a:ext cx="5386917" cy="639762"/>
+            <a:off x="839788" y="1681163"/>
+            <a:ext cx="5157787" cy="823912"/>
           </a:xfrm>
         </p:spPr>
         <p:txBody>
@@ -2097,7 +2180,13 @@
       </p:sp>
       <p:sp>
         <p:nvSpPr>
-          <p:cNvPr id="4" name="Content Placeholder 3"/>
+          <p:cNvPr id="4" name="Content Placeholder 3">
+            <a:extLst>
+              <a:ext uri="{FF2B5EF4-FFF2-40B4-BE49-F238E27FC236}">
+                <a16:creationId xmlns:a16="http://schemas.microsoft.com/office/drawing/2014/main" id="{DE4004C5-4EEE-C9A3-0FFF-B154F5B9A8C0}"/>
+              </a:ext>
+            </a:extLst>
+          </p:cNvPr>
           <p:cNvSpPr>
             <a:spLocks noGrp="1"/>
           </p:cNvSpPr>
@@ -2107,41 +2196,13 @@
         </p:nvSpPr>
         <p:spPr>
           <a:xfrm>
-            <a:off x="609600" y="2174875"/>
-            <a:ext cx="5386917" cy="3951288"/>
+            <a:off x="839788" y="2505075"/>
+            <a:ext cx="5157787" cy="3684588"/>
           </a:xfrm>
         </p:spPr>
         <p:txBody>
           <a:bodyPr/>
-          <a:lstStyle>
-            <a:lvl1pPr>
-              <a:defRPr sz="2400"/>
-            </a:lvl1pPr>
-            <a:lvl2pPr>
-              <a:defRPr sz="2000"/>
-            </a:lvl2pPr>
-            <a:lvl3pPr>
-              <a:defRPr sz="1800"/>
-            </a:lvl3pPr>
-            <a:lvl4pPr>
-              <a:defRPr sz="1600"/>
-            </a:lvl4pPr>
-            <a:lvl5pPr>
-              <a:defRPr sz="1600"/>
-            </a:lvl5pPr>
-            <a:lvl6pPr>
-              <a:defRPr sz="1600"/>
-            </a:lvl6pPr>
-            <a:lvl7pPr>
-              <a:defRPr sz="1600"/>
-            </a:lvl7pPr>
-            <a:lvl8pPr>
-              <a:defRPr sz="1600"/>
-            </a:lvl8pPr>
-            <a:lvl9pPr>
-              <a:defRPr sz="1600"/>
-            </a:lvl9pPr>
-          </a:lstStyle>
+          <a:lstStyle/>
           <a:p>
             <a:pPr lvl="0"/>
             <a:r>
@@ -2181,7 +2242,13 @@
       </p:sp>
       <p:sp>
         <p:nvSpPr>
-          <p:cNvPr id="5" name="Text Placeholder 4"/>
+          <p:cNvPr id="5" name="Text Placeholder 4">
+            <a:extLst>
+              <a:ext uri="{FF2B5EF4-FFF2-40B4-BE49-F238E27FC236}">
+                <a16:creationId xmlns:a16="http://schemas.microsoft.com/office/drawing/2014/main" id="{55C95CA1-99E7-80CC-FF66-5C2F25904667}"/>
+              </a:ext>
+            </a:extLst>
+          </p:cNvPr>
           <p:cNvSpPr>
             <a:spLocks noGrp="1"/>
           </p:cNvSpPr>
@@ -2191,8 +2258,8 @@
         </p:nvSpPr>
         <p:spPr>
           <a:xfrm>
-            <a:off x="6193368" y="1535113"/>
-            <a:ext cx="5389033" cy="639762"/>
+            <a:off x="6172200" y="1681163"/>
+            <a:ext cx="5183188" cy="823912"/>
           </a:xfrm>
         </p:spPr>
         <p:txBody>
@@ -2246,7 +2313,13 @@
       </p:sp>
       <p:sp>
         <p:nvSpPr>
-          <p:cNvPr id="6" name="Content Placeholder 5"/>
+          <p:cNvPr id="6" name="Content Placeholder 5">
+            <a:extLst>
+              <a:ext uri="{FF2B5EF4-FFF2-40B4-BE49-F238E27FC236}">
+                <a16:creationId xmlns:a16="http://schemas.microsoft.com/office/drawing/2014/main" id="{3621CBD4-5851-D78F-5249-59CDD8C9BC77}"/>
+              </a:ext>
+            </a:extLst>
+          </p:cNvPr>
           <p:cNvSpPr>
             <a:spLocks noGrp="1"/>
           </p:cNvSpPr>
@@ -2256,41 +2329,13 @@
         </p:nvSpPr>
         <p:spPr>
           <a:xfrm>
-            <a:off x="6193368" y="2174875"/>
-            <a:ext cx="5389033" cy="3951288"/>
+            <a:off x="6172200" y="2505075"/>
+            <a:ext cx="5183188" cy="3684588"/>
           </a:xfrm>
         </p:spPr>
         <p:txBody>
           <a:bodyPr/>
-          <a:lstStyle>
-            <a:lvl1pPr>
-              <a:defRPr sz="2400"/>
-            </a:lvl1pPr>
-            <a:lvl2pPr>
-              <a:defRPr sz="2000"/>
-            </a:lvl2pPr>
-            <a:lvl3pPr>
-              <a:defRPr sz="1800"/>
-            </a:lvl3pPr>
-            <a:lvl4pPr>
-              <a:defRPr sz="1600"/>
-            </a:lvl4pPr>
-            <a:lvl5pPr>
-              <a:defRPr sz="1600"/>
-            </a:lvl5pPr>
-            <a:lvl6pPr>
-              <a:defRPr sz="1600"/>
-            </a:lvl6pPr>
-            <a:lvl7pPr>
-              <a:defRPr sz="1600"/>
-            </a:lvl7pPr>
-            <a:lvl8pPr>
-              <a:defRPr sz="1600"/>
-            </a:lvl8pPr>
-            <a:lvl9pPr>
-              <a:defRPr sz="1600"/>
-            </a:lvl9pPr>
-          </a:lstStyle>
+          <a:lstStyle/>
           <a:p>
             <a:pPr lvl="0"/>
             <a:r>
@@ -2330,7 +2375,13 @@
       </p:sp>
       <p:sp>
         <p:nvSpPr>
-          <p:cNvPr id="7" name="Date Placeholder 6"/>
+          <p:cNvPr id="7" name="Date Placeholder 6">
+            <a:extLst>
+              <a:ext uri="{FF2B5EF4-FFF2-40B4-BE49-F238E27FC236}">
+                <a16:creationId xmlns:a16="http://schemas.microsoft.com/office/drawing/2014/main" id="{9092F86E-5D21-865D-53AE-77B5C57EAC92}"/>
+              </a:ext>
+            </a:extLst>
+          </p:cNvPr>
           <p:cNvSpPr>
             <a:spLocks noGrp="1"/>
           </p:cNvSpPr>
@@ -2343,9 +2394,9 @@
           <a:bodyPr/>
           <a:lstStyle/>
           <a:p>
-            <a:fld id="{092B088E-2809-46D8-B43F-738015D878CC}" type="datetime1">
+            <a:fld id="{28421D02-69CC-42C9-85CE-4F8B68ED22B8}" type="datetimeFigureOut">
               <a:rPr lang="en-US" smtClean="0"/>
-              <a:t>12/6/2024</a:t>
+              <a:t>3/13/2026</a:t>
             </a:fld>
             <a:endParaRPr lang="en-US"/>
           </a:p>
@@ -2353,7 +2404,13 @@
       </p:sp>
       <p:sp>
         <p:nvSpPr>
-          <p:cNvPr id="8" name="Footer Placeholder 7"/>
+          <p:cNvPr id="8" name="Footer Placeholder 7">
+            <a:extLst>
+              <a:ext uri="{FF2B5EF4-FFF2-40B4-BE49-F238E27FC236}">
+                <a16:creationId xmlns:a16="http://schemas.microsoft.com/office/drawing/2014/main" id="{D7F5E5A8-7D51-605B-E276-A7A5B93FE663}"/>
+              </a:ext>
+            </a:extLst>
+          </p:cNvPr>
           <p:cNvSpPr>
             <a:spLocks noGrp="1"/>
           </p:cNvSpPr>
@@ -2372,7 +2429,13 @@
       </p:sp>
       <p:sp>
         <p:nvSpPr>
-          <p:cNvPr id="9" name="Slide Number Placeholder 8"/>
+          <p:cNvPr id="9" name="Slide Number Placeholder 8">
+            <a:extLst>
+              <a:ext uri="{FF2B5EF4-FFF2-40B4-BE49-F238E27FC236}">
+                <a16:creationId xmlns:a16="http://schemas.microsoft.com/office/drawing/2014/main" id="{3F9E01F4-D4D9-E56F-9035-05E605811E6D}"/>
+              </a:ext>
+            </a:extLst>
+          </p:cNvPr>
           <p:cNvSpPr>
             <a:spLocks noGrp="1"/>
           </p:cNvSpPr>
@@ -2385,7 +2448,7 @@
           <a:bodyPr/>
           <a:lstStyle/>
           <a:p>
-            <a:fld id="{86BADE50-950A-4D58-BFB2-FA2C6A8B385D}" type="slidenum">
+            <a:fld id="{48A6B0C1-9E0A-4C4A-808A-34C0E77FF2FF}" type="slidenum">
               <a:rPr lang="en-US" smtClean="0"/>
               <a:t>‹#›</a:t>
             </a:fld>
@@ -2396,7 +2459,7 @@
     </p:spTree>
     <p:extLst>
       <p:ext uri="{BB962C8B-B14F-4D97-AF65-F5344CB8AC3E}">
-        <p14:creationId xmlns:p14="http://schemas.microsoft.com/office/powerpoint/2010/main" val="1770673898"/>
+        <p14:creationId xmlns:p14="http://schemas.microsoft.com/office/powerpoint/2010/main" val="274187111"/>
       </p:ext>
     </p:extLst>
   </p:cSld>
@@ -2425,7 +2488,13 @@
       </p:grpSpPr>
       <p:sp>
         <p:nvSpPr>
-          <p:cNvPr id="2" name="Title 1"/>
+          <p:cNvPr id="2" name="Title 1">
+            <a:extLst>
+              <a:ext uri="{FF2B5EF4-FFF2-40B4-BE49-F238E27FC236}">
+                <a16:creationId xmlns:a16="http://schemas.microsoft.com/office/drawing/2014/main" id="{B023237B-2CFD-F0AF-D3E6-2FDD100A8F43}"/>
+              </a:ext>
+            </a:extLst>
+          </p:cNvPr>
           <p:cNvSpPr>
             <a:spLocks noGrp="1"/>
           </p:cNvSpPr>
@@ -2447,7 +2516,13 @@
       </p:sp>
       <p:sp>
         <p:nvSpPr>
-          <p:cNvPr id="3" name="Date Placeholder 2"/>
+          <p:cNvPr id="3" name="Date Placeholder 2">
+            <a:extLst>
+              <a:ext uri="{FF2B5EF4-FFF2-40B4-BE49-F238E27FC236}">
+                <a16:creationId xmlns:a16="http://schemas.microsoft.com/office/drawing/2014/main" id="{DD614118-0522-CF53-601D-265A3261E4BE}"/>
+              </a:ext>
+            </a:extLst>
+          </p:cNvPr>
           <p:cNvSpPr>
             <a:spLocks noGrp="1"/>
           </p:cNvSpPr>
@@ -2460,9 +2535,9 @@
           <a:bodyPr/>
           <a:lstStyle/>
           <a:p>
-            <a:fld id="{8208D42A-BC08-426E-9E11-483BA9D61AF6}" type="datetime1">
+            <a:fld id="{28421D02-69CC-42C9-85CE-4F8B68ED22B8}" type="datetimeFigureOut">
               <a:rPr lang="en-US" smtClean="0"/>
-              <a:t>12/6/2024</a:t>
+              <a:t>3/13/2026</a:t>
             </a:fld>
             <a:endParaRPr lang="en-US"/>
           </a:p>
@@ -2470,7 +2545,13 @@
       </p:sp>
       <p:sp>
         <p:nvSpPr>
-          <p:cNvPr id="4" name="Footer Placeholder 3"/>
+          <p:cNvPr id="4" name="Footer Placeholder 3">
+            <a:extLst>
+              <a:ext uri="{FF2B5EF4-FFF2-40B4-BE49-F238E27FC236}">
+                <a16:creationId xmlns:a16="http://schemas.microsoft.com/office/drawing/2014/main" id="{3ACC46D9-B22E-C768-B35E-20DA33956A5E}"/>
+              </a:ext>
+            </a:extLst>
+          </p:cNvPr>
           <p:cNvSpPr>
             <a:spLocks noGrp="1"/>
           </p:cNvSpPr>
@@ -2489,7 +2570,13 @@
       </p:sp>
       <p:sp>
         <p:nvSpPr>
-          <p:cNvPr id="5" name="Slide Number Placeholder 4"/>
+          <p:cNvPr id="5" name="Slide Number Placeholder 4">
+            <a:extLst>
+              <a:ext uri="{FF2B5EF4-FFF2-40B4-BE49-F238E27FC236}">
+                <a16:creationId xmlns:a16="http://schemas.microsoft.com/office/drawing/2014/main" id="{B65D07EE-0E9C-EC8E-BAC0-7B8C9EFB5AEE}"/>
+              </a:ext>
+            </a:extLst>
+          </p:cNvPr>
           <p:cNvSpPr>
             <a:spLocks noGrp="1"/>
           </p:cNvSpPr>
@@ -2502,7 +2589,7 @@
           <a:bodyPr/>
           <a:lstStyle/>
           <a:p>
-            <a:fld id="{86BADE50-950A-4D58-BFB2-FA2C6A8B385D}" type="slidenum">
+            <a:fld id="{48A6B0C1-9E0A-4C4A-808A-34C0E77FF2FF}" type="slidenum">
               <a:rPr lang="en-US" smtClean="0"/>
               <a:t>‹#›</a:t>
             </a:fld>
@@ -2513,7 +2600,7 @@
     </p:spTree>
     <p:extLst>
       <p:ext uri="{BB962C8B-B14F-4D97-AF65-F5344CB8AC3E}">
-        <p14:creationId xmlns:p14="http://schemas.microsoft.com/office/powerpoint/2010/main" val="4282396343"/>
+        <p14:creationId xmlns:p14="http://schemas.microsoft.com/office/powerpoint/2010/main" val="3769616246"/>
       </p:ext>
     </p:extLst>
   </p:cSld>
@@ -2542,7 +2629,13 @@
       </p:grpSpPr>
       <p:sp>
         <p:nvSpPr>
-          <p:cNvPr id="2" name="Date Placeholder 1"/>
+          <p:cNvPr id="2" name="Date Placeholder 1">
+            <a:extLst>
+              <a:ext uri="{FF2B5EF4-FFF2-40B4-BE49-F238E27FC236}">
+                <a16:creationId xmlns:a16="http://schemas.microsoft.com/office/drawing/2014/main" id="{37BA0918-E285-61F1-EDAF-6B7FD149CC5D}"/>
+              </a:ext>
+            </a:extLst>
+          </p:cNvPr>
           <p:cNvSpPr>
             <a:spLocks noGrp="1"/>
           </p:cNvSpPr>
@@ -2555,9 +2648,9 @@
           <a:bodyPr/>
           <a:lstStyle/>
           <a:p>
-            <a:fld id="{37D5C786-44E1-4BD5-AD14-75F3EA166B5A}" type="datetime1">
+            <a:fld id="{28421D02-69CC-42C9-85CE-4F8B68ED22B8}" type="datetimeFigureOut">
               <a:rPr lang="en-US" smtClean="0"/>
-              <a:t>12/6/2024</a:t>
+              <a:t>3/13/2026</a:t>
             </a:fld>
             <a:endParaRPr lang="en-US"/>
           </a:p>
@@ -2565,7 +2658,13 @@
       </p:sp>
       <p:sp>
         <p:nvSpPr>
-          <p:cNvPr id="3" name="Footer Placeholder 2"/>
+          <p:cNvPr id="3" name="Footer Placeholder 2">
+            <a:extLst>
+              <a:ext uri="{FF2B5EF4-FFF2-40B4-BE49-F238E27FC236}">
+                <a16:creationId xmlns:a16="http://schemas.microsoft.com/office/drawing/2014/main" id="{AEAFD855-6290-493F-81E4-A89E8DDEDE5E}"/>
+              </a:ext>
+            </a:extLst>
+          </p:cNvPr>
           <p:cNvSpPr>
             <a:spLocks noGrp="1"/>
           </p:cNvSpPr>
@@ -2584,7 +2683,13 @@
       </p:sp>
       <p:sp>
         <p:nvSpPr>
-          <p:cNvPr id="4" name="Slide Number Placeholder 3"/>
+          <p:cNvPr id="4" name="Slide Number Placeholder 3">
+            <a:extLst>
+              <a:ext uri="{FF2B5EF4-FFF2-40B4-BE49-F238E27FC236}">
+                <a16:creationId xmlns:a16="http://schemas.microsoft.com/office/drawing/2014/main" id="{6ECBAA96-146F-BEF1-15D5-935C1B8E9FE2}"/>
+              </a:ext>
+            </a:extLst>
+          </p:cNvPr>
           <p:cNvSpPr>
             <a:spLocks noGrp="1"/>
           </p:cNvSpPr>
@@ -2597,7 +2702,7 @@
           <a:bodyPr/>
           <a:lstStyle/>
           <a:p>
-            <a:fld id="{86BADE50-950A-4D58-BFB2-FA2C6A8B385D}" type="slidenum">
+            <a:fld id="{48A6B0C1-9E0A-4C4A-808A-34C0E77FF2FF}" type="slidenum">
               <a:rPr lang="en-US" smtClean="0"/>
               <a:t>‹#›</a:t>
             </a:fld>
@@ -2608,7 +2713,7 @@
     </p:spTree>
     <p:extLst>
       <p:ext uri="{BB962C8B-B14F-4D97-AF65-F5344CB8AC3E}">
-        <p14:creationId xmlns:p14="http://schemas.microsoft.com/office/powerpoint/2010/main" val="341121604"/>
+        <p14:creationId xmlns:p14="http://schemas.microsoft.com/office/powerpoint/2010/main" val="75984336"/>
       </p:ext>
     </p:extLst>
   </p:cSld>
@@ -2637,7 +2742,13 @@
       </p:grpSpPr>
       <p:sp>
         <p:nvSpPr>
-          <p:cNvPr id="2" name="Title 1"/>
+          <p:cNvPr id="2" name="Title 1">
+            <a:extLst>
+              <a:ext uri="{FF2B5EF4-FFF2-40B4-BE49-F238E27FC236}">
+                <a16:creationId xmlns:a16="http://schemas.microsoft.com/office/drawing/2014/main" id="{A0691D78-E109-DF5D-A589-413429D2AEAF}"/>
+              </a:ext>
+            </a:extLst>
+          </p:cNvPr>
           <p:cNvSpPr>
             <a:spLocks noGrp="1"/>
           </p:cNvSpPr>
@@ -2647,15 +2758,15 @@
         </p:nvSpPr>
         <p:spPr>
           <a:xfrm>
-            <a:off x="609601" y="273050"/>
-            <a:ext cx="4011084" cy="1162050"/>
+            <a:off x="839788" y="457200"/>
+            <a:ext cx="3932237" cy="1600200"/>
           </a:xfrm>
         </p:spPr>
         <p:txBody>
           <a:bodyPr anchor="b"/>
           <a:lstStyle>
-            <a:lvl1pPr algn="l">
-              <a:defRPr sz="2000" b="1"/>
+            <a:lvl1pPr>
+              <a:defRPr sz="3200"/>
             </a:lvl1pPr>
           </a:lstStyle>
           <a:p>
@@ -2668,7 +2779,13 @@
       </p:sp>
       <p:sp>
         <p:nvSpPr>
-          <p:cNvPr id="3" name="Content Placeholder 2"/>
+          <p:cNvPr id="3" name="Content Placeholder 2">
+            <a:extLst>
+              <a:ext uri="{FF2B5EF4-FFF2-40B4-BE49-F238E27FC236}">
+                <a16:creationId xmlns:a16="http://schemas.microsoft.com/office/drawing/2014/main" id="{60E91868-FB59-5D14-1BCA-C7C43F068CBB}"/>
+              </a:ext>
+            </a:extLst>
+          </p:cNvPr>
           <p:cNvSpPr>
             <a:spLocks noGrp="1"/>
           </p:cNvSpPr>
@@ -2678,8 +2795,8 @@
         </p:nvSpPr>
         <p:spPr>
           <a:xfrm>
-            <a:off x="4766733" y="273051"/>
-            <a:ext cx="6815667" cy="5853113"/>
+            <a:off x="5183188" y="987425"/>
+            <a:ext cx="6172200" cy="4873625"/>
           </a:xfrm>
         </p:spPr>
         <p:txBody>
@@ -2752,7 +2869,13 @@
       </p:sp>
       <p:sp>
         <p:nvSpPr>
-          <p:cNvPr id="4" name="Text Placeholder 3"/>
+          <p:cNvPr id="4" name="Text Placeholder 3">
+            <a:extLst>
+              <a:ext uri="{FF2B5EF4-FFF2-40B4-BE49-F238E27FC236}">
+                <a16:creationId xmlns:a16="http://schemas.microsoft.com/office/drawing/2014/main" id="{C2A2F535-BC7E-F5E2-864B-461F8404D097}"/>
+              </a:ext>
+            </a:extLst>
+          </p:cNvPr>
           <p:cNvSpPr>
             <a:spLocks noGrp="1"/>
           </p:cNvSpPr>
@@ -2762,8 +2885,8 @@
         </p:nvSpPr>
         <p:spPr>
           <a:xfrm>
-            <a:off x="609601" y="1435101"/>
-            <a:ext cx="4011084" cy="4691063"/>
+            <a:off x="839788" y="2057400"/>
+            <a:ext cx="3932237" cy="3811588"/>
           </a:xfrm>
         </p:spPr>
         <p:txBody>
@@ -2771,39 +2894,39 @@
           <a:lstStyle>
             <a:lvl1pPr marL="0" indent="0">
               <a:buNone/>
-              <a:defRPr sz="1400"/>
+              <a:defRPr sz="1600"/>
             </a:lvl1pPr>
             <a:lvl2pPr marL="457200" indent="0">
               <a:buNone/>
-              <a:defRPr sz="1200"/>
+              <a:defRPr sz="1400"/>
             </a:lvl2pPr>
             <a:lvl3pPr marL="914400" indent="0">
               <a:buNone/>
-              <a:defRPr sz="1000"/>
+              <a:defRPr sz="1200"/>
             </a:lvl3pPr>
             <a:lvl4pPr marL="1371600" indent="0">
               <a:buNone/>
-              <a:defRPr sz="900"/>
+              <a:defRPr sz="1000"/>
             </a:lvl4pPr>
             <a:lvl5pPr marL="1828800" indent="0">
               <a:buNone/>
-              <a:defRPr sz="900"/>
+              <a:defRPr sz="1000"/>
             </a:lvl5pPr>
             <a:lvl6pPr marL="2286000" indent="0">
               <a:buNone/>
-              <a:defRPr sz="900"/>
+              <a:defRPr sz="1000"/>
             </a:lvl6pPr>
             <a:lvl7pPr marL="2743200" indent="0">
               <a:buNone/>
-              <a:defRPr sz="900"/>
+              <a:defRPr sz="1000"/>
             </a:lvl7pPr>
             <a:lvl8pPr marL="3200400" indent="0">
               <a:buNone/>
-              <a:defRPr sz="900"/>
+              <a:defRPr sz="1000"/>
             </a:lvl8pPr>
             <a:lvl9pPr marL="3657600" indent="0">
               <a:buNone/>
-              <a:defRPr sz="900"/>
+              <a:defRPr sz="1000"/>
             </a:lvl9pPr>
           </a:lstStyle>
           <a:p>
@@ -2817,7 +2940,13 @@
       </p:sp>
       <p:sp>
         <p:nvSpPr>
-          <p:cNvPr id="5" name="Date Placeholder 4"/>
+          <p:cNvPr id="5" name="Date Placeholder 4">
+            <a:extLst>
+              <a:ext uri="{FF2B5EF4-FFF2-40B4-BE49-F238E27FC236}">
+                <a16:creationId xmlns:a16="http://schemas.microsoft.com/office/drawing/2014/main" id="{65CFCF40-365C-13EE-4DB1-CC7C58586C55}"/>
+              </a:ext>
+            </a:extLst>
+          </p:cNvPr>
           <p:cNvSpPr>
             <a:spLocks noGrp="1"/>
           </p:cNvSpPr>
@@ -2830,9 +2959,9 @@
           <a:bodyPr/>
           <a:lstStyle/>
           <a:p>
-            <a:fld id="{DA91928D-0C55-4D8D-9D16-4C05754E5356}" type="datetime1">
+            <a:fld id="{28421D02-69CC-42C9-85CE-4F8B68ED22B8}" type="datetimeFigureOut">
               <a:rPr lang="en-US" smtClean="0"/>
-              <a:t>12/6/2024</a:t>
+              <a:t>3/13/2026</a:t>
             </a:fld>
             <a:endParaRPr lang="en-US"/>
           </a:p>
@@ -2840,7 +2969,13 @@
       </p:sp>
       <p:sp>
         <p:nvSpPr>
-          <p:cNvPr id="6" name="Footer Placeholder 5"/>
+          <p:cNvPr id="6" name="Footer Placeholder 5">
+            <a:extLst>
+              <a:ext uri="{FF2B5EF4-FFF2-40B4-BE49-F238E27FC236}">
+                <a16:creationId xmlns:a16="http://schemas.microsoft.com/office/drawing/2014/main" id="{C1858AA7-3077-1807-CEB8-2C0F27B4C6F2}"/>
+              </a:ext>
+            </a:extLst>
+          </p:cNvPr>
           <p:cNvSpPr>
             <a:spLocks noGrp="1"/>
           </p:cNvSpPr>
@@ -2859,7 +2994,13 @@
       </p:sp>
       <p:sp>
         <p:nvSpPr>
-          <p:cNvPr id="7" name="Slide Number Placeholder 6"/>
+          <p:cNvPr id="7" name="Slide Number Placeholder 6">
+            <a:extLst>
+              <a:ext uri="{FF2B5EF4-FFF2-40B4-BE49-F238E27FC236}">
+                <a16:creationId xmlns:a16="http://schemas.microsoft.com/office/drawing/2014/main" id="{E0F74C30-07C1-3F35-E57B-30BFA71ABAC4}"/>
+              </a:ext>
+            </a:extLst>
+          </p:cNvPr>
           <p:cNvSpPr>
             <a:spLocks noGrp="1"/>
           </p:cNvSpPr>
@@ -2872,7 +3013,7 @@
           <a:bodyPr/>
           <a:lstStyle/>
           <a:p>
-            <a:fld id="{86BADE50-950A-4D58-BFB2-FA2C6A8B385D}" type="slidenum">
+            <a:fld id="{48A6B0C1-9E0A-4C4A-808A-34C0E77FF2FF}" type="slidenum">
               <a:rPr lang="en-US" smtClean="0"/>
               <a:t>‹#›</a:t>
             </a:fld>
@@ -2883,7 +3024,7 @@
     </p:spTree>
     <p:extLst>
       <p:ext uri="{BB962C8B-B14F-4D97-AF65-F5344CB8AC3E}">
-        <p14:creationId xmlns:p14="http://schemas.microsoft.com/office/powerpoint/2010/main" val="1022138524"/>
+        <p14:creationId xmlns:p14="http://schemas.microsoft.com/office/powerpoint/2010/main" val="535316397"/>
       </p:ext>
     </p:extLst>
   </p:cSld>
@@ -2912,7 +3053,13 @@
       </p:grpSpPr>
       <p:sp>
         <p:nvSpPr>
-          <p:cNvPr id="2" name="Title 1"/>
+          <p:cNvPr id="2" name="Title 1">
+            <a:extLst>
+              <a:ext uri="{FF2B5EF4-FFF2-40B4-BE49-F238E27FC236}">
+                <a16:creationId xmlns:a16="http://schemas.microsoft.com/office/drawing/2014/main" id="{BDA81C30-49BA-398C-2DF8-B0736590C2F4}"/>
+              </a:ext>
+            </a:extLst>
+          </p:cNvPr>
           <p:cNvSpPr>
             <a:spLocks noGrp="1"/>
           </p:cNvSpPr>
@@ -2922,15 +3069,15 @@
         </p:nvSpPr>
         <p:spPr>
           <a:xfrm>
-            <a:off x="2389717" y="4800600"/>
-            <a:ext cx="7315200" cy="566738"/>
+            <a:off x="839788" y="457200"/>
+            <a:ext cx="3932237" cy="1600200"/>
           </a:xfrm>
         </p:spPr>
         <p:txBody>
           <a:bodyPr anchor="b"/>
           <a:lstStyle>
-            <a:lvl1pPr algn="l">
-              <a:defRPr sz="2000" b="1"/>
+            <a:lvl1pPr>
+              <a:defRPr sz="3200"/>
             </a:lvl1pPr>
           </a:lstStyle>
           <a:p>
@@ -2943,7 +3090,13 @@
       </p:sp>
       <p:sp>
         <p:nvSpPr>
-          <p:cNvPr id="3" name="Picture Placeholder 2"/>
+          <p:cNvPr id="3" name="Picture Placeholder 2">
+            <a:extLst>
+              <a:ext uri="{FF2B5EF4-FFF2-40B4-BE49-F238E27FC236}">
+                <a16:creationId xmlns:a16="http://schemas.microsoft.com/office/drawing/2014/main" id="{A5C7B813-1595-60AF-F5B3-A0DAE665365D}"/>
+              </a:ext>
+            </a:extLst>
+          </p:cNvPr>
           <p:cNvSpPr>
             <a:spLocks noGrp="1"/>
           </p:cNvSpPr>
@@ -2953,8 +3106,8 @@
         </p:nvSpPr>
         <p:spPr>
           <a:xfrm>
-            <a:off x="2389717" y="612775"/>
-            <a:ext cx="7315200" cy="4114800"/>
+            <a:off x="5183188" y="987425"/>
+            <a:ext cx="6172200" cy="4873625"/>
           </a:xfrm>
         </p:spPr>
         <p:txBody>
@@ -3004,7 +3157,13 @@
       </p:sp>
       <p:sp>
         <p:nvSpPr>
-          <p:cNvPr id="4" name="Text Placeholder 3"/>
+          <p:cNvPr id="4" name="Text Placeholder 3">
+            <a:extLst>
+              <a:ext uri="{FF2B5EF4-FFF2-40B4-BE49-F238E27FC236}">
+                <a16:creationId xmlns:a16="http://schemas.microsoft.com/office/drawing/2014/main" id="{206402F2-AF70-21FD-1449-18CBF4C170B0}"/>
+              </a:ext>
+            </a:extLst>
+          </p:cNvPr>
           <p:cNvSpPr>
             <a:spLocks noGrp="1"/>
           </p:cNvSpPr>
@@ -3014,8 +3173,8 @@
         </p:nvSpPr>
         <p:spPr>
           <a:xfrm>
-            <a:off x="2389717" y="5367338"/>
-            <a:ext cx="7315200" cy="804862"/>
+            <a:off x="839788" y="2057400"/>
+            <a:ext cx="3932237" cy="3811588"/>
           </a:xfrm>
         </p:spPr>
         <p:txBody>
@@ -3023,39 +3182,39 @@
           <a:lstStyle>
             <a:lvl1pPr marL="0" indent="0">
               <a:buNone/>
-              <a:defRPr sz="1400"/>
+              <a:defRPr sz="1600"/>
             </a:lvl1pPr>
             <a:lvl2pPr marL="457200" indent="0">
               <a:buNone/>
-              <a:defRPr sz="1200"/>
+              <a:defRPr sz="1400"/>
             </a:lvl2pPr>
             <a:lvl3pPr marL="914400" indent="0">
               <a:buNone/>
-              <a:defRPr sz="1000"/>
+              <a:defRPr sz="1200"/>
             </a:lvl3pPr>
             <a:lvl4pPr marL="1371600" indent="0">
               <a:buNone/>
-              <a:defRPr sz="900"/>
+              <a:defRPr sz="1000"/>
             </a:lvl4pPr>
             <a:lvl5pPr marL="1828800" indent="0">
               <a:buNone/>
-              <a:defRPr sz="900"/>
+              <a:defRPr sz="1000"/>
             </a:lvl5pPr>
             <a:lvl6pPr marL="2286000" indent="0">
               <a:buNone/>
-              <a:defRPr sz="900"/>
+              <a:defRPr sz="1000"/>
             </a:lvl6pPr>
             <a:lvl7pPr marL="2743200" indent="0">
               <a:buNone/>
-              <a:defRPr sz="900"/>
+              <a:defRPr sz="1000"/>
             </a:lvl7pPr>
             <a:lvl8pPr marL="3200400" indent="0">
               <a:buNone/>
-              <a:defRPr sz="900"/>
+              <a:defRPr sz="1000"/>
             </a:lvl8pPr>
             <a:lvl9pPr marL="3657600" indent="0">
               <a:buNone/>
-              <a:defRPr sz="900"/>
+              <a:defRPr sz="1000"/>
             </a:lvl9pPr>
           </a:lstStyle>
           <a:p>
@@ -3069,7 +3228,13 @@
       </p:sp>
       <p:sp>
         <p:nvSpPr>
-          <p:cNvPr id="5" name="Date Placeholder 4"/>
+          <p:cNvPr id="5" name="Date Placeholder 4">
+            <a:extLst>
+              <a:ext uri="{FF2B5EF4-FFF2-40B4-BE49-F238E27FC236}">
+                <a16:creationId xmlns:a16="http://schemas.microsoft.com/office/drawing/2014/main" id="{2E1982EC-DE32-4452-40AB-762F386AF589}"/>
+              </a:ext>
+            </a:extLst>
+          </p:cNvPr>
           <p:cNvSpPr>
             <a:spLocks noGrp="1"/>
           </p:cNvSpPr>
@@ -3082,9 +3247,9 @@
           <a:bodyPr/>
           <a:lstStyle/>
           <a:p>
-            <a:fld id="{584CEDDD-253B-4C38-A621-35D8BA950C17}" type="datetime1">
+            <a:fld id="{28421D02-69CC-42C9-85CE-4F8B68ED22B8}" type="datetimeFigureOut">
               <a:rPr lang="en-US" smtClean="0"/>
-              <a:t>12/6/2024</a:t>
+              <a:t>3/13/2026</a:t>
             </a:fld>
             <a:endParaRPr lang="en-US"/>
           </a:p>
@@ -3092,7 +3257,13 @@
       </p:sp>
       <p:sp>
         <p:nvSpPr>
-          <p:cNvPr id="6" name="Footer Placeholder 5"/>
+          <p:cNvPr id="6" name="Footer Placeholder 5">
+            <a:extLst>
+              <a:ext uri="{FF2B5EF4-FFF2-40B4-BE49-F238E27FC236}">
+                <a16:creationId xmlns:a16="http://schemas.microsoft.com/office/drawing/2014/main" id="{0EE76A50-D174-12CE-9CCD-74569685B79B}"/>
+              </a:ext>
+            </a:extLst>
+          </p:cNvPr>
           <p:cNvSpPr>
             <a:spLocks noGrp="1"/>
           </p:cNvSpPr>
@@ -3111,7 +3282,13 @@
       </p:sp>
       <p:sp>
         <p:nvSpPr>
-          <p:cNvPr id="7" name="Slide Number Placeholder 6"/>
+          <p:cNvPr id="7" name="Slide Number Placeholder 6">
+            <a:extLst>
+              <a:ext uri="{FF2B5EF4-FFF2-40B4-BE49-F238E27FC236}">
+                <a16:creationId xmlns:a16="http://schemas.microsoft.com/office/drawing/2014/main" id="{CCD79484-4128-5F97-59B5-3CF00D561C01}"/>
+              </a:ext>
+            </a:extLst>
+          </p:cNvPr>
           <p:cNvSpPr>
             <a:spLocks noGrp="1"/>
           </p:cNvSpPr>
@@ -3124,7 +3301,7 @@
           <a:bodyPr/>
           <a:lstStyle/>
           <a:p>
-            <a:fld id="{86BADE50-950A-4D58-BFB2-FA2C6A8B385D}" type="slidenum">
+            <a:fld id="{48A6B0C1-9E0A-4C4A-808A-34C0E77FF2FF}" type="slidenum">
               <a:rPr lang="en-US" smtClean="0"/>
               <a:t>‹#›</a:t>
             </a:fld>
@@ -3135,7 +3312,7 @@
     </p:spTree>
     <p:extLst>
       <p:ext uri="{BB962C8B-B14F-4D97-AF65-F5344CB8AC3E}">
-        <p14:creationId xmlns:p14="http://schemas.microsoft.com/office/powerpoint/2010/main" val="2479903766"/>
+        <p14:creationId xmlns:p14="http://schemas.microsoft.com/office/powerpoint/2010/main" val="4011233831"/>
       </p:ext>
     </p:extLst>
   </p:cSld>
@@ -3169,7 +3346,13 @@
       </p:grpSpPr>
       <p:sp>
         <p:nvSpPr>
-          <p:cNvPr id="2" name="Title Placeholder 1"/>
+          <p:cNvPr id="2" name="Title Placeholder 1">
+            <a:extLst>
+              <a:ext uri="{FF2B5EF4-FFF2-40B4-BE49-F238E27FC236}">
+                <a16:creationId xmlns:a16="http://schemas.microsoft.com/office/drawing/2014/main" id="{DEFDEBFE-9C54-D45A-111D-948735AB4A2E}"/>
+              </a:ext>
+            </a:extLst>
+          </p:cNvPr>
           <p:cNvSpPr>
             <a:spLocks noGrp="1"/>
           </p:cNvSpPr>
@@ -3179,8 +3362,8 @@
         </p:nvSpPr>
         <p:spPr>
           <a:xfrm>
-            <a:off x="609600" y="274638"/>
-            <a:ext cx="10972800" cy="1143000"/>
+            <a:off x="838200" y="365125"/>
+            <a:ext cx="10515600" cy="1325563"/>
           </a:xfrm>
           <a:prstGeom prst="rect">
             <a:avLst/>
@@ -3201,7 +3384,13 @@
       </p:sp>
       <p:sp>
         <p:nvSpPr>
-          <p:cNvPr id="3" name="Text Placeholder 2"/>
+          <p:cNvPr id="3" name="Text Placeholder 2">
+            <a:extLst>
+              <a:ext uri="{FF2B5EF4-FFF2-40B4-BE49-F238E27FC236}">
+                <a16:creationId xmlns:a16="http://schemas.microsoft.com/office/drawing/2014/main" id="{75AF582E-F84E-411A-7F7A-D8EF87E1F517}"/>
+              </a:ext>
+            </a:extLst>
+          </p:cNvPr>
           <p:cNvSpPr>
             <a:spLocks noGrp="1"/>
           </p:cNvSpPr>
@@ -3211,8 +3400,8 @@
         </p:nvSpPr>
         <p:spPr>
           <a:xfrm>
-            <a:off x="609600" y="1600201"/>
-            <a:ext cx="10972800" cy="4525963"/>
+            <a:off x="838200" y="1825625"/>
+            <a:ext cx="10515600" cy="4351338"/>
           </a:xfrm>
           <a:prstGeom prst="rect">
             <a:avLst/>
@@ -3262,7 +3451,13 @@
       </p:sp>
       <p:sp>
         <p:nvSpPr>
-          <p:cNvPr id="4" name="Date Placeholder 3"/>
+          <p:cNvPr id="4" name="Date Placeholder 3">
+            <a:extLst>
+              <a:ext uri="{FF2B5EF4-FFF2-40B4-BE49-F238E27FC236}">
+                <a16:creationId xmlns:a16="http://schemas.microsoft.com/office/drawing/2014/main" id="{34DCE3F9-A152-FD27-1D1D-64A1C313F37F}"/>
+              </a:ext>
+            </a:extLst>
+          </p:cNvPr>
           <p:cNvSpPr>
             <a:spLocks noGrp="1"/>
           </p:cNvSpPr>
@@ -3272,8 +3467,8 @@
         </p:nvSpPr>
         <p:spPr>
           <a:xfrm>
-            <a:off x="609600" y="6356351"/>
-            <a:ext cx="2844800" cy="365125"/>
+            <a:off x="838200" y="6356350"/>
+            <a:ext cx="2743200" cy="365125"/>
           </a:xfrm>
           <a:prstGeom prst="rect">
             <a:avLst/>
@@ -3293,9 +3488,9 @@
             </a:lvl1pPr>
           </a:lstStyle>
           <a:p>
-            <a:fld id="{26B28102-2E91-4DD7-8E8B-98B790A12701}" type="datetime1">
+            <a:fld id="{28421D02-69CC-42C9-85CE-4F8B68ED22B8}" type="datetimeFigureOut">
               <a:rPr lang="en-US" smtClean="0"/>
-              <a:t>12/6/2024</a:t>
+              <a:t>3/13/2026</a:t>
             </a:fld>
             <a:endParaRPr lang="en-US"/>
           </a:p>
@@ -3303,7 +3498,13 @@
       </p:sp>
       <p:sp>
         <p:nvSpPr>
-          <p:cNvPr id="5" name="Footer Placeholder 4"/>
+          <p:cNvPr id="5" name="Footer Placeholder 4">
+            <a:extLst>
+              <a:ext uri="{FF2B5EF4-FFF2-40B4-BE49-F238E27FC236}">
+                <a16:creationId xmlns:a16="http://schemas.microsoft.com/office/drawing/2014/main" id="{955F318D-9BE5-6E4A-1795-F02EED65F83A}"/>
+              </a:ext>
+            </a:extLst>
+          </p:cNvPr>
           <p:cNvSpPr>
             <a:spLocks noGrp="1"/>
           </p:cNvSpPr>
@@ -3313,8 +3514,8 @@
         </p:nvSpPr>
         <p:spPr>
           <a:xfrm>
-            <a:off x="4165600" y="6356351"/>
-            <a:ext cx="3860800" cy="365125"/>
+            <a:off x="4038600" y="6356350"/>
+            <a:ext cx="4114800" cy="365125"/>
           </a:xfrm>
           <a:prstGeom prst="rect">
             <a:avLst/>
@@ -3340,7 +3541,13 @@
       </p:sp>
       <p:sp>
         <p:nvSpPr>
-          <p:cNvPr id="6" name="Slide Number Placeholder 5"/>
+          <p:cNvPr id="6" name="Slide Number Placeholder 5">
+            <a:extLst>
+              <a:ext uri="{FF2B5EF4-FFF2-40B4-BE49-F238E27FC236}">
+                <a16:creationId xmlns:a16="http://schemas.microsoft.com/office/drawing/2014/main" id="{9404FB82-C81E-722D-F23A-4047C60DBFCD}"/>
+              </a:ext>
+            </a:extLst>
+          </p:cNvPr>
           <p:cNvSpPr>
             <a:spLocks noGrp="1"/>
           </p:cNvSpPr>
@@ -3350,8 +3557,8 @@
         </p:nvSpPr>
         <p:spPr>
           <a:xfrm>
-            <a:off x="8737600" y="6356351"/>
-            <a:ext cx="2844800" cy="365125"/>
+            <a:off x="8610600" y="6356350"/>
+            <a:ext cx="2743200" cy="365125"/>
           </a:xfrm>
           <a:prstGeom prst="rect">
             <a:avLst/>
@@ -3371,7 +3578,7 @@
             </a:lvl1pPr>
           </a:lstStyle>
           <a:p>
-            <a:fld id="{86BADE50-950A-4D58-BFB2-FA2C6A8B385D}" type="slidenum">
+            <a:fld id="{48A6B0C1-9E0A-4C4A-808A-34C0E77FF2FF}" type="slidenum">
               <a:rPr lang="en-US" smtClean="0"/>
               <a:t>‹#›</a:t>
             </a:fld>
@@ -3382,7 +3589,7 @@
     </p:spTree>
     <p:extLst>
       <p:ext uri="{BB962C8B-B14F-4D97-AF65-F5344CB8AC3E}">
-        <p14:creationId xmlns:p14="http://schemas.microsoft.com/office/powerpoint/2010/main" val="571349920"/>
+        <p14:creationId xmlns:p14="http://schemas.microsoft.com/office/powerpoint/2010/main" val="1671621428"/>
       </p:ext>
     </p:extLst>
   </p:cSld>
@@ -3401,10 +3608,12 @@
     <p:sldLayoutId id="2147483659" r:id="rId11"/>
     <p:sldLayoutId id="2147483660" r:id="rId12"/>
   </p:sldLayoutIdLst>
-  <p:hf hdr="0" ftr="0" dt="0"/>
   <p:txStyles>
     <p:titleStyle>
-      <a:lvl1pPr algn="ctr" defTabSz="914400" rtl="0" eaLnBrk="1" latinLnBrk="0" hangingPunct="1">
+      <a:lvl1pPr algn="l" defTabSz="914400" rtl="0" eaLnBrk="1" latinLnBrk="0" hangingPunct="1">
+        <a:lnSpc>
+          <a:spcPct val="90000"/>
+        </a:lnSpc>
         <a:spcBef>
           <a:spcPct val="0"/>
         </a:spcBef>
@@ -3420,13 +3629,16 @@
       </a:lvl1pPr>
     </p:titleStyle>
     <p:bodyStyle>
-      <a:lvl1pPr marL="342900" indent="-342900" algn="l" defTabSz="914400" rtl="0" eaLnBrk="1" latinLnBrk="0" hangingPunct="1">
+      <a:lvl1pPr marL="228600" indent="-228600" algn="l" defTabSz="914400" rtl="0" eaLnBrk="1" latinLnBrk="0" hangingPunct="1">
+        <a:lnSpc>
+          <a:spcPct val="90000"/>
+        </a:lnSpc>
         <a:spcBef>
-          <a:spcPct val="20000"/>
+          <a:spcPts val="1000"/>
         </a:spcBef>
         <a:buFont typeface="Arial" panose="020B0604020202020204" pitchFamily="34" charset="0"/>
         <a:buChar char="•"/>
-        <a:defRPr sz="3200" kern="1200">
+        <a:defRPr sz="2800" kern="1200">
           <a:solidFill>
             <a:schemeClr val="tx1"/>
           </a:solidFill>
@@ -3435,24 +3647,12 @@
           <a:cs typeface="+mn-cs"/>
         </a:defRPr>
       </a:lvl1pPr>
-      <a:lvl2pPr marL="742950" indent="-285750" algn="l" defTabSz="914400" rtl="0" eaLnBrk="1" latinLnBrk="0" hangingPunct="1">
+      <a:lvl2pPr marL="685800" indent="-228600" algn="l" defTabSz="914400" rtl="0" eaLnBrk="1" latinLnBrk="0" hangingPunct="1">
+        <a:lnSpc>
+          <a:spcPct val="90000"/>
+        </a:lnSpc>
         <a:spcBef>
-          <a:spcPct val="20000"/>
-        </a:spcBef>
-        <a:buFont typeface="Arial" panose="020B0604020202020204" pitchFamily="34" charset="0"/>
-        <a:buChar char="–"/>
-        <a:defRPr sz="2800" kern="1200">
-          <a:solidFill>
-            <a:schemeClr val="tx1"/>
-          </a:solidFill>
-          <a:latin typeface="+mn-lt"/>
-          <a:ea typeface="+mn-ea"/>
-          <a:cs typeface="+mn-cs"/>
-        </a:defRPr>
-      </a:lvl2pPr>
-      <a:lvl3pPr marL="1143000" indent="-228600" algn="l" defTabSz="914400" rtl="0" eaLnBrk="1" latinLnBrk="0" hangingPunct="1">
-        <a:spcBef>
-          <a:spcPct val="20000"/>
+          <a:spcPts val="500"/>
         </a:spcBef>
         <a:buFont typeface="Arial" panose="020B0604020202020204" pitchFamily="34" charset="0"/>
         <a:buChar char="•"/>
@@ -3464,40 +3664,13 @@
           <a:ea typeface="+mn-ea"/>
           <a:cs typeface="+mn-cs"/>
         </a:defRPr>
-      </a:lvl3pPr>
-      <a:lvl4pPr marL="1600200" indent="-228600" algn="l" defTabSz="914400" rtl="0" eaLnBrk="1" latinLnBrk="0" hangingPunct="1">
+      </a:lvl2pPr>
+      <a:lvl3pPr marL="1143000" indent="-228600" algn="l" defTabSz="914400" rtl="0" eaLnBrk="1" latinLnBrk="0" hangingPunct="1">
+        <a:lnSpc>
+          <a:spcPct val="90000"/>
+        </a:lnSpc>
         <a:spcBef>
-          <a:spcPct val="20000"/>
-        </a:spcBef>
-        <a:buFont typeface="Arial" panose="020B0604020202020204" pitchFamily="34" charset="0"/>
-        <a:buChar char="–"/>
-        <a:defRPr sz="2000" kern="1200">
-          <a:solidFill>
-            <a:schemeClr val="tx1"/>
-          </a:solidFill>
-          <a:latin typeface="+mn-lt"/>
-          <a:ea typeface="+mn-ea"/>
-          <a:cs typeface="+mn-cs"/>
-        </a:defRPr>
-      </a:lvl4pPr>
-      <a:lvl5pPr marL="2057400" indent="-228600" algn="l" defTabSz="914400" rtl="0" eaLnBrk="1" latinLnBrk="0" hangingPunct="1">
-        <a:spcBef>
-          <a:spcPct val="20000"/>
-        </a:spcBef>
-        <a:buFont typeface="Arial" panose="020B0604020202020204" pitchFamily="34" charset="0"/>
-        <a:buChar char="»"/>
-        <a:defRPr sz="2000" kern="1200">
-          <a:solidFill>
-            <a:schemeClr val="tx1"/>
-          </a:solidFill>
-          <a:latin typeface="+mn-lt"/>
-          <a:ea typeface="+mn-ea"/>
-          <a:cs typeface="+mn-cs"/>
-        </a:defRPr>
-      </a:lvl5pPr>
-      <a:lvl6pPr marL="2514600" indent="-228600" algn="l" defTabSz="914400" rtl="0" eaLnBrk="1" latinLnBrk="0" hangingPunct="1">
-        <a:spcBef>
-          <a:spcPct val="20000"/>
+          <a:spcPts val="500"/>
         </a:spcBef>
         <a:buFont typeface="Arial" panose="020B0604020202020204" pitchFamily="34" charset="0"/>
         <a:buChar char="•"/>
@@ -3509,14 +3682,71 @@
           <a:ea typeface="+mn-ea"/>
           <a:cs typeface="+mn-cs"/>
         </a:defRPr>
-      </a:lvl6pPr>
-      <a:lvl7pPr marL="2971800" indent="-228600" algn="l" defTabSz="914400" rtl="0" eaLnBrk="1" latinLnBrk="0" hangingPunct="1">
+      </a:lvl3pPr>
+      <a:lvl4pPr marL="1600200" indent="-228600" algn="l" defTabSz="914400" rtl="0" eaLnBrk="1" latinLnBrk="0" hangingPunct="1">
+        <a:lnSpc>
+          <a:spcPct val="90000"/>
+        </a:lnSpc>
         <a:spcBef>
-          <a:spcPct val="20000"/>
+          <a:spcPts val="500"/>
         </a:spcBef>
         <a:buFont typeface="Arial" panose="020B0604020202020204" pitchFamily="34" charset="0"/>
         <a:buChar char="•"/>
-        <a:defRPr sz="2000" kern="1200">
+        <a:defRPr sz="1800" kern="1200">
+          <a:solidFill>
+            <a:schemeClr val="tx1"/>
+          </a:solidFill>
+          <a:latin typeface="+mn-lt"/>
+          <a:ea typeface="+mn-ea"/>
+          <a:cs typeface="+mn-cs"/>
+        </a:defRPr>
+      </a:lvl4pPr>
+      <a:lvl5pPr marL="2057400" indent="-228600" algn="l" defTabSz="914400" rtl="0" eaLnBrk="1" latinLnBrk="0" hangingPunct="1">
+        <a:lnSpc>
+          <a:spcPct val="90000"/>
+        </a:lnSpc>
+        <a:spcBef>
+          <a:spcPts val="500"/>
+        </a:spcBef>
+        <a:buFont typeface="Arial" panose="020B0604020202020204" pitchFamily="34" charset="0"/>
+        <a:buChar char="•"/>
+        <a:defRPr sz="1800" kern="1200">
+          <a:solidFill>
+            <a:schemeClr val="tx1"/>
+          </a:solidFill>
+          <a:latin typeface="+mn-lt"/>
+          <a:ea typeface="+mn-ea"/>
+          <a:cs typeface="+mn-cs"/>
+        </a:defRPr>
+      </a:lvl5pPr>
+      <a:lvl6pPr marL="2514600" indent="-228600" algn="l" defTabSz="914400" rtl="0" eaLnBrk="1" latinLnBrk="0" hangingPunct="1">
+        <a:lnSpc>
+          <a:spcPct val="90000"/>
+        </a:lnSpc>
+        <a:spcBef>
+          <a:spcPts val="500"/>
+        </a:spcBef>
+        <a:buFont typeface="Arial" panose="020B0604020202020204" pitchFamily="34" charset="0"/>
+        <a:buChar char="•"/>
+        <a:defRPr sz="1800" kern="1200">
+          <a:solidFill>
+            <a:schemeClr val="tx1"/>
+          </a:solidFill>
+          <a:latin typeface="+mn-lt"/>
+          <a:ea typeface="+mn-ea"/>
+          <a:cs typeface="+mn-cs"/>
+        </a:defRPr>
+      </a:lvl6pPr>
+      <a:lvl7pPr marL="2971800" indent="-228600" algn="l" defTabSz="914400" rtl="0" eaLnBrk="1" latinLnBrk="0" hangingPunct="1">
+        <a:lnSpc>
+          <a:spcPct val="90000"/>
+        </a:lnSpc>
+        <a:spcBef>
+          <a:spcPts val="500"/>
+        </a:spcBef>
+        <a:buFont typeface="Arial" panose="020B0604020202020204" pitchFamily="34" charset="0"/>
+        <a:buChar char="•"/>
+        <a:defRPr sz="1800" kern="1200">
           <a:solidFill>
             <a:schemeClr val="tx1"/>
           </a:solidFill>
@@ -3526,12 +3756,15 @@
         </a:defRPr>
       </a:lvl7pPr>
       <a:lvl8pPr marL="3429000" indent="-228600" algn="l" defTabSz="914400" rtl="0" eaLnBrk="1" latinLnBrk="0" hangingPunct="1">
+        <a:lnSpc>
+          <a:spcPct val="90000"/>
+        </a:lnSpc>
         <a:spcBef>
-          <a:spcPct val="20000"/>
+          <a:spcPts val="500"/>
         </a:spcBef>
         <a:buFont typeface="Arial" panose="020B0604020202020204" pitchFamily="34" charset="0"/>
         <a:buChar char="•"/>
-        <a:defRPr sz="2000" kern="1200">
+        <a:defRPr sz="1800" kern="1200">
           <a:solidFill>
             <a:schemeClr val="tx1"/>
           </a:solidFill>
@@ -3541,12 +3774,15 @@
         </a:defRPr>
       </a:lvl8pPr>
       <a:lvl9pPr marL="3886200" indent="-228600" algn="l" defTabSz="914400" rtl="0" eaLnBrk="1" latinLnBrk="0" hangingPunct="1">
+        <a:lnSpc>
+          <a:spcPct val="90000"/>
+        </a:lnSpc>
         <a:spcBef>
-          <a:spcPct val="20000"/>
+          <a:spcPts val="500"/>
         </a:spcBef>
         <a:buFont typeface="Arial" panose="020B0604020202020204" pitchFamily="34" charset="0"/>
         <a:buChar char="•"/>
-        <a:defRPr sz="2000" kern="1200">
+        <a:defRPr sz="1800" kern="1200">
           <a:solidFill>
             <a:schemeClr val="tx1"/>
           </a:solidFill>
@@ -3697,15 +3933,24 @@
           <a:p>
             <a:r>
               <a:rPr lang="en-US" dirty="0"/>
-              <a:t>CSE 332 Autumn 2024</a:t>
+              <a:t>CSE 332 Winter 2026</a:t>
             </a:r>
             <a:br>
               <a:rPr lang="en-US" dirty="0"/>
             </a:br>
             <a:r>
+              <a:rPr lang="en-US"/>
+              <a:t>Lecture 26: </a:t>
+            </a:r>
+            <a:r>
               <a:rPr lang="en-US" dirty="0"/>
-              <a:t>Lecture 29: Five Worlds</a:t>
-            </a:r>
+              <a:t>P </a:t>
+            </a:r>
+            <a:r>
+              <a:rPr lang="en-US"/>
+              <a:t>and NP 2</a:t>
+            </a:r>
+            <a:endParaRPr lang="en-US" dirty="0"/>
           </a:p>
         </p:txBody>
       </p:sp>
@@ -4052,7 +4297,7 @@
             </p:spPr>
             <p:txBody>
               <a:bodyPr>
-                <a:normAutofit fontScale="92500" lnSpcReduction="10000"/>
+                <a:normAutofit/>
               </a:bodyPr>
               <a:lstStyle/>
               <a:p>
@@ -4080,7 +4325,7 @@
                     <m:sSup>
                       <m:sSupPr>
                         <m:ctrlPr>
-                          <a:rPr lang="en-US" b="0" i="0" smtClean="0">
+                          <a:rPr lang="en-US" b="0" i="1" smtClean="0">
                             <a:latin typeface="Cambria Math" panose="02040503050406030204" pitchFamily="18" charset="0"/>
                           </a:rPr>
                         </m:ctrlPr>
@@ -4091,7 +4336,7 @@
                             <m:begChr m:val="{"/>
                             <m:endChr m:val="}"/>
                             <m:ctrlPr>
-                              <a:rPr lang="en-US" b="0" i="0" smtClean="0">
+                              <a:rPr lang="en-US" b="0" i="1" smtClean="0">
                                 <a:latin typeface="Cambria Math" panose="02040503050406030204" pitchFamily="18" charset="0"/>
                               </a:rPr>
                             </m:ctrlPr>
@@ -4791,7 +5036,7 @@
               <a:blipFill>
                 <a:blip r:embed="rId2"/>
                 <a:stretch>
-                  <a:fillRect l="-1111" t="-2222"/>
+                  <a:fillRect l="-1000" t="-1778"/>
                 </a:stretch>
               </a:blipFill>
             </p:spPr>
@@ -6636,8 +6881,8 @@
           </a:p>
         </p:txBody>
       </p:sp>
-      <mc:AlternateContent xmlns:mc="http://schemas.openxmlformats.org/markup-compatibility/2006">
-        <mc:Choice xmlns:a14="http://schemas.microsoft.com/office/drawing/2010/main" Requires="a14">
+      <mc:AlternateContent xmlns:mc="http://schemas.openxmlformats.org/markup-compatibility/2006" xmlns:a14="http://schemas.microsoft.com/office/drawing/2010/main">
+        <mc:Choice Requires="a14">
           <p:sp>
             <p:nvSpPr>
               <p:cNvPr id="713732" name="Rectangle 4"/>
@@ -6782,7 +7027,7 @@
             </p:txBody>
           </p:sp>
         </mc:Choice>
-        <mc:Fallback>
+        <mc:Fallback xmlns="">
           <p:sp>
             <p:nvSpPr>
               <p:cNvPr id="713732" name="Rectangle 4"/>
@@ -7431,7 +7676,7 @@
           <p:cNvPr id="5" name="Picture 4">
             <a:extLst>
               <a:ext uri="{FF2B5EF4-FFF2-40B4-BE49-F238E27FC236}">
-                <a16:creationId xmlns:a16="http://schemas.microsoft.com/office/drawing/2014/main" id="{7B43F53A-27E2-4733-9A6C-74D626E1727C}"/>
+                <a16:creationId xmlns:a16="http://schemas.microsoft.com/office/drawing/2014/main" id="{8523E86B-4DC5-11FD-1DFA-4DEFE787147C}"/>
               </a:ext>
             </a:extLst>
           </p:cNvPr>
@@ -7448,14 +7693,52 @@
         </p:blipFill>
         <p:spPr>
           <a:xfrm>
-            <a:off x="1219200" y="2743200"/>
-            <a:ext cx="10031407" cy="1723256"/>
+            <a:off x="1980625" y="2414588"/>
+            <a:ext cx="8230749" cy="1143160"/>
           </a:xfrm>
           <a:prstGeom prst="rect">
             <a:avLst/>
           </a:prstGeom>
         </p:spPr>
       </p:pic>
+      <p:sp>
+        <p:nvSpPr>
+          <p:cNvPr id="7" name="TextBox 6">
+            <a:extLst>
+              <a:ext uri="{FF2B5EF4-FFF2-40B4-BE49-F238E27FC236}">
+                <a16:creationId xmlns:a16="http://schemas.microsoft.com/office/drawing/2014/main" id="{D4C86B13-74DA-663E-312E-A3FD172FC316}"/>
+              </a:ext>
+            </a:extLst>
+          </p:cNvPr>
+          <p:cNvSpPr txBox="1"/>
+          <p:nvPr/>
+        </p:nvSpPr>
+        <p:spPr>
+          <a:xfrm>
+            <a:off x="205740" y="6169709"/>
+            <a:ext cx="6885015" cy="369332"/>
+          </a:xfrm>
+          <a:prstGeom prst="rect">
+            <a:avLst/>
+          </a:prstGeom>
+          <a:noFill/>
+        </p:spPr>
+        <p:txBody>
+          <a:bodyPr wrap="square">
+            <a:spAutoFit/>
+          </a:bodyPr>
+          <a:lstStyle/>
+          <a:p>
+            <a:r>
+              <a:rPr lang="en-US" dirty="0">
+                <a:hlinkClick r:id="rId3"/>
+              </a:rPr>
+              <a:t>https://www.cs.umd.edu/users/gasarch/BLOGPAPERS/pollpaper3.pdf</a:t>
+            </a:r>
+            <a:endParaRPr lang="en-US" dirty="0"/>
+          </a:p>
+        </p:txBody>
+      </p:sp>
     </p:spTree>
     <p:extLst>
       <p:ext uri="{BB962C8B-B14F-4D97-AF65-F5344CB8AC3E}">
@@ -7559,8 +7842,8 @@
           </p:sp>
         </mc:Fallback>
       </mc:AlternateContent>
-      <mc:AlternateContent xmlns:mc="http://schemas.openxmlformats.org/markup-compatibility/2006">
-        <mc:Choice xmlns:a14="http://schemas.microsoft.com/office/drawing/2010/main" Requires="a14">
+      <mc:AlternateContent xmlns:mc="http://schemas.openxmlformats.org/markup-compatibility/2006" xmlns:a14="http://schemas.microsoft.com/office/drawing/2010/main">
+        <mc:Choice Requires="a14">
           <p:sp>
             <p:nvSpPr>
               <p:cNvPr id="3" name="Content Placeholder 2"/>
@@ -7665,7 +7948,7 @@
             </p:txBody>
           </p:sp>
         </mc:Choice>
-        <mc:Fallback>
+        <mc:Fallback xmlns="">
           <p:sp>
             <p:nvSpPr>
               <p:cNvPr id="3" name="Content Placeholder 2"/>
@@ -7726,8 +8009,8 @@
           </a:p>
         </p:txBody>
       </p:sp>
-      <mc:AlternateContent xmlns:mc="http://schemas.openxmlformats.org/markup-compatibility/2006">
-        <mc:Choice xmlns:a14="http://schemas.microsoft.com/office/drawing/2010/main" Requires="a14">
+      <mc:AlternateContent xmlns:mc="http://schemas.openxmlformats.org/markup-compatibility/2006" xmlns:a14="http://schemas.microsoft.com/office/drawing/2010/main">
+        <mc:Choice Requires="a14">
           <p:sp>
             <p:nvSpPr>
               <p:cNvPr id="5" name="TextBox 4"/>
@@ -8124,7 +8407,7 @@
             </p:txBody>
           </p:sp>
         </mc:Choice>
-        <mc:Fallback>
+        <mc:Fallback xmlns="">
           <p:sp>
             <p:nvSpPr>
               <p:cNvPr id="5" name="TextBox 4"/>
@@ -8461,7 +8744,7 @@
           <p:cNvPr id="5" name="Picture 4">
             <a:extLst>
               <a:ext uri="{FF2B5EF4-FFF2-40B4-BE49-F238E27FC236}">
-                <a16:creationId xmlns:a16="http://schemas.microsoft.com/office/drawing/2014/main" id="{D71C3D1D-2C04-4F09-8436-B71173D607E4}"/>
+                <a16:creationId xmlns:a16="http://schemas.microsoft.com/office/drawing/2014/main" id="{FB07949D-2D9B-4CE1-A26F-B235714E8767}"/>
               </a:ext>
             </a:extLst>
           </p:cNvPr>
@@ -8478,8 +8761,8 @@
         </p:blipFill>
         <p:spPr>
           <a:xfrm>
-            <a:off x="1676400" y="1822385"/>
-            <a:ext cx="9296405" cy="3908489"/>
+            <a:off x="1618625" y="1466576"/>
+            <a:ext cx="8954750" cy="3924848"/>
           </a:xfrm>
           <a:prstGeom prst="rect">
             <a:avLst/>
@@ -8516,102 +8799,31 @@
           <a:chExt cx="0" cy="0"/>
         </a:xfrm>
       </p:grpSpPr>
-      <mc:AlternateContent xmlns:mc="http://schemas.openxmlformats.org/markup-compatibility/2006" xmlns:a14="http://schemas.microsoft.com/office/drawing/2010/main">
-        <mc:Choice Requires="a14">
-          <p:sp>
-            <p:nvSpPr>
-              <p:cNvPr id="2" name="Title 1">
-                <a:extLst>
-                  <a:ext uri="{FF2B5EF4-FFF2-40B4-BE49-F238E27FC236}">
-                    <a16:creationId xmlns:a16="http://schemas.microsoft.com/office/drawing/2014/main" id="{9127894A-E6A6-499A-8B6C-25FBC618836C}"/>
-                  </a:ext>
-                </a:extLst>
-              </p:cNvPr>
-              <p:cNvSpPr>
-                <a:spLocks noGrp="1"/>
-              </p:cNvSpPr>
-              <p:nvPr>
-                <p:ph type="title"/>
-              </p:nvPr>
-            </p:nvSpPr>
-            <p:spPr/>
-            <p:txBody>
-              <a:bodyPr>
-                <a:normAutofit/>
-              </a:bodyPr>
-              <a:lstStyle/>
-              <a:p>
-                <a:r>
-                  <a:rPr lang="en-US" dirty="0"/>
-                  <a:t>If P</a:t>
-                </a:r>
-                <a14:m>
-                  <m:oMath xmlns:m="http://schemas.openxmlformats.org/officeDocument/2006/math">
-                    <m:r>
-                      <a:rPr lang="en-US" b="0" i="1" smtClean="0">
-                        <a:latin typeface="Cambria Math" panose="02040503050406030204" pitchFamily="18" charset="0"/>
-                      </a:rPr>
-                      <m:t>≠</m:t>
-                    </m:r>
-                  </m:oMath>
-                </a14:m>
-                <a:r>
-                  <a:rPr lang="en-US" dirty="0"/>
-                  <a:t>NP, will that have large practical impact?</a:t>
-                </a:r>
-              </a:p>
-            </p:txBody>
-          </p:sp>
-        </mc:Choice>
-        <mc:Fallback xmlns="">
-          <p:sp>
-            <p:nvSpPr>
-              <p:cNvPr id="2" name="Title 1">
-                <a:extLst>
-                  <a:ext uri="{FF2B5EF4-FFF2-40B4-BE49-F238E27FC236}">
-                    <a16:creationId xmlns:a16="http://schemas.microsoft.com/office/drawing/2014/main" id="{9127894A-E6A6-499A-8B6C-25FBC618836C}"/>
-                  </a:ext>
-                </a:extLst>
-              </p:cNvPr>
-              <p:cNvSpPr>
-                <a:spLocks noGrp="1" noRot="1" noChangeAspect="1" noMove="1" noResize="1" noEditPoints="1" noAdjustHandles="1" noChangeArrowheads="1" noChangeShapeType="1" noTextEdit="1"/>
-              </p:cNvSpPr>
-              <p:nvPr>
-                <p:ph type="title"/>
-              </p:nvPr>
-            </p:nvSpPr>
-            <p:spPr>
-              <a:blipFill>
-                <a:blip r:embed="rId2"/>
-                <a:stretch>
-                  <a:fillRect b="-8511"/>
-                </a:stretch>
-              </a:blipFill>
-            </p:spPr>
-            <p:txBody>
-              <a:bodyPr/>
-              <a:lstStyle/>
-              <a:p>
-                <a:r>
-                  <a:rPr lang="en-US">
-                    <a:noFill/>
-                  </a:rPr>
-                  <a:t> </a:t>
-                </a:r>
-              </a:p>
-            </p:txBody>
-          </p:sp>
-        </mc:Fallback>
-      </mc:AlternateContent>
       <p:sp>
         <p:nvSpPr>
-          <p:cNvPr id="4" name="Slide Number Placeholder 3">
-            <a:extLst>
-              <a:ext uri="{FF2B5EF4-FFF2-40B4-BE49-F238E27FC236}">
-                <a16:creationId xmlns:a16="http://schemas.microsoft.com/office/drawing/2014/main" id="{E54570E6-3087-4411-B35F-4FB43256F70E}"/>
-              </a:ext>
-            </a:extLst>
-          </p:cNvPr>
+          <p:cNvPr id="2" name="Title 1"/>
+          <p:cNvSpPr>
+            <a:spLocks noGrp="1"/>
+          </p:cNvSpPr>
+          <p:nvPr>
+            <p:ph type="title"/>
+          </p:nvPr>
+        </p:nvSpPr>
+        <p:spPr/>
+        <p:txBody>
+          <a:bodyPr/>
+          <a:lstStyle/>
+          <a:p>
+            <a:r>
+              <a:rPr lang="en-US" dirty="0"/>
+              <a:t>Notable Statements on P vs NP</a:t>
+            </a:r>
+          </a:p>
+        </p:txBody>
+      </p:sp>
+      <p:sp>
+        <p:nvSpPr>
+          <p:cNvPr id="4" name="Slide Number Placeholder 3"/>
           <p:cNvSpPr>
             <a:spLocks noGrp="1"/>
           </p:cNvSpPr>
@@ -8632,10 +8844,255 @@
           </a:p>
         </p:txBody>
       </p:sp>
+      <p:pic>
+        <p:nvPicPr>
+          <p:cNvPr id="5122" name="Picture 2"/>
+          <p:cNvPicPr>
+            <a:picLocks noChangeAspect="1" noChangeArrowheads="1"/>
+          </p:cNvPicPr>
+          <p:nvPr/>
+        </p:nvPicPr>
+        <p:blipFill>
+          <a:blip r:embed="rId2">
+            <a:extLst>
+              <a:ext uri="{28A0092B-C50C-407E-A947-70E740481C1C}">
+                <a14:useLocalDpi xmlns:a14="http://schemas.microsoft.com/office/drawing/2010/main" val="0"/>
+              </a:ext>
+            </a:extLst>
+          </a:blip>
+          <a:srcRect/>
+          <a:stretch>
+            <a:fillRect/>
+          </a:stretch>
+        </p:blipFill>
+        <p:spPr bwMode="auto">
+          <a:xfrm>
+            <a:off x="1828800" y="1266825"/>
+            <a:ext cx="8534400" cy="819150"/>
+          </a:xfrm>
+          <a:prstGeom prst="rect">
+            <a:avLst/>
+          </a:prstGeom>
+          <a:noFill/>
+          <a:ln>
+            <a:noFill/>
+          </a:ln>
+          <a:extLst>
+            <a:ext uri="{909E8E84-426E-40DD-AFC4-6F175D3DCCD1}">
+              <a14:hiddenFill xmlns:a14="http://schemas.microsoft.com/office/drawing/2010/main">
+                <a:solidFill>
+                  <a:schemeClr val="accent1"/>
+                </a:solidFill>
+              </a14:hiddenFill>
+            </a:ext>
+            <a:ext uri="{91240B29-F687-4F45-9708-019B960494DF}">
+              <a14:hiddenLine xmlns:a14="http://schemas.microsoft.com/office/drawing/2010/main" w="9525">
+                <a:solidFill>
+                  <a:schemeClr val="tx1"/>
+                </a:solidFill>
+                <a:miter lim="800000"/>
+                <a:headEnd/>
+                <a:tailEnd/>
+              </a14:hiddenLine>
+            </a:ext>
+          </a:extLst>
+        </p:spPr>
+      </p:pic>
+      <p:pic>
+        <p:nvPicPr>
+          <p:cNvPr id="5123" name="Picture 3"/>
+          <p:cNvPicPr>
+            <a:picLocks noChangeAspect="1" noChangeArrowheads="1"/>
+          </p:cNvPicPr>
+          <p:nvPr/>
+        </p:nvPicPr>
+        <p:blipFill>
+          <a:blip r:embed="rId3">
+            <a:extLst>
+              <a:ext uri="{28A0092B-C50C-407E-A947-70E740481C1C}">
+                <a14:useLocalDpi xmlns:a14="http://schemas.microsoft.com/office/drawing/2010/main" val="0"/>
+              </a:ext>
+            </a:extLst>
+          </a:blip>
+          <a:srcRect/>
+          <a:stretch>
+            <a:fillRect/>
+          </a:stretch>
+        </p:blipFill>
+        <p:spPr bwMode="auto">
+          <a:xfrm>
+            <a:off x="1819275" y="2286000"/>
+            <a:ext cx="8553450" cy="628650"/>
+          </a:xfrm>
+          <a:prstGeom prst="rect">
+            <a:avLst/>
+          </a:prstGeom>
+          <a:noFill/>
+          <a:ln>
+            <a:noFill/>
+          </a:ln>
+          <a:extLst>
+            <a:ext uri="{909E8E84-426E-40DD-AFC4-6F175D3DCCD1}">
+              <a14:hiddenFill xmlns:a14="http://schemas.microsoft.com/office/drawing/2010/main">
+                <a:solidFill>
+                  <a:schemeClr val="accent1"/>
+                </a:solidFill>
+              </a14:hiddenFill>
+            </a:ext>
+            <a:ext uri="{91240B29-F687-4F45-9708-019B960494DF}">
+              <a14:hiddenLine xmlns:a14="http://schemas.microsoft.com/office/drawing/2010/main" w="9525">
+                <a:solidFill>
+                  <a:schemeClr val="tx1"/>
+                </a:solidFill>
+                <a:miter lim="800000"/>
+                <a:headEnd/>
+                <a:tailEnd/>
+              </a14:hiddenLine>
+            </a:ext>
+          </a:extLst>
+        </p:spPr>
+      </p:pic>
+      <p:sp>
+        <p:nvSpPr>
+          <p:cNvPr id="5" name="TextBox 4"/>
+          <p:cNvSpPr txBox="1"/>
+          <p:nvPr/>
+        </p:nvSpPr>
+        <p:spPr>
+          <a:xfrm>
+            <a:off x="1676400" y="1981200"/>
+            <a:ext cx="3127010" cy="369332"/>
+          </a:xfrm>
+          <a:prstGeom prst="rect">
+            <a:avLst/>
+          </a:prstGeom>
+          <a:noFill/>
+        </p:spPr>
+        <p:txBody>
+          <a:bodyPr wrap="none" rtlCol="0">
+            <a:spAutoFit/>
+          </a:bodyPr>
+          <a:lstStyle/>
+          <a:p>
+            <a:r>
+              <a:rPr lang="en-US" dirty="0"/>
+              <a:t>Suggested rephrased question:</a:t>
+            </a:r>
+          </a:p>
+        </p:txBody>
+      </p:sp>
+      <p:pic>
+        <p:nvPicPr>
+          <p:cNvPr id="5124" name="Picture 4"/>
+          <p:cNvPicPr>
+            <a:picLocks noChangeAspect="1" noChangeArrowheads="1"/>
+          </p:cNvPicPr>
+          <p:nvPr/>
+        </p:nvPicPr>
+        <p:blipFill>
+          <a:blip r:embed="rId4">
+            <a:extLst>
+              <a:ext uri="{28A0092B-C50C-407E-A947-70E740481C1C}">
+                <a14:useLocalDpi xmlns:a14="http://schemas.microsoft.com/office/drawing/2010/main" val="0"/>
+              </a:ext>
+            </a:extLst>
+          </a:blip>
+          <a:srcRect/>
+          <a:stretch>
+            <a:fillRect/>
+          </a:stretch>
+        </p:blipFill>
+        <p:spPr bwMode="auto">
+          <a:xfrm>
+            <a:off x="1526629" y="3200401"/>
+            <a:ext cx="8543925" cy="581025"/>
+          </a:xfrm>
+          <a:prstGeom prst="rect">
+            <a:avLst/>
+          </a:prstGeom>
+          <a:noFill/>
+          <a:ln>
+            <a:noFill/>
+          </a:ln>
+          <a:extLst>
+            <a:ext uri="{909E8E84-426E-40DD-AFC4-6F175D3DCCD1}">
+              <a14:hiddenFill xmlns:a14="http://schemas.microsoft.com/office/drawing/2010/main">
+                <a:solidFill>
+                  <a:schemeClr val="accent1"/>
+                </a:solidFill>
+              </a14:hiddenFill>
+            </a:ext>
+            <a:ext uri="{91240B29-F687-4F45-9708-019B960494DF}">
+              <a14:hiddenLine xmlns:a14="http://schemas.microsoft.com/office/drawing/2010/main" w="9525">
+                <a:solidFill>
+                  <a:schemeClr val="tx1"/>
+                </a:solidFill>
+                <a:miter lim="800000"/>
+                <a:headEnd/>
+                <a:tailEnd/>
+              </a14:hiddenLine>
+            </a:ext>
+          </a:extLst>
+        </p:spPr>
+      </p:pic>
+      <p:pic>
+        <p:nvPicPr>
+          <p:cNvPr id="5126" name="Picture 6"/>
+          <p:cNvPicPr>
+            <a:picLocks noChangeAspect="1" noChangeArrowheads="1"/>
+          </p:cNvPicPr>
+          <p:nvPr/>
+        </p:nvPicPr>
+        <p:blipFill>
+          <a:blip r:embed="rId5">
+            <a:extLst>
+              <a:ext uri="{28A0092B-C50C-407E-A947-70E740481C1C}">
+                <a14:useLocalDpi xmlns:a14="http://schemas.microsoft.com/office/drawing/2010/main" val="0"/>
+              </a:ext>
+            </a:extLst>
+          </a:blip>
+          <a:srcRect/>
+          <a:stretch>
+            <a:fillRect/>
+          </a:stretch>
+        </p:blipFill>
+        <p:spPr bwMode="auto">
+          <a:xfrm>
+            <a:off x="1655380" y="3981450"/>
+            <a:ext cx="7134225" cy="1104900"/>
+          </a:xfrm>
+          <a:prstGeom prst="rect">
+            <a:avLst/>
+          </a:prstGeom>
+          <a:noFill/>
+          <a:ln>
+            <a:noFill/>
+          </a:ln>
+          <a:extLst>
+            <a:ext uri="{909E8E84-426E-40DD-AFC4-6F175D3DCCD1}">
+              <a14:hiddenFill xmlns:a14="http://schemas.microsoft.com/office/drawing/2010/main">
+                <a:solidFill>
+                  <a:schemeClr val="accent1"/>
+                </a:solidFill>
+              </a14:hiddenFill>
+            </a:ext>
+            <a:ext uri="{91240B29-F687-4F45-9708-019B960494DF}">
+              <a14:hiddenLine xmlns:a14="http://schemas.microsoft.com/office/drawing/2010/main" w="9525">
+                <a:solidFill>
+                  <a:schemeClr val="tx1"/>
+                </a:solidFill>
+                <a:miter lim="800000"/>
+                <a:headEnd/>
+                <a:tailEnd/>
+              </a14:hiddenLine>
+            </a:ext>
+          </a:extLst>
+        </p:spPr>
+      </p:pic>
     </p:spTree>
     <p:extLst>
       <p:ext uri="{BB962C8B-B14F-4D97-AF65-F5344CB8AC3E}">
-        <p14:creationId xmlns:p14="http://schemas.microsoft.com/office/powerpoint/2010/main" val="3857301451"/>
+        <p14:creationId xmlns:p14="http://schemas.microsoft.com/office/powerpoint/2010/main" val="1864667140"/>
       </p:ext>
     </p:extLst>
   </p:cSld>
@@ -8778,40 +9235,10 @@
           </a:p>
         </p:txBody>
       </p:sp>
-      <p:pic>
-        <p:nvPicPr>
-          <p:cNvPr id="5" name="Picture 4">
-            <a:extLst>
-              <a:ext uri="{FF2B5EF4-FFF2-40B4-BE49-F238E27FC236}">
-                <a16:creationId xmlns:a16="http://schemas.microsoft.com/office/drawing/2014/main" id="{E9280F87-4A02-45B3-9FBE-146080C32E95}"/>
-              </a:ext>
-            </a:extLst>
-          </p:cNvPr>
-          <p:cNvPicPr>
-            <a:picLocks noChangeAspect="1"/>
-          </p:cNvPicPr>
-          <p:nvPr/>
-        </p:nvPicPr>
-        <p:blipFill>
-          <a:blip r:embed="rId3"/>
-          <a:stretch>
-            <a:fillRect/>
-          </a:stretch>
-        </p:blipFill>
-        <p:spPr>
-          <a:xfrm>
-            <a:off x="2133600" y="1981200"/>
-            <a:ext cx="8568526" cy="3819592"/>
-          </a:xfrm>
-          <a:prstGeom prst="rect">
-            <a:avLst/>
-          </a:prstGeom>
-        </p:spPr>
-      </p:pic>
     </p:spTree>
     <p:extLst>
       <p:ext uri="{BB962C8B-B14F-4D97-AF65-F5344CB8AC3E}">
-        <p14:creationId xmlns:p14="http://schemas.microsoft.com/office/powerpoint/2010/main" val="166434848"/>
+        <p14:creationId xmlns:p14="http://schemas.microsoft.com/office/powerpoint/2010/main" val="3857301451"/>
       </p:ext>
     </p:extLst>
   </p:cSld>
@@ -8873,7 +9300,7 @@
                       <a:rPr lang="en-US" b="0" i="1" smtClean="0">
                         <a:latin typeface="Cambria Math" panose="02040503050406030204" pitchFamily="18" charset="0"/>
                       </a:rPr>
-                      <m:t>=</m:t>
+                      <m:t>≠</m:t>
                     </m:r>
                   </m:oMath>
                 </a14:m>
@@ -8956,10 +9383,10 @@
       </p:sp>
       <p:pic>
         <p:nvPicPr>
-          <p:cNvPr id="6" name="Picture 5">
+          <p:cNvPr id="5" name="Picture 4">
             <a:extLst>
               <a:ext uri="{FF2B5EF4-FFF2-40B4-BE49-F238E27FC236}">
-                <a16:creationId xmlns:a16="http://schemas.microsoft.com/office/drawing/2014/main" id="{4B31607A-734E-4F07-8DE5-EE9BE1D581F2}"/>
+                <a16:creationId xmlns:a16="http://schemas.microsoft.com/office/drawing/2014/main" id="{E9280F87-4A02-45B3-9FBE-146080C32E95}"/>
               </a:ext>
             </a:extLst>
           </p:cNvPr>
@@ -8976,38 +9403,8 @@
         </p:blipFill>
         <p:spPr>
           <a:xfrm>
-            <a:off x="1128692" y="1417638"/>
-            <a:ext cx="2314615" cy="1371624"/>
-          </a:xfrm>
-          <a:prstGeom prst="rect">
-            <a:avLst/>
-          </a:prstGeom>
-        </p:spPr>
-      </p:pic>
-      <p:pic>
-        <p:nvPicPr>
-          <p:cNvPr id="8" name="Picture 7">
-            <a:extLst>
-              <a:ext uri="{FF2B5EF4-FFF2-40B4-BE49-F238E27FC236}">
-                <a16:creationId xmlns:a16="http://schemas.microsoft.com/office/drawing/2014/main" id="{FC412A03-1B66-40AA-90A8-AFC8A82BEAEC}"/>
-              </a:ext>
-            </a:extLst>
-          </p:cNvPr>
-          <p:cNvPicPr>
-            <a:picLocks noChangeAspect="1"/>
-          </p:cNvPicPr>
-          <p:nvPr/>
-        </p:nvPicPr>
-        <p:blipFill>
-          <a:blip r:embed="rId4"/>
-          <a:stretch>
-            <a:fillRect/>
-          </a:stretch>
-        </p:blipFill>
-        <p:spPr>
-          <a:xfrm>
-            <a:off x="2286000" y="3154362"/>
-            <a:ext cx="8280469" cy="3429000"/>
+            <a:off x="2133600" y="1981200"/>
+            <a:ext cx="8568526" cy="3819592"/>
           </a:xfrm>
           <a:prstGeom prst="rect">
             <a:avLst/>
@@ -9017,7 +9414,7 @@
     </p:spTree>
     <p:extLst>
       <p:ext uri="{BB962C8B-B14F-4D97-AF65-F5344CB8AC3E}">
-        <p14:creationId xmlns:p14="http://schemas.microsoft.com/office/powerpoint/2010/main" val="2914318844"/>
+        <p14:creationId xmlns:p14="http://schemas.microsoft.com/office/powerpoint/2010/main" val="166434848"/>
       </p:ext>
     </p:extLst>
   </p:cSld>
@@ -9192,6 +9589,212 @@
       </p:pic>
       <p:pic>
         <p:nvPicPr>
+          <p:cNvPr id="8" name="Picture 7">
+            <a:extLst>
+              <a:ext uri="{FF2B5EF4-FFF2-40B4-BE49-F238E27FC236}">
+                <a16:creationId xmlns:a16="http://schemas.microsoft.com/office/drawing/2014/main" id="{FC412A03-1B66-40AA-90A8-AFC8A82BEAEC}"/>
+              </a:ext>
+            </a:extLst>
+          </p:cNvPr>
+          <p:cNvPicPr>
+            <a:picLocks noChangeAspect="1"/>
+          </p:cNvPicPr>
+          <p:nvPr/>
+        </p:nvPicPr>
+        <p:blipFill>
+          <a:blip r:embed="rId4"/>
+          <a:stretch>
+            <a:fillRect/>
+          </a:stretch>
+        </p:blipFill>
+        <p:spPr>
+          <a:xfrm>
+            <a:off x="2286000" y="3154362"/>
+            <a:ext cx="8280469" cy="3429000"/>
+          </a:xfrm>
+          <a:prstGeom prst="rect">
+            <a:avLst/>
+          </a:prstGeom>
+        </p:spPr>
+      </p:pic>
+    </p:spTree>
+    <p:extLst>
+      <p:ext uri="{BB962C8B-B14F-4D97-AF65-F5344CB8AC3E}">
+        <p14:creationId xmlns:p14="http://schemas.microsoft.com/office/powerpoint/2010/main" val="2914318844"/>
+      </p:ext>
+    </p:extLst>
+  </p:cSld>
+  <p:clrMapOvr>
+    <a:masterClrMapping/>
+  </p:clrMapOvr>
+</p:sld>
+</file>
+
+<file path=ppt/slides/slide25.xml><?xml version="1.0" encoding="utf-8"?>
+<p:sld xmlns:a="http://schemas.openxmlformats.org/drawingml/2006/main" xmlns:r="http://schemas.openxmlformats.org/officeDocument/2006/relationships" xmlns:p="http://schemas.openxmlformats.org/presentationml/2006/main">
+  <p:cSld>
+    <p:spTree>
+      <p:nvGrpSpPr>
+        <p:cNvPr id="1" name=""/>
+        <p:cNvGrpSpPr/>
+        <p:nvPr/>
+      </p:nvGrpSpPr>
+      <p:grpSpPr>
+        <a:xfrm>
+          <a:off x="0" y="0"/>
+          <a:ext cx="0" cy="0"/>
+          <a:chOff x="0" y="0"/>
+          <a:chExt cx="0" cy="0"/>
+        </a:xfrm>
+      </p:grpSpPr>
+      <mc:AlternateContent xmlns:mc="http://schemas.openxmlformats.org/markup-compatibility/2006" xmlns:a14="http://schemas.microsoft.com/office/drawing/2010/main">
+        <mc:Choice Requires="a14">
+          <p:sp>
+            <p:nvSpPr>
+              <p:cNvPr id="2" name="Title 1">
+                <a:extLst>
+                  <a:ext uri="{FF2B5EF4-FFF2-40B4-BE49-F238E27FC236}">
+                    <a16:creationId xmlns:a16="http://schemas.microsoft.com/office/drawing/2014/main" id="{9127894A-E6A6-499A-8B6C-25FBC618836C}"/>
+                  </a:ext>
+                </a:extLst>
+              </p:cNvPr>
+              <p:cNvSpPr>
+                <a:spLocks noGrp="1"/>
+              </p:cNvSpPr>
+              <p:nvPr>
+                <p:ph type="title"/>
+              </p:nvPr>
+            </p:nvSpPr>
+            <p:spPr/>
+            <p:txBody>
+              <a:bodyPr>
+                <a:normAutofit/>
+              </a:bodyPr>
+              <a:lstStyle/>
+              <a:p>
+                <a:r>
+                  <a:rPr lang="en-US" dirty="0"/>
+                  <a:t>If P</a:t>
+                </a:r>
+                <a14:m>
+                  <m:oMath xmlns:m="http://schemas.openxmlformats.org/officeDocument/2006/math">
+                    <m:r>
+                      <a:rPr lang="en-US" b="0" i="1" smtClean="0">
+                        <a:latin typeface="Cambria Math" panose="02040503050406030204" pitchFamily="18" charset="0"/>
+                      </a:rPr>
+                      <m:t>=</m:t>
+                    </m:r>
+                  </m:oMath>
+                </a14:m>
+                <a:r>
+                  <a:rPr lang="en-US" dirty="0"/>
+                  <a:t>NP, will that have large practical impact?</a:t>
+                </a:r>
+              </a:p>
+            </p:txBody>
+          </p:sp>
+        </mc:Choice>
+        <mc:Fallback xmlns="">
+          <p:sp>
+            <p:nvSpPr>
+              <p:cNvPr id="2" name="Title 1">
+                <a:extLst>
+                  <a:ext uri="{FF2B5EF4-FFF2-40B4-BE49-F238E27FC236}">
+                    <a16:creationId xmlns:a16="http://schemas.microsoft.com/office/drawing/2014/main" id="{9127894A-E6A6-499A-8B6C-25FBC618836C}"/>
+                  </a:ext>
+                </a:extLst>
+              </p:cNvPr>
+              <p:cNvSpPr>
+                <a:spLocks noGrp="1" noRot="1" noChangeAspect="1" noMove="1" noResize="1" noEditPoints="1" noAdjustHandles="1" noChangeArrowheads="1" noChangeShapeType="1" noTextEdit="1"/>
+              </p:cNvSpPr>
+              <p:nvPr>
+                <p:ph type="title"/>
+              </p:nvPr>
+            </p:nvSpPr>
+            <p:spPr>
+              <a:blipFill>
+                <a:blip r:embed="rId2"/>
+                <a:stretch>
+                  <a:fillRect b="-8511"/>
+                </a:stretch>
+              </a:blipFill>
+            </p:spPr>
+            <p:txBody>
+              <a:bodyPr/>
+              <a:lstStyle/>
+              <a:p>
+                <a:r>
+                  <a:rPr lang="en-US">
+                    <a:noFill/>
+                  </a:rPr>
+                  <a:t> </a:t>
+                </a:r>
+              </a:p>
+            </p:txBody>
+          </p:sp>
+        </mc:Fallback>
+      </mc:AlternateContent>
+      <p:sp>
+        <p:nvSpPr>
+          <p:cNvPr id="4" name="Slide Number Placeholder 3">
+            <a:extLst>
+              <a:ext uri="{FF2B5EF4-FFF2-40B4-BE49-F238E27FC236}">
+                <a16:creationId xmlns:a16="http://schemas.microsoft.com/office/drawing/2014/main" id="{E54570E6-3087-4411-B35F-4FB43256F70E}"/>
+              </a:ext>
+            </a:extLst>
+          </p:cNvPr>
+          <p:cNvSpPr>
+            <a:spLocks noGrp="1"/>
+          </p:cNvSpPr>
+          <p:nvPr>
+            <p:ph type="sldNum" sz="quarter" idx="12"/>
+          </p:nvPr>
+        </p:nvSpPr>
+        <p:spPr/>
+        <p:txBody>
+          <a:bodyPr/>
+          <a:lstStyle/>
+          <a:p>
+            <a:fld id="{86BADE50-950A-4D58-BFB2-FA2C6A8B385D}" type="slidenum">
+              <a:rPr lang="en-US" smtClean="0"/>
+              <a:t>25</a:t>
+            </a:fld>
+            <a:endParaRPr lang="en-US"/>
+          </a:p>
+        </p:txBody>
+      </p:sp>
+      <p:pic>
+        <p:nvPicPr>
+          <p:cNvPr id="6" name="Picture 5">
+            <a:extLst>
+              <a:ext uri="{FF2B5EF4-FFF2-40B4-BE49-F238E27FC236}">
+                <a16:creationId xmlns:a16="http://schemas.microsoft.com/office/drawing/2014/main" id="{4B31607A-734E-4F07-8DE5-EE9BE1D581F2}"/>
+              </a:ext>
+            </a:extLst>
+          </p:cNvPr>
+          <p:cNvPicPr>
+            <a:picLocks noChangeAspect="1"/>
+          </p:cNvPicPr>
+          <p:nvPr/>
+        </p:nvPicPr>
+        <p:blipFill>
+          <a:blip r:embed="rId3"/>
+          <a:stretch>
+            <a:fillRect/>
+          </a:stretch>
+        </p:blipFill>
+        <p:spPr>
+          <a:xfrm>
+            <a:off x="1128692" y="1417638"/>
+            <a:ext cx="2314615" cy="1371624"/>
+          </a:xfrm>
+          <a:prstGeom prst="rect">
+            <a:avLst/>
+          </a:prstGeom>
+        </p:spPr>
+      </p:pic>
+      <p:pic>
+        <p:nvPicPr>
           <p:cNvPr id="7" name="Content Placeholder 5">
             <a:extLst>
               <a:ext uri="{FF2B5EF4-FFF2-40B4-BE49-F238E27FC236}">
@@ -9372,8 +9975,8 @@
           </a:p>
         </p:txBody>
       </p:sp>
-      <mc:AlternateContent xmlns:mc="http://schemas.openxmlformats.org/markup-compatibility/2006">
-        <mc:Choice xmlns:a14="http://schemas.microsoft.com/office/drawing/2010/main" Requires="a14">
+      <mc:AlternateContent xmlns:mc="http://schemas.openxmlformats.org/markup-compatibility/2006" xmlns:a14="http://schemas.microsoft.com/office/drawing/2010/main">
+        <mc:Choice Requires="a14">
           <p:sp>
             <p:nvSpPr>
               <p:cNvPr id="5" name="TextBox 4"/>
@@ -9539,7 +10142,7 @@
             </p:txBody>
           </p:sp>
         </mc:Choice>
-        <mc:Fallback>
+        <mc:Fallback xmlns="">
           <p:sp>
             <p:nvSpPr>
               <p:cNvPr id="5" name="TextBox 4"/>
@@ -9847,8 +10450,8 @@
           </a:p>
         </p:txBody>
       </p:sp>
-      <mc:AlternateContent xmlns:mc="http://schemas.openxmlformats.org/markup-compatibility/2006">
-        <mc:Choice xmlns:a14="http://schemas.microsoft.com/office/drawing/2010/main" Requires="a14">
+      <mc:AlternateContent xmlns:mc="http://schemas.openxmlformats.org/markup-compatibility/2006" xmlns:a14="http://schemas.microsoft.com/office/drawing/2010/main">
+        <mc:Choice Requires="a14">
           <p:sp>
             <p:nvSpPr>
               <p:cNvPr id="5" name="TextBox 4"/>
@@ -10140,7 +10743,7 @@
             </p:txBody>
           </p:sp>
         </mc:Choice>
-        <mc:Fallback>
+        <mc:Fallback xmlns="">
           <p:sp>
             <p:nvSpPr>
               <p:cNvPr id="5" name="TextBox 4"/>
@@ -10397,8 +11000,8 @@
           </a:fontRef>
         </p:style>
       </p:cxnSp>
-      <mc:AlternateContent xmlns:mc="http://schemas.openxmlformats.org/markup-compatibility/2006">
-        <mc:Choice xmlns:a14="http://schemas.microsoft.com/office/drawing/2010/main" Requires="a14">
+      <mc:AlternateContent xmlns:mc="http://schemas.openxmlformats.org/markup-compatibility/2006" xmlns:a14="http://schemas.microsoft.com/office/drawing/2010/main">
+        <mc:Choice Requires="a14">
           <p:sp>
             <p:nvSpPr>
               <p:cNvPr id="20" name="TextBox 19"/>
@@ -10599,7 +11202,7 @@
             </p:txBody>
           </p:sp>
         </mc:Choice>
-        <mc:Fallback>
+        <mc:Fallback xmlns="">
           <p:sp>
             <p:nvSpPr>
               <p:cNvPr id="20" name="TextBox 19"/>
@@ -10735,8 +11338,8 @@
           </a:p>
         </p:txBody>
       </p:sp>
-      <mc:AlternateContent xmlns:mc="http://schemas.openxmlformats.org/markup-compatibility/2006">
-        <mc:Choice xmlns:a14="http://schemas.microsoft.com/office/drawing/2010/main" Requires="a14">
+      <mc:AlternateContent xmlns:mc="http://schemas.openxmlformats.org/markup-compatibility/2006" xmlns:a14="http://schemas.microsoft.com/office/drawing/2010/main">
+        <mc:Choice Requires="a14">
           <p:sp>
             <p:nvSpPr>
               <p:cNvPr id="5" name="TextBox 4"/>
@@ -10814,13 +11417,7 @@
                         <a:rPr lang="en-US" sz="2400" i="1">
                           <a:latin typeface="Cambria Math"/>
                         </a:rPr>
-                        <m:t>∧</m:t>
-                      </m:r>
-                      <m:r>
-                        <a:rPr lang="en-US" sz="2400" i="1">
-                          <a:latin typeface="Cambria Math"/>
-                        </a:rPr>
-                        <m:t> </m:t>
+                        <m:t>∧ </m:t>
                       </m:r>
                       <m:d>
                         <m:dPr>
@@ -10885,13 +11482,7 @@
                         <a:rPr lang="en-US" sz="2400" i="1">
                           <a:latin typeface="Cambria Math"/>
                         </a:rPr>
-                        <m:t>∧</m:t>
-                      </m:r>
-                      <m:r>
-                        <a:rPr lang="en-US" sz="2400" i="1">
-                          <a:latin typeface="Cambria Math"/>
-                        </a:rPr>
-                        <m:t> </m:t>
+                        <m:t>∧ </m:t>
                       </m:r>
                       <m:d>
                         <m:dPr>
@@ -10956,13 +11547,7 @@
                         <a:rPr lang="en-US" sz="2400" i="1">
                           <a:latin typeface="Cambria Math"/>
                         </a:rPr>
-                        <m:t>∧</m:t>
-                      </m:r>
-                      <m:r>
-                        <a:rPr lang="en-US" sz="2400" i="1">
-                          <a:latin typeface="Cambria Math"/>
-                        </a:rPr>
-                        <m:t> </m:t>
+                        <m:t>∧ </m:t>
                       </m:r>
                       <m:d>
                         <m:dPr>
@@ -11012,19 +11597,7 @@
                         <a:rPr lang="en-US" sz="2400" i="1">
                           <a:latin typeface="Cambria Math"/>
                         </a:rPr>
-                        <m:t>∧</m:t>
-                      </m:r>
-                      <m:r>
-                        <a:rPr lang="en-US" sz="2400" i="1">
-                          <a:latin typeface="Cambria Math"/>
-                        </a:rPr>
-                        <m:t> </m:t>
-                      </m:r>
-                      <m:r>
-                        <a:rPr lang="en-US" sz="2400" i="1">
-                          <a:latin typeface="Cambria Math"/>
-                        </a:rPr>
-                        <m:t>(</m:t>
+                        <m:t>∧ (</m:t>
                       </m:r>
                       <m:acc>
                         <m:accPr>
@@ -11094,7 +11667,7 @@
             </p:txBody>
           </p:sp>
         </mc:Choice>
-        <mc:Fallback>
+        <mc:Fallback xmlns="">
           <p:sp>
             <p:nvSpPr>
               <p:cNvPr id="5" name="TextBox 4"/>
@@ -11133,8 +11706,8 @@
           </p:sp>
         </mc:Fallback>
       </mc:AlternateContent>
-      <mc:AlternateContent xmlns:mc="http://schemas.openxmlformats.org/markup-compatibility/2006">
-        <mc:Choice xmlns:a14="http://schemas.microsoft.com/office/drawing/2010/main" Requires="a14">
+      <mc:AlternateContent xmlns:mc="http://schemas.openxmlformats.org/markup-compatibility/2006" xmlns:a14="http://schemas.microsoft.com/office/drawing/2010/main">
+        <mc:Choice Requires="a14">
           <p:sp>
             <p:nvSpPr>
               <p:cNvPr id="30" name="Oval 29"/>
@@ -11191,7 +11764,7 @@
             </p:txBody>
           </p:sp>
         </mc:Choice>
-        <mc:Fallback>
+        <mc:Fallback xmlns="">
           <p:sp>
             <p:nvSpPr>
               <p:cNvPr id="30" name="Oval 29"/>
@@ -11230,8 +11803,8 @@
           </p:sp>
         </mc:Fallback>
       </mc:AlternateContent>
-      <mc:AlternateContent xmlns:mc="http://schemas.openxmlformats.org/markup-compatibility/2006">
-        <mc:Choice xmlns:a14="http://schemas.microsoft.com/office/drawing/2010/main" Requires="a14">
+      <mc:AlternateContent xmlns:mc="http://schemas.openxmlformats.org/markup-compatibility/2006" xmlns:a14="http://schemas.microsoft.com/office/drawing/2010/main">
+        <mc:Choice Requires="a14">
           <p:sp>
             <p:nvSpPr>
               <p:cNvPr id="31" name="Oval 30"/>
@@ -11300,7 +11873,7 @@
             </p:txBody>
           </p:sp>
         </mc:Choice>
-        <mc:Fallback>
+        <mc:Fallback xmlns="">
           <p:sp>
             <p:nvSpPr>
               <p:cNvPr id="31" name="Oval 30"/>
@@ -11339,8 +11912,8 @@
           </p:sp>
         </mc:Fallback>
       </mc:AlternateContent>
-      <mc:AlternateContent xmlns:mc="http://schemas.openxmlformats.org/markup-compatibility/2006">
-        <mc:Choice xmlns:a14="http://schemas.microsoft.com/office/drawing/2010/main" Requires="a14">
+      <mc:AlternateContent xmlns:mc="http://schemas.openxmlformats.org/markup-compatibility/2006" xmlns:a14="http://schemas.microsoft.com/office/drawing/2010/main">
+        <mc:Choice Requires="a14">
           <p:sp>
             <p:nvSpPr>
               <p:cNvPr id="32" name="Oval 31"/>
@@ -11397,7 +11970,7 @@
             </p:txBody>
           </p:sp>
         </mc:Choice>
-        <mc:Fallback>
+        <mc:Fallback xmlns="">
           <p:sp>
             <p:nvSpPr>
               <p:cNvPr id="32" name="Oval 31"/>
@@ -11436,8 +12009,8 @@
           </p:sp>
         </mc:Fallback>
       </mc:AlternateContent>
-      <mc:AlternateContent xmlns:mc="http://schemas.openxmlformats.org/markup-compatibility/2006">
-        <mc:Choice xmlns:a14="http://schemas.microsoft.com/office/drawing/2010/main" Requires="a14">
+      <mc:AlternateContent xmlns:mc="http://schemas.openxmlformats.org/markup-compatibility/2006" xmlns:a14="http://schemas.microsoft.com/office/drawing/2010/main">
+        <mc:Choice Requires="a14">
           <p:sp>
             <p:nvSpPr>
               <p:cNvPr id="33" name="Oval 32"/>
@@ -11506,7 +12079,7 @@
             </p:txBody>
           </p:sp>
         </mc:Choice>
-        <mc:Fallback>
+        <mc:Fallback xmlns="">
           <p:sp>
             <p:nvSpPr>
               <p:cNvPr id="33" name="Oval 32"/>
@@ -11545,8 +12118,8 @@
           </p:sp>
         </mc:Fallback>
       </mc:AlternateContent>
-      <mc:AlternateContent xmlns:mc="http://schemas.openxmlformats.org/markup-compatibility/2006">
-        <mc:Choice xmlns:a14="http://schemas.microsoft.com/office/drawing/2010/main" Requires="a14">
+      <mc:AlternateContent xmlns:mc="http://schemas.openxmlformats.org/markup-compatibility/2006" xmlns:a14="http://schemas.microsoft.com/office/drawing/2010/main">
+        <mc:Choice Requires="a14">
           <p:sp>
             <p:nvSpPr>
               <p:cNvPr id="34" name="Oval 33"/>
@@ -11603,7 +12176,7 @@
             </p:txBody>
           </p:sp>
         </mc:Choice>
-        <mc:Fallback>
+        <mc:Fallback xmlns="">
           <p:sp>
             <p:nvSpPr>
               <p:cNvPr id="34" name="Oval 33"/>
@@ -11642,8 +12215,8 @@
           </p:sp>
         </mc:Fallback>
       </mc:AlternateContent>
-      <mc:AlternateContent xmlns:mc="http://schemas.openxmlformats.org/markup-compatibility/2006">
-        <mc:Choice xmlns:a14="http://schemas.microsoft.com/office/drawing/2010/main" Requires="a14">
+      <mc:AlternateContent xmlns:mc="http://schemas.openxmlformats.org/markup-compatibility/2006" xmlns:a14="http://schemas.microsoft.com/office/drawing/2010/main">
+        <mc:Choice Requires="a14">
           <p:sp>
             <p:nvSpPr>
               <p:cNvPr id="35" name="Oval 34"/>
@@ -11712,7 +12285,7 @@
             </p:txBody>
           </p:sp>
         </mc:Choice>
-        <mc:Fallback>
+        <mc:Fallback xmlns="">
           <p:sp>
             <p:nvSpPr>
               <p:cNvPr id="35" name="Oval 34"/>
@@ -11751,8 +12324,8 @@
           </p:sp>
         </mc:Fallback>
       </mc:AlternateContent>
-      <mc:AlternateContent xmlns:mc="http://schemas.openxmlformats.org/markup-compatibility/2006">
-        <mc:Choice xmlns:a14="http://schemas.microsoft.com/office/drawing/2010/main" Requires="a14">
+      <mc:AlternateContent xmlns:mc="http://schemas.openxmlformats.org/markup-compatibility/2006" xmlns:a14="http://schemas.microsoft.com/office/drawing/2010/main">
+        <mc:Choice Requires="a14">
           <p:sp>
             <p:nvSpPr>
               <p:cNvPr id="36" name="Oval 35"/>
@@ -11809,7 +12382,7 @@
             </p:txBody>
           </p:sp>
         </mc:Choice>
-        <mc:Fallback>
+        <mc:Fallback xmlns="">
           <p:sp>
             <p:nvSpPr>
               <p:cNvPr id="36" name="Oval 35"/>
@@ -11848,8 +12421,8 @@
           </p:sp>
         </mc:Fallback>
       </mc:AlternateContent>
-      <mc:AlternateContent xmlns:mc="http://schemas.openxmlformats.org/markup-compatibility/2006">
-        <mc:Choice xmlns:a14="http://schemas.microsoft.com/office/drawing/2010/main" Requires="a14">
+      <mc:AlternateContent xmlns:mc="http://schemas.openxmlformats.org/markup-compatibility/2006" xmlns:a14="http://schemas.microsoft.com/office/drawing/2010/main">
+        <mc:Choice Requires="a14">
           <p:sp>
             <p:nvSpPr>
               <p:cNvPr id="37" name="Oval 36"/>
@@ -11918,7 +12491,7 @@
             </p:txBody>
           </p:sp>
         </mc:Choice>
-        <mc:Fallback>
+        <mc:Fallback xmlns="">
           <p:sp>
             <p:nvSpPr>
               <p:cNvPr id="37" name="Oval 36"/>
@@ -11997,8 +12570,8 @@
           </a:fontRef>
         </p:style>
       </p:cxnSp>
-      <mc:AlternateContent xmlns:mc="http://schemas.openxmlformats.org/markup-compatibility/2006">
-        <mc:Choice xmlns:a14="http://schemas.microsoft.com/office/drawing/2010/main" Requires="a14">
+      <mc:AlternateContent xmlns:mc="http://schemas.openxmlformats.org/markup-compatibility/2006" xmlns:a14="http://schemas.microsoft.com/office/drawing/2010/main">
+        <mc:Choice Requires="a14">
           <p:sp>
             <p:nvSpPr>
               <p:cNvPr id="44" name="Oval 43"/>
@@ -12067,7 +12640,7 @@
             </p:txBody>
           </p:sp>
         </mc:Choice>
-        <mc:Fallback>
+        <mc:Fallback xmlns="">
           <p:sp>
             <p:nvSpPr>
               <p:cNvPr id="44" name="Oval 43"/>
@@ -12146,8 +12719,8 @@
           </a:fontRef>
         </p:style>
       </p:cxnSp>
-      <mc:AlternateContent xmlns:mc="http://schemas.openxmlformats.org/markup-compatibility/2006">
-        <mc:Choice xmlns:a14="http://schemas.microsoft.com/office/drawing/2010/main" Requires="a14">
+      <mc:AlternateContent xmlns:mc="http://schemas.openxmlformats.org/markup-compatibility/2006" xmlns:a14="http://schemas.microsoft.com/office/drawing/2010/main">
+        <mc:Choice Requires="a14">
           <p:sp>
             <p:nvSpPr>
               <p:cNvPr id="48" name="Oval 47"/>
@@ -12216,7 +12789,7 @@
             </p:txBody>
           </p:sp>
         </mc:Choice>
-        <mc:Fallback>
+        <mc:Fallback xmlns="">
           <p:sp>
             <p:nvSpPr>
               <p:cNvPr id="48" name="Oval 47"/>
@@ -12295,8 +12868,8 @@
           </a:fontRef>
         </p:style>
       </p:cxnSp>
-      <mc:AlternateContent xmlns:mc="http://schemas.openxmlformats.org/markup-compatibility/2006">
-        <mc:Choice xmlns:a14="http://schemas.microsoft.com/office/drawing/2010/main" Requires="a14">
+      <mc:AlternateContent xmlns:mc="http://schemas.openxmlformats.org/markup-compatibility/2006" xmlns:a14="http://schemas.microsoft.com/office/drawing/2010/main">
+        <mc:Choice Requires="a14">
           <p:sp>
             <p:nvSpPr>
               <p:cNvPr id="52" name="Oval 51"/>
@@ -12353,7 +12926,7 @@
             </p:txBody>
           </p:sp>
         </mc:Choice>
-        <mc:Fallback>
+        <mc:Fallback xmlns="">
           <p:sp>
             <p:nvSpPr>
               <p:cNvPr id="52" name="Oval 51"/>
@@ -12392,8 +12965,8 @@
           </p:sp>
         </mc:Fallback>
       </mc:AlternateContent>
-      <mc:AlternateContent xmlns:mc="http://schemas.openxmlformats.org/markup-compatibility/2006">
-        <mc:Choice xmlns:a14="http://schemas.microsoft.com/office/drawing/2010/main" Requires="a14">
+      <mc:AlternateContent xmlns:mc="http://schemas.openxmlformats.org/markup-compatibility/2006" xmlns:a14="http://schemas.microsoft.com/office/drawing/2010/main">
+        <mc:Choice Requires="a14">
           <p:sp>
             <p:nvSpPr>
               <p:cNvPr id="53" name="Oval 52"/>
@@ -12450,7 +13023,7 @@
             </p:txBody>
           </p:sp>
         </mc:Choice>
-        <mc:Fallback>
+        <mc:Fallback xmlns="">
           <p:sp>
             <p:nvSpPr>
               <p:cNvPr id="53" name="Oval 52"/>
@@ -12529,8 +13102,8 @@
           </a:fontRef>
         </p:style>
       </p:cxnSp>
-      <mc:AlternateContent xmlns:mc="http://schemas.openxmlformats.org/markup-compatibility/2006">
-        <mc:Choice xmlns:a14="http://schemas.microsoft.com/office/drawing/2010/main" Requires="a14">
+      <mc:AlternateContent xmlns:mc="http://schemas.openxmlformats.org/markup-compatibility/2006" xmlns:a14="http://schemas.microsoft.com/office/drawing/2010/main">
+        <mc:Choice Requires="a14">
           <p:sp>
             <p:nvSpPr>
               <p:cNvPr id="57" name="Oval 56"/>
@@ -12599,7 +13172,7 @@
             </p:txBody>
           </p:sp>
         </mc:Choice>
-        <mc:Fallback>
+        <mc:Fallback xmlns="">
           <p:sp>
             <p:nvSpPr>
               <p:cNvPr id="57" name="Oval 56"/>
@@ -12638,8 +13211,8 @@
           </p:sp>
         </mc:Fallback>
       </mc:AlternateContent>
-      <mc:AlternateContent xmlns:mc="http://schemas.openxmlformats.org/markup-compatibility/2006">
-        <mc:Choice xmlns:a14="http://schemas.microsoft.com/office/drawing/2010/main" Requires="a14">
+      <mc:AlternateContent xmlns:mc="http://schemas.openxmlformats.org/markup-compatibility/2006" xmlns:a14="http://schemas.microsoft.com/office/drawing/2010/main">
+        <mc:Choice Requires="a14">
           <p:sp>
             <p:nvSpPr>
               <p:cNvPr id="58" name="Oval 57"/>
@@ -12696,7 +13269,7 @@
             </p:txBody>
           </p:sp>
         </mc:Choice>
-        <mc:Fallback>
+        <mc:Fallback xmlns="">
           <p:sp>
             <p:nvSpPr>
               <p:cNvPr id="58" name="Oval 57"/>
@@ -12735,8 +13308,8 @@
           </p:sp>
         </mc:Fallback>
       </mc:AlternateContent>
-      <mc:AlternateContent xmlns:mc="http://schemas.openxmlformats.org/markup-compatibility/2006">
-        <mc:Choice xmlns:a14="http://schemas.microsoft.com/office/drawing/2010/main" Requires="a14">
+      <mc:AlternateContent xmlns:mc="http://schemas.openxmlformats.org/markup-compatibility/2006" xmlns:a14="http://schemas.microsoft.com/office/drawing/2010/main">
+        <mc:Choice Requires="a14">
           <p:sp>
             <p:nvSpPr>
               <p:cNvPr id="60" name="Oval 59"/>
@@ -12805,7 +13378,7 @@
             </p:txBody>
           </p:sp>
         </mc:Choice>
-        <mc:Fallback>
+        <mc:Fallback xmlns="">
           <p:sp>
             <p:nvSpPr>
               <p:cNvPr id="60" name="Oval 59"/>
@@ -12964,8 +13537,8 @@
           </a:fontRef>
         </p:style>
       </p:cxnSp>
-      <mc:AlternateContent xmlns:mc="http://schemas.openxmlformats.org/markup-compatibility/2006">
-        <mc:Choice xmlns:a14="http://schemas.microsoft.com/office/drawing/2010/main" Requires="a14">
+      <mc:AlternateContent xmlns:mc="http://schemas.openxmlformats.org/markup-compatibility/2006" xmlns:a14="http://schemas.microsoft.com/office/drawing/2010/main">
+        <mc:Choice Requires="a14">
           <p:sp>
             <p:nvSpPr>
               <p:cNvPr id="70" name="Oval 69"/>
@@ -13022,7 +13595,7 @@
             </p:txBody>
           </p:sp>
         </mc:Choice>
-        <mc:Fallback>
+        <mc:Fallback xmlns="">
           <p:sp>
             <p:nvSpPr>
               <p:cNvPr id="70" name="Oval 69"/>
@@ -13101,8 +13674,8 @@
           </a:fontRef>
         </p:style>
       </p:cxnSp>
-      <mc:AlternateContent xmlns:mc="http://schemas.openxmlformats.org/markup-compatibility/2006">
-        <mc:Choice xmlns:a14="http://schemas.microsoft.com/office/drawing/2010/main" Requires="a14">
+      <mc:AlternateContent xmlns:mc="http://schemas.openxmlformats.org/markup-compatibility/2006" xmlns:a14="http://schemas.microsoft.com/office/drawing/2010/main">
+        <mc:Choice Requires="a14">
           <p:sp>
             <p:nvSpPr>
               <p:cNvPr id="74" name="Oval 73"/>
@@ -13159,7 +13732,7 @@
             </p:txBody>
           </p:sp>
         </mc:Choice>
-        <mc:Fallback>
+        <mc:Fallback xmlns="">
           <p:sp>
             <p:nvSpPr>
               <p:cNvPr id="74" name="Oval 73"/>
@@ -13198,8 +13771,8 @@
           </p:sp>
         </mc:Fallback>
       </mc:AlternateContent>
-      <mc:AlternateContent xmlns:mc="http://schemas.openxmlformats.org/markup-compatibility/2006">
-        <mc:Choice xmlns:a14="http://schemas.microsoft.com/office/drawing/2010/main" Requires="a14">
+      <mc:AlternateContent xmlns:mc="http://schemas.openxmlformats.org/markup-compatibility/2006" xmlns:a14="http://schemas.microsoft.com/office/drawing/2010/main">
+        <mc:Choice Requires="a14">
           <p:sp>
             <p:nvSpPr>
               <p:cNvPr id="75" name="Oval 74"/>
@@ -13268,7 +13841,7 @@
             </p:txBody>
           </p:sp>
         </mc:Choice>
-        <mc:Fallback>
+        <mc:Fallback xmlns="">
           <p:sp>
             <p:nvSpPr>
               <p:cNvPr id="75" name="Oval 74"/>
@@ -13347,8 +13920,8 @@
           </a:fontRef>
         </p:style>
       </p:cxnSp>
-      <mc:AlternateContent xmlns:mc="http://schemas.openxmlformats.org/markup-compatibility/2006">
-        <mc:Choice xmlns:a14="http://schemas.microsoft.com/office/drawing/2010/main" Requires="a14">
+      <mc:AlternateContent xmlns:mc="http://schemas.openxmlformats.org/markup-compatibility/2006" xmlns:a14="http://schemas.microsoft.com/office/drawing/2010/main">
+        <mc:Choice Requires="a14">
           <p:sp>
             <p:nvSpPr>
               <p:cNvPr id="79" name="Oval 78"/>
@@ -13417,7 +13990,7 @@
             </p:txBody>
           </p:sp>
         </mc:Choice>
-        <mc:Fallback>
+        <mc:Fallback xmlns="">
           <p:sp>
             <p:nvSpPr>
               <p:cNvPr id="79" name="Oval 78"/>
@@ -13456,8 +14029,8 @@
           </p:sp>
         </mc:Fallback>
       </mc:AlternateContent>
-      <mc:AlternateContent xmlns:mc="http://schemas.openxmlformats.org/markup-compatibility/2006">
-        <mc:Choice xmlns:a14="http://schemas.microsoft.com/office/drawing/2010/main" Requires="a14">
+      <mc:AlternateContent xmlns:mc="http://schemas.openxmlformats.org/markup-compatibility/2006" xmlns:a14="http://schemas.microsoft.com/office/drawing/2010/main">
+        <mc:Choice Requires="a14">
           <p:sp>
             <p:nvSpPr>
               <p:cNvPr id="80" name="Oval 79"/>
@@ -13514,7 +14087,7 @@
             </p:txBody>
           </p:sp>
         </mc:Choice>
-        <mc:Fallback>
+        <mc:Fallback xmlns="">
           <p:sp>
             <p:nvSpPr>
               <p:cNvPr id="80" name="Oval 79"/>
@@ -13593,8 +14166,8 @@
           </a:fontRef>
         </p:style>
       </p:cxnSp>
-      <mc:AlternateContent xmlns:mc="http://schemas.openxmlformats.org/markup-compatibility/2006">
-        <mc:Choice xmlns:a14="http://schemas.microsoft.com/office/drawing/2010/main" Requires="a14">
+      <mc:AlternateContent xmlns:mc="http://schemas.openxmlformats.org/markup-compatibility/2006" xmlns:a14="http://schemas.microsoft.com/office/drawing/2010/main">
+        <mc:Choice Requires="a14">
           <p:sp>
             <p:nvSpPr>
               <p:cNvPr id="84" name="Oval 83"/>
@@ -13651,7 +14224,7 @@
             </p:txBody>
           </p:sp>
         </mc:Choice>
-        <mc:Fallback>
+        <mc:Fallback xmlns="">
           <p:sp>
             <p:nvSpPr>
               <p:cNvPr id="84" name="Oval 83"/>
@@ -13690,8 +14263,8 @@
           </p:sp>
         </mc:Fallback>
       </mc:AlternateContent>
-      <mc:AlternateContent xmlns:mc="http://schemas.openxmlformats.org/markup-compatibility/2006">
-        <mc:Choice xmlns:a14="http://schemas.microsoft.com/office/drawing/2010/main" Requires="a14">
+      <mc:AlternateContent xmlns:mc="http://schemas.openxmlformats.org/markup-compatibility/2006" xmlns:a14="http://schemas.microsoft.com/office/drawing/2010/main">
+        <mc:Choice Requires="a14">
           <p:sp>
             <p:nvSpPr>
               <p:cNvPr id="85" name="Oval 84"/>
@@ -13748,7 +14321,7 @@
             </p:txBody>
           </p:sp>
         </mc:Choice>
-        <mc:Fallback>
+        <mc:Fallback xmlns="">
           <p:sp>
             <p:nvSpPr>
               <p:cNvPr id="85" name="Oval 84"/>
@@ -13787,8 +14360,8 @@
           </p:sp>
         </mc:Fallback>
       </mc:AlternateContent>
-      <mc:AlternateContent xmlns:mc="http://schemas.openxmlformats.org/markup-compatibility/2006">
-        <mc:Choice xmlns:a14="http://schemas.microsoft.com/office/drawing/2010/main" Requires="a14">
+      <mc:AlternateContent xmlns:mc="http://schemas.openxmlformats.org/markup-compatibility/2006" xmlns:a14="http://schemas.microsoft.com/office/drawing/2010/main">
+        <mc:Choice Requires="a14">
           <p:sp>
             <p:nvSpPr>
               <p:cNvPr id="89" name="Oval 88"/>
@@ -13857,7 +14430,7 @@
             </p:txBody>
           </p:sp>
         </mc:Choice>
-        <mc:Fallback>
+        <mc:Fallback xmlns="">
           <p:sp>
             <p:nvSpPr>
               <p:cNvPr id="89" name="Oval 88"/>
@@ -13936,8 +14509,8 @@
           </a:fontRef>
         </p:style>
       </p:cxnSp>
-      <mc:AlternateContent xmlns:mc="http://schemas.openxmlformats.org/markup-compatibility/2006">
-        <mc:Choice xmlns:a14="http://schemas.microsoft.com/office/drawing/2010/main" Requires="a14">
+      <mc:AlternateContent xmlns:mc="http://schemas.openxmlformats.org/markup-compatibility/2006" xmlns:a14="http://schemas.microsoft.com/office/drawing/2010/main">
+        <mc:Choice Requires="a14">
           <p:sp>
             <p:nvSpPr>
               <p:cNvPr id="95" name="Oval 94"/>
@@ -14006,7 +14579,7 @@
             </p:txBody>
           </p:sp>
         </mc:Choice>
-        <mc:Fallback>
+        <mc:Fallback xmlns="">
           <p:sp>
             <p:nvSpPr>
               <p:cNvPr id="95" name="Oval 94"/>
@@ -14125,8 +14698,8 @@
           </a:fontRef>
         </p:style>
       </p:cxnSp>
-      <mc:AlternateContent xmlns:mc="http://schemas.openxmlformats.org/markup-compatibility/2006">
-        <mc:Choice xmlns:a14="http://schemas.microsoft.com/office/drawing/2010/main" Requires="a14">
+      <mc:AlternateContent xmlns:mc="http://schemas.openxmlformats.org/markup-compatibility/2006" xmlns:a14="http://schemas.microsoft.com/office/drawing/2010/main">
+        <mc:Choice Requires="a14">
           <p:sp>
             <p:nvSpPr>
               <p:cNvPr id="104" name="Oval 103"/>
@@ -14195,7 +14768,7 @@
             </p:txBody>
           </p:sp>
         </mc:Choice>
-        <mc:Fallback>
+        <mc:Fallback xmlns="">
           <p:sp>
             <p:nvSpPr>
               <p:cNvPr id="104" name="Oval 103"/>
@@ -14274,8 +14847,8 @@
           </a:fontRef>
         </p:style>
       </p:cxnSp>
-      <mc:AlternateContent xmlns:mc="http://schemas.openxmlformats.org/markup-compatibility/2006">
-        <mc:Choice xmlns:a14="http://schemas.microsoft.com/office/drawing/2010/main" Requires="a14">
+      <mc:AlternateContent xmlns:mc="http://schemas.openxmlformats.org/markup-compatibility/2006" xmlns:a14="http://schemas.microsoft.com/office/drawing/2010/main">
+        <mc:Choice Requires="a14">
           <p:sp>
             <p:nvSpPr>
               <p:cNvPr id="125" name="Oval 124"/>
@@ -14332,7 +14905,7 @@
             </p:txBody>
           </p:sp>
         </mc:Choice>
-        <mc:Fallback>
+        <mc:Fallback xmlns="">
           <p:sp>
             <p:nvSpPr>
               <p:cNvPr id="125" name="Oval 124"/>
@@ -14371,8 +14944,8 @@
           </p:sp>
         </mc:Fallback>
       </mc:AlternateContent>
-      <mc:AlternateContent xmlns:mc="http://schemas.openxmlformats.org/markup-compatibility/2006">
-        <mc:Choice xmlns:a14="http://schemas.microsoft.com/office/drawing/2010/main" Requires="a14">
+      <mc:AlternateContent xmlns:mc="http://schemas.openxmlformats.org/markup-compatibility/2006" xmlns:a14="http://schemas.microsoft.com/office/drawing/2010/main">
+        <mc:Choice Requires="a14">
           <p:sp>
             <p:nvSpPr>
               <p:cNvPr id="127" name="Oval 126"/>
@@ -14429,7 +15002,7 @@
             </p:txBody>
           </p:sp>
         </mc:Choice>
-        <mc:Fallback>
+        <mc:Fallback xmlns="">
           <p:sp>
             <p:nvSpPr>
               <p:cNvPr id="127" name="Oval 126"/>
@@ -14468,8 +15041,8 @@
           </p:sp>
         </mc:Fallback>
       </mc:AlternateContent>
-      <mc:AlternateContent xmlns:mc="http://schemas.openxmlformats.org/markup-compatibility/2006">
-        <mc:Choice xmlns:a14="http://schemas.microsoft.com/office/drawing/2010/main" Requires="a14">
+      <mc:AlternateContent xmlns:mc="http://schemas.openxmlformats.org/markup-compatibility/2006" xmlns:a14="http://schemas.microsoft.com/office/drawing/2010/main">
+        <mc:Choice Requires="a14">
           <p:sp>
             <p:nvSpPr>
               <p:cNvPr id="128" name="Oval 127"/>
@@ -14538,7 +15111,7 @@
             </p:txBody>
           </p:sp>
         </mc:Choice>
-        <mc:Fallback>
+        <mc:Fallback xmlns="">
           <p:sp>
             <p:nvSpPr>
               <p:cNvPr id="128" name="Oval 127"/>
@@ -14943,8 +15516,8 @@
           </a:p>
         </p:txBody>
       </p:sp>
-      <mc:AlternateContent xmlns:mc="http://schemas.openxmlformats.org/markup-compatibility/2006">
-        <mc:Choice xmlns:a14="http://schemas.microsoft.com/office/drawing/2010/main" Requires="a14">
+      <mc:AlternateContent xmlns:mc="http://schemas.openxmlformats.org/markup-compatibility/2006" xmlns:a14="http://schemas.microsoft.com/office/drawing/2010/main">
+        <mc:Choice Requires="a14">
           <p:sp>
             <p:nvSpPr>
               <p:cNvPr id="5" name="TextBox 4"/>
@@ -15022,13 +15595,7 @@
                         <a:rPr lang="en-US" sz="2400" i="1">
                           <a:latin typeface="Cambria Math"/>
                         </a:rPr>
-                        <m:t>∧</m:t>
-                      </m:r>
-                      <m:r>
-                        <a:rPr lang="en-US" sz="2400" i="1">
-                          <a:latin typeface="Cambria Math"/>
-                        </a:rPr>
-                        <m:t> </m:t>
+                        <m:t>∧ </m:t>
                       </m:r>
                       <m:d>
                         <m:dPr>
@@ -15093,13 +15660,7 @@
                         <a:rPr lang="en-US" sz="2400" i="1">
                           <a:latin typeface="Cambria Math"/>
                         </a:rPr>
-                        <m:t>∧</m:t>
-                      </m:r>
-                      <m:r>
-                        <a:rPr lang="en-US" sz="2400" i="1">
-                          <a:latin typeface="Cambria Math"/>
-                        </a:rPr>
-                        <m:t> </m:t>
+                        <m:t>∧ </m:t>
                       </m:r>
                       <m:d>
                         <m:dPr>
@@ -15225,7 +15786,7 @@
             </p:txBody>
           </p:sp>
         </mc:Choice>
-        <mc:Fallback>
+        <mc:Fallback xmlns="">
           <p:sp>
             <p:nvSpPr>
               <p:cNvPr id="5" name="TextBox 4"/>
@@ -15293,8 +15854,8 @@
           </a:p>
         </p:txBody>
       </p:sp>
-      <mc:AlternateContent xmlns:mc="http://schemas.openxmlformats.org/markup-compatibility/2006">
-        <mc:Choice xmlns:a14="http://schemas.microsoft.com/office/drawing/2010/main" Requires="a14">
+      <mc:AlternateContent xmlns:mc="http://schemas.openxmlformats.org/markup-compatibility/2006" xmlns:a14="http://schemas.microsoft.com/office/drawing/2010/main">
+        <mc:Choice Requires="a14">
           <p:sp>
             <p:nvSpPr>
               <p:cNvPr id="8" name="Oval 7">
@@ -15357,7 +15918,7 @@
             </p:txBody>
           </p:sp>
         </mc:Choice>
-        <mc:Fallback>
+        <mc:Fallback xmlns="">
           <p:sp>
             <p:nvSpPr>
               <p:cNvPr id="8" name="Oval 7">
@@ -15402,8 +15963,8 @@
           </p:sp>
         </mc:Fallback>
       </mc:AlternateContent>
-      <mc:AlternateContent xmlns:mc="http://schemas.openxmlformats.org/markup-compatibility/2006">
-        <mc:Choice xmlns:a14="http://schemas.microsoft.com/office/drawing/2010/main" Requires="a14">
+      <mc:AlternateContent xmlns:mc="http://schemas.openxmlformats.org/markup-compatibility/2006" xmlns:a14="http://schemas.microsoft.com/office/drawing/2010/main">
+        <mc:Choice Requires="a14">
           <p:sp>
             <p:nvSpPr>
               <p:cNvPr id="9" name="Oval 8">
@@ -15466,7 +16027,7 @@
             </p:txBody>
           </p:sp>
         </mc:Choice>
-        <mc:Fallback>
+        <mc:Fallback xmlns="">
           <p:sp>
             <p:nvSpPr>
               <p:cNvPr id="9" name="Oval 8">
@@ -15511,8 +16072,8 @@
           </p:sp>
         </mc:Fallback>
       </mc:AlternateContent>
-      <mc:AlternateContent xmlns:mc="http://schemas.openxmlformats.org/markup-compatibility/2006">
-        <mc:Choice xmlns:a14="http://schemas.microsoft.com/office/drawing/2010/main" Requires="a14">
+      <mc:AlternateContent xmlns:mc="http://schemas.openxmlformats.org/markup-compatibility/2006" xmlns:a14="http://schemas.microsoft.com/office/drawing/2010/main">
+        <mc:Choice Requires="a14">
           <p:sp>
             <p:nvSpPr>
               <p:cNvPr id="10" name="Oval 9">
@@ -15587,7 +16148,7 @@
             </p:txBody>
           </p:sp>
         </mc:Choice>
-        <mc:Fallback>
+        <mc:Fallback xmlns="">
           <p:sp>
             <p:nvSpPr>
               <p:cNvPr id="10" name="Oval 9">
@@ -15632,8 +16193,8 @@
           </p:sp>
         </mc:Fallback>
       </mc:AlternateContent>
-      <mc:AlternateContent xmlns:mc="http://schemas.openxmlformats.org/markup-compatibility/2006">
-        <mc:Choice xmlns:a14="http://schemas.microsoft.com/office/drawing/2010/main" Requires="a14">
+      <mc:AlternateContent xmlns:mc="http://schemas.openxmlformats.org/markup-compatibility/2006" xmlns:a14="http://schemas.microsoft.com/office/drawing/2010/main">
+        <mc:Choice Requires="a14">
           <p:sp>
             <p:nvSpPr>
               <p:cNvPr id="11" name="Oval 10">
@@ -15708,7 +16269,7 @@
             </p:txBody>
           </p:sp>
         </mc:Choice>
-        <mc:Fallback>
+        <mc:Fallback xmlns="">
           <p:sp>
             <p:nvSpPr>
               <p:cNvPr id="11" name="Oval 10">
@@ -15910,8 +16471,8 @@
           </a:p>
         </p:txBody>
       </p:sp>
-      <mc:AlternateContent xmlns:mc="http://schemas.openxmlformats.org/markup-compatibility/2006">
-        <mc:Choice xmlns:a14="http://schemas.microsoft.com/office/drawing/2010/main" Requires="a14">
+      <mc:AlternateContent xmlns:mc="http://schemas.openxmlformats.org/markup-compatibility/2006" xmlns:a14="http://schemas.microsoft.com/office/drawing/2010/main">
+        <mc:Choice Requires="a14">
           <p:sp>
             <p:nvSpPr>
               <p:cNvPr id="5" name="TextBox 4"/>
@@ -16308,7 +16869,7 @@
             </p:txBody>
           </p:sp>
         </mc:Choice>
-        <mc:Fallback>
+        <mc:Fallback xmlns="">
           <p:sp>
             <p:nvSpPr>
               <p:cNvPr id="5" name="TextBox 4"/>
@@ -16565,8 +17126,8 @@
           </a:fontRef>
         </p:style>
       </p:cxnSp>
-      <mc:AlternateContent xmlns:mc="http://schemas.openxmlformats.org/markup-compatibility/2006">
-        <mc:Choice xmlns:a14="http://schemas.microsoft.com/office/drawing/2010/main" Requires="a14">
+      <mc:AlternateContent xmlns:mc="http://schemas.openxmlformats.org/markup-compatibility/2006" xmlns:a14="http://schemas.microsoft.com/office/drawing/2010/main">
+        <mc:Choice Requires="a14">
           <p:sp>
             <p:nvSpPr>
               <p:cNvPr id="20" name="TextBox 19"/>
@@ -16767,7 +17328,7 @@
             </p:txBody>
           </p:sp>
         </mc:Choice>
-        <mc:Fallback>
+        <mc:Fallback xmlns="">
           <p:sp>
             <p:nvSpPr>
               <p:cNvPr id="20" name="TextBox 19"/>
@@ -16992,44 +17553,44 @@
         <a:sysClr val="window" lastClr="FFFFFF"/>
       </a:lt1>
       <a:dk2>
-        <a:srgbClr val="1F497D"/>
+        <a:srgbClr val="44546A"/>
       </a:dk2>
       <a:lt2>
-        <a:srgbClr val="EEECE1"/>
+        <a:srgbClr val="E7E6E6"/>
       </a:lt2>
       <a:accent1>
-        <a:srgbClr val="4F81BD"/>
+        <a:srgbClr val="4472C4"/>
       </a:accent1>
       <a:accent2>
-        <a:srgbClr val="C0504D"/>
+        <a:srgbClr val="ED7D31"/>
       </a:accent2>
       <a:accent3>
-        <a:srgbClr val="9BBB59"/>
+        <a:srgbClr val="A5A5A5"/>
       </a:accent3>
       <a:accent4>
-        <a:srgbClr val="8064A2"/>
+        <a:srgbClr val="FFC000"/>
       </a:accent4>
       <a:accent5>
-        <a:srgbClr val="4BACC6"/>
+        <a:srgbClr val="5B9BD5"/>
       </a:accent5>
       <a:accent6>
-        <a:srgbClr val="F79646"/>
+        <a:srgbClr val="70AD47"/>
       </a:accent6>
       <a:hlink>
-        <a:srgbClr val="0000FF"/>
+        <a:srgbClr val="0563C1"/>
       </a:hlink>
       <a:folHlink>
-        <a:srgbClr val="800080"/>
+        <a:srgbClr val="954F72"/>
       </a:folHlink>
     </a:clrScheme>
     <a:fontScheme name="Office">
       <a:majorFont>
-        <a:latin typeface="Calibri"/>
+        <a:latin typeface="Calibri Light" panose="020F0302020204030204"/>
         <a:ea typeface=""/>
         <a:cs typeface=""/>
-        <a:font script="Jpan" typeface="ＭＳ Ｐゴシック"/>
+        <a:font script="Jpan" typeface="游ゴシック Light"/>
         <a:font script="Hang" typeface="맑은 고딕"/>
-        <a:font script="Hans" typeface="宋体"/>
+        <a:font script="Hans" typeface="等线 Light"/>
         <a:font script="Hant" typeface="新細明體"/>
         <a:font script="Arab" typeface="Times New Roman"/>
         <a:font script="Hebr" typeface="Times New Roman"/>
@@ -17057,14 +17618,31 @@
         <a:font script="Viet" typeface="Times New Roman"/>
         <a:font script="Uigh" typeface="Microsoft Uighur"/>
         <a:font script="Geor" typeface="Sylfaen"/>
+        <a:font script="Armn" typeface="Arial"/>
+        <a:font script="Bugi" typeface="Leelawadee UI"/>
+        <a:font script="Bopo" typeface="Microsoft JhengHei"/>
+        <a:font script="Java" typeface="Javanese Text"/>
+        <a:font script="Lisu" typeface="Segoe UI"/>
+        <a:font script="Mymr" typeface="Myanmar Text"/>
+        <a:font script="Nkoo" typeface="Ebrima"/>
+        <a:font script="Olck" typeface="Nirmala UI"/>
+        <a:font script="Osma" typeface="Ebrima"/>
+        <a:font script="Phag" typeface="Phagspa"/>
+        <a:font script="Syrn" typeface="Estrangelo Edessa"/>
+        <a:font script="Syrj" typeface="Estrangelo Edessa"/>
+        <a:font script="Syre" typeface="Estrangelo Edessa"/>
+        <a:font script="Sora" typeface="Nirmala UI"/>
+        <a:font script="Tale" typeface="Microsoft Tai Le"/>
+        <a:font script="Talu" typeface="Microsoft New Tai Lue"/>
+        <a:font script="Tfng" typeface="Ebrima"/>
       </a:majorFont>
       <a:minorFont>
-        <a:latin typeface="Calibri"/>
+        <a:latin typeface="Calibri" panose="020F0502020204030204"/>
         <a:ea typeface=""/>
         <a:cs typeface=""/>
-        <a:font script="Jpan" typeface="ＭＳ Ｐゴシック"/>
+        <a:font script="Jpan" typeface="游ゴシック"/>
         <a:font script="Hang" typeface="맑은 고딕"/>
-        <a:font script="Hans" typeface="宋体"/>
+        <a:font script="Hans" typeface="等线"/>
         <a:font script="Hant" typeface="新細明體"/>
         <a:font script="Arab" typeface="Arial"/>
         <a:font script="Hebr" typeface="Arial"/>
@@ -17092,6 +17670,23 @@
         <a:font script="Viet" typeface="Arial"/>
         <a:font script="Uigh" typeface="Microsoft Uighur"/>
         <a:font script="Geor" typeface="Sylfaen"/>
+        <a:font script="Armn" typeface="Arial"/>
+        <a:font script="Bugi" typeface="Leelawadee UI"/>
+        <a:font script="Bopo" typeface="Microsoft JhengHei"/>
+        <a:font script="Java" typeface="Javanese Text"/>
+        <a:font script="Lisu" typeface="Segoe UI"/>
+        <a:font script="Mymr" typeface="Myanmar Text"/>
+        <a:font script="Nkoo" typeface="Ebrima"/>
+        <a:font script="Olck" typeface="Nirmala UI"/>
+        <a:font script="Osma" typeface="Ebrima"/>
+        <a:font script="Phag" typeface="Phagspa"/>
+        <a:font script="Syrn" typeface="Estrangelo Edessa"/>
+        <a:font script="Syrj" typeface="Estrangelo Edessa"/>
+        <a:font script="Syre" typeface="Estrangelo Edessa"/>
+        <a:font script="Sora" typeface="Nirmala UI"/>
+        <a:font script="Tale" typeface="Microsoft Tai Le"/>
+        <a:font script="Talu" typeface="Microsoft New Tai Lue"/>
+        <a:font script="Tfng" typeface="Ebrima"/>
       </a:minorFont>
     </a:fontScheme>
     <a:fmtScheme name="Office">
@@ -17103,166 +17698,142 @@
           <a:gsLst>
             <a:gs pos="0">
               <a:schemeClr val="phClr">
-                <a:tint val="50000"/>
-                <a:satMod val="300000"/>
+                <a:lumMod val="110000"/>
+                <a:satMod val="105000"/>
+                <a:tint val="67000"/>
               </a:schemeClr>
             </a:gs>
-            <a:gs pos="35000">
+            <a:gs pos="50000">
               <a:schemeClr val="phClr">
-                <a:tint val="37000"/>
-                <a:satMod val="300000"/>
+                <a:lumMod val="105000"/>
+                <a:satMod val="103000"/>
+                <a:tint val="73000"/>
               </a:schemeClr>
             </a:gs>
             <a:gs pos="100000">
               <a:schemeClr val="phClr">
-                <a:tint val="15000"/>
-                <a:satMod val="350000"/>
+                <a:lumMod val="105000"/>
+                <a:satMod val="109000"/>
+                <a:tint val="81000"/>
               </a:schemeClr>
             </a:gs>
           </a:gsLst>
-          <a:lin ang="16200000" scaled="1"/>
+          <a:lin ang="5400000" scaled="0"/>
         </a:gradFill>
         <a:gradFill rotWithShape="1">
           <a:gsLst>
             <a:gs pos="0">
               <a:schemeClr val="phClr">
-                <a:shade val="51000"/>
-                <a:satMod val="130000"/>
+                <a:satMod val="103000"/>
+                <a:lumMod val="102000"/>
+                <a:tint val="94000"/>
               </a:schemeClr>
             </a:gs>
-            <a:gs pos="80000">
+            <a:gs pos="50000">
               <a:schemeClr val="phClr">
-                <a:shade val="93000"/>
-                <a:satMod val="130000"/>
+                <a:satMod val="110000"/>
+                <a:lumMod val="100000"/>
+                <a:shade val="100000"/>
               </a:schemeClr>
             </a:gs>
             <a:gs pos="100000">
               <a:schemeClr val="phClr">
-                <a:shade val="94000"/>
-                <a:satMod val="135000"/>
+                <a:lumMod val="99000"/>
+                <a:satMod val="120000"/>
+                <a:shade val="78000"/>
               </a:schemeClr>
             </a:gs>
           </a:gsLst>
-          <a:lin ang="16200000" scaled="0"/>
+          <a:lin ang="5400000" scaled="0"/>
         </a:gradFill>
       </a:fillStyleLst>
       <a:lnStyleLst>
-        <a:ln w="9525" cap="flat" cmpd="sng" algn="ctr">
-          <a:solidFill>
-            <a:schemeClr val="phClr">
-              <a:shade val="95000"/>
-              <a:satMod val="105000"/>
-            </a:schemeClr>
-          </a:solidFill>
-          <a:prstDash val="solid"/>
-        </a:ln>
-        <a:ln w="25400" cap="flat" cmpd="sng" algn="ctr">
+        <a:ln w="6350" cap="flat" cmpd="sng" algn="ctr">
           <a:solidFill>
             <a:schemeClr val="phClr"/>
           </a:solidFill>
           <a:prstDash val="solid"/>
+          <a:miter lim="800000"/>
         </a:ln>
-        <a:ln w="38100" cap="flat" cmpd="sng" algn="ctr">
+        <a:ln w="12700" cap="flat" cmpd="sng" algn="ctr">
           <a:solidFill>
             <a:schemeClr val="phClr"/>
           </a:solidFill>
           <a:prstDash val="solid"/>
+          <a:miter lim="800000"/>
+        </a:ln>
+        <a:ln w="19050" cap="flat" cmpd="sng" algn="ctr">
+          <a:solidFill>
+            <a:schemeClr val="phClr"/>
+          </a:solidFill>
+          <a:prstDash val="solid"/>
+          <a:miter lim="800000"/>
         </a:ln>
       </a:lnStyleLst>
       <a:effectStyleLst>
         <a:effectStyle>
+          <a:effectLst/>
+        </a:effectStyle>
+        <a:effectStyle>
+          <a:effectLst/>
+        </a:effectStyle>
+        <a:effectStyle>
           <a:effectLst>
-            <a:outerShdw blurRad="40000" dist="20000" dir="5400000" rotWithShape="0">
+            <a:outerShdw blurRad="57150" dist="19050" dir="5400000" algn="ctr" rotWithShape="0">
               <a:srgbClr val="000000">
-                <a:alpha val="38000"/>
+                <a:alpha val="63000"/>
               </a:srgbClr>
             </a:outerShdw>
           </a:effectLst>
-        </a:effectStyle>
-        <a:effectStyle>
-          <a:effectLst>
-            <a:outerShdw blurRad="40000" dist="23000" dir="5400000" rotWithShape="0">
-              <a:srgbClr val="000000">
-                <a:alpha val="35000"/>
-              </a:srgbClr>
-            </a:outerShdw>
-          </a:effectLst>
-        </a:effectStyle>
-        <a:effectStyle>
-          <a:effectLst>
-            <a:outerShdw blurRad="40000" dist="23000" dir="5400000" rotWithShape="0">
-              <a:srgbClr val="000000">
-                <a:alpha val="35000"/>
-              </a:srgbClr>
-            </a:outerShdw>
-          </a:effectLst>
-          <a:scene3d>
-            <a:camera prst="orthographicFront">
-              <a:rot lat="0" lon="0" rev="0"/>
-            </a:camera>
-            <a:lightRig rig="threePt" dir="t">
-              <a:rot lat="0" lon="0" rev="1200000"/>
-            </a:lightRig>
-          </a:scene3d>
-          <a:sp3d>
-            <a:bevelT w="63500" h="25400"/>
-          </a:sp3d>
         </a:effectStyle>
       </a:effectStyleLst>
       <a:bgFillStyleLst>
         <a:solidFill>
           <a:schemeClr val="phClr"/>
         </a:solidFill>
+        <a:solidFill>
+          <a:schemeClr val="phClr">
+            <a:tint val="95000"/>
+            <a:satMod val="170000"/>
+          </a:schemeClr>
+        </a:solidFill>
         <a:gradFill rotWithShape="1">
           <a:gsLst>
             <a:gs pos="0">
               <a:schemeClr val="phClr">
-                <a:tint val="40000"/>
-                <a:satMod val="350000"/>
+                <a:tint val="93000"/>
+                <a:satMod val="150000"/>
+                <a:shade val="98000"/>
+                <a:lumMod val="102000"/>
               </a:schemeClr>
             </a:gs>
-            <a:gs pos="40000">
+            <a:gs pos="50000">
               <a:schemeClr val="phClr">
-                <a:tint val="45000"/>
-                <a:shade val="99000"/>
-                <a:satMod val="350000"/>
+                <a:tint val="98000"/>
+                <a:satMod val="130000"/>
+                <a:shade val="90000"/>
+                <a:lumMod val="103000"/>
               </a:schemeClr>
             </a:gs>
             <a:gs pos="100000">
               <a:schemeClr val="phClr">
-                <a:shade val="20000"/>
-                <a:satMod val="255000"/>
+                <a:shade val="63000"/>
+                <a:satMod val="120000"/>
               </a:schemeClr>
             </a:gs>
           </a:gsLst>
-          <a:path path="circle">
-            <a:fillToRect l="50000" t="-80000" r="50000" b="180000"/>
-          </a:path>
-        </a:gradFill>
-        <a:gradFill rotWithShape="1">
-          <a:gsLst>
-            <a:gs pos="0">
-              <a:schemeClr val="phClr">
-                <a:tint val="80000"/>
-                <a:satMod val="300000"/>
-              </a:schemeClr>
-            </a:gs>
-            <a:gs pos="100000">
-              <a:schemeClr val="phClr">
-                <a:shade val="30000"/>
-                <a:satMod val="200000"/>
-              </a:schemeClr>
-            </a:gs>
-          </a:gsLst>
-          <a:path path="circle">
-            <a:fillToRect l="50000" t="50000" r="50000" b="50000"/>
-          </a:path>
+          <a:lin ang="5400000" scaled="0"/>
         </a:gradFill>
       </a:bgFillStyleLst>
     </a:fmtScheme>
   </a:themeElements>
   <a:objectDefaults/>
   <a:extraClrSchemeLst/>
+  <a:extLst>
+    <a:ext uri="{05A4C25C-085E-4340-85A3-A5531E510DB2}">
+      <thm15:themeFamily xmlns:thm15="http://schemas.microsoft.com/office/thememl/2012/main" name="Office Theme" id="{62F939B6-93AF-4DB8-9C6B-D6C7DFDC589F}" vid="{4A3C46E8-61CC-4603-A589-7422A47A8E4A}"/>
+    </a:ext>
+  </a:extLst>
 </a:theme>
 </file>
 
@@ -17277,44 +17848,44 @@
         <a:sysClr val="window" lastClr="FFFFFF"/>
       </a:lt1>
       <a:dk2>
-        <a:srgbClr val="1F497D"/>
+        <a:srgbClr val="44546A"/>
       </a:dk2>
       <a:lt2>
-        <a:srgbClr val="EEECE1"/>
+        <a:srgbClr val="E7E6E6"/>
       </a:lt2>
       <a:accent1>
-        <a:srgbClr val="4F81BD"/>
+        <a:srgbClr val="4472C4"/>
       </a:accent1>
       <a:accent2>
-        <a:srgbClr val="C0504D"/>
+        <a:srgbClr val="ED7D31"/>
       </a:accent2>
       <a:accent3>
-        <a:srgbClr val="9BBB59"/>
+        <a:srgbClr val="A5A5A5"/>
       </a:accent3>
       <a:accent4>
-        <a:srgbClr val="8064A2"/>
+        <a:srgbClr val="FFC000"/>
       </a:accent4>
       <a:accent5>
-        <a:srgbClr val="4BACC6"/>
+        <a:srgbClr val="5B9BD5"/>
       </a:accent5>
       <a:accent6>
-        <a:srgbClr val="F79646"/>
+        <a:srgbClr val="70AD47"/>
       </a:accent6>
       <a:hlink>
-        <a:srgbClr val="0000FF"/>
+        <a:srgbClr val="0563C1"/>
       </a:hlink>
       <a:folHlink>
-        <a:srgbClr val="800080"/>
+        <a:srgbClr val="954F72"/>
       </a:folHlink>
     </a:clrScheme>
     <a:fontScheme name="Office">
       <a:majorFont>
-        <a:latin typeface="Calibri"/>
+        <a:latin typeface="Calibri Light" panose="020F0302020204030204"/>
         <a:ea typeface=""/>
         <a:cs typeface=""/>
-        <a:font script="Jpan" typeface="ＭＳ Ｐゴシック"/>
+        <a:font script="Jpan" typeface="游ゴシック Light"/>
         <a:font script="Hang" typeface="맑은 고딕"/>
-        <a:font script="Hans" typeface="宋体"/>
+        <a:font script="Hans" typeface="等线 Light"/>
         <a:font script="Hant" typeface="新細明體"/>
         <a:font script="Arab" typeface="Times New Roman"/>
         <a:font script="Hebr" typeface="Times New Roman"/>
@@ -17342,14 +17913,31 @@
         <a:font script="Viet" typeface="Times New Roman"/>
         <a:font script="Uigh" typeface="Microsoft Uighur"/>
         <a:font script="Geor" typeface="Sylfaen"/>
+        <a:font script="Armn" typeface="Arial"/>
+        <a:font script="Bugi" typeface="Leelawadee UI"/>
+        <a:font script="Bopo" typeface="Microsoft JhengHei"/>
+        <a:font script="Java" typeface="Javanese Text"/>
+        <a:font script="Lisu" typeface="Segoe UI"/>
+        <a:font script="Mymr" typeface="Myanmar Text"/>
+        <a:font script="Nkoo" typeface="Ebrima"/>
+        <a:font script="Olck" typeface="Nirmala UI"/>
+        <a:font script="Osma" typeface="Ebrima"/>
+        <a:font script="Phag" typeface="Phagspa"/>
+        <a:font script="Syrn" typeface="Estrangelo Edessa"/>
+        <a:font script="Syrj" typeface="Estrangelo Edessa"/>
+        <a:font script="Syre" typeface="Estrangelo Edessa"/>
+        <a:font script="Sora" typeface="Nirmala UI"/>
+        <a:font script="Tale" typeface="Microsoft Tai Le"/>
+        <a:font script="Talu" typeface="Microsoft New Tai Lue"/>
+        <a:font script="Tfng" typeface="Ebrima"/>
       </a:majorFont>
       <a:minorFont>
-        <a:latin typeface="Calibri"/>
+        <a:latin typeface="Calibri" panose="020F0502020204030204"/>
         <a:ea typeface=""/>
         <a:cs typeface=""/>
-        <a:font script="Jpan" typeface="ＭＳ Ｐゴシック"/>
+        <a:font script="Jpan" typeface="游ゴシック"/>
         <a:font script="Hang" typeface="맑은 고딕"/>
-        <a:font script="Hans" typeface="宋体"/>
+        <a:font script="Hans" typeface="等线"/>
         <a:font script="Hant" typeface="新細明體"/>
         <a:font script="Arab" typeface="Arial"/>
         <a:font script="Hebr" typeface="Arial"/>
@@ -17377,6 +17965,23 @@
         <a:font script="Viet" typeface="Arial"/>
         <a:font script="Uigh" typeface="Microsoft Uighur"/>
         <a:font script="Geor" typeface="Sylfaen"/>
+        <a:font script="Armn" typeface="Arial"/>
+        <a:font script="Bugi" typeface="Leelawadee UI"/>
+        <a:font script="Bopo" typeface="Microsoft JhengHei"/>
+        <a:font script="Java" typeface="Javanese Text"/>
+        <a:font script="Lisu" typeface="Segoe UI"/>
+        <a:font script="Mymr" typeface="Myanmar Text"/>
+        <a:font script="Nkoo" typeface="Ebrima"/>
+        <a:font script="Olck" typeface="Nirmala UI"/>
+        <a:font script="Osma" typeface="Ebrima"/>
+        <a:font script="Phag" typeface="Phagspa"/>
+        <a:font script="Syrn" typeface="Estrangelo Edessa"/>
+        <a:font script="Syrj" typeface="Estrangelo Edessa"/>
+        <a:font script="Syre" typeface="Estrangelo Edessa"/>
+        <a:font script="Sora" typeface="Nirmala UI"/>
+        <a:font script="Tale" typeface="Microsoft Tai Le"/>
+        <a:font script="Talu" typeface="Microsoft New Tai Lue"/>
+        <a:font script="Tfng" typeface="Ebrima"/>
       </a:minorFont>
     </a:fontScheme>
     <a:fmtScheme name="Office">
@@ -17388,165 +17993,141 @@
           <a:gsLst>
             <a:gs pos="0">
               <a:schemeClr val="phClr">
-                <a:tint val="50000"/>
-                <a:satMod val="300000"/>
+                <a:lumMod val="110000"/>
+                <a:satMod val="105000"/>
+                <a:tint val="67000"/>
               </a:schemeClr>
             </a:gs>
-            <a:gs pos="35000">
+            <a:gs pos="50000">
               <a:schemeClr val="phClr">
-                <a:tint val="37000"/>
-                <a:satMod val="300000"/>
+                <a:lumMod val="105000"/>
+                <a:satMod val="103000"/>
+                <a:tint val="73000"/>
               </a:schemeClr>
             </a:gs>
             <a:gs pos="100000">
               <a:schemeClr val="phClr">
-                <a:tint val="15000"/>
-                <a:satMod val="350000"/>
+                <a:lumMod val="105000"/>
+                <a:satMod val="109000"/>
+                <a:tint val="81000"/>
               </a:schemeClr>
             </a:gs>
           </a:gsLst>
-          <a:lin ang="16200000" scaled="1"/>
+          <a:lin ang="5400000" scaled="0"/>
         </a:gradFill>
         <a:gradFill rotWithShape="1">
           <a:gsLst>
             <a:gs pos="0">
               <a:schemeClr val="phClr">
-                <a:shade val="51000"/>
-                <a:satMod val="130000"/>
+                <a:satMod val="103000"/>
+                <a:lumMod val="102000"/>
+                <a:tint val="94000"/>
               </a:schemeClr>
             </a:gs>
-            <a:gs pos="80000">
+            <a:gs pos="50000">
               <a:schemeClr val="phClr">
-                <a:shade val="93000"/>
-                <a:satMod val="130000"/>
+                <a:satMod val="110000"/>
+                <a:lumMod val="100000"/>
+                <a:shade val="100000"/>
               </a:schemeClr>
             </a:gs>
             <a:gs pos="100000">
               <a:schemeClr val="phClr">
-                <a:shade val="94000"/>
-                <a:satMod val="135000"/>
+                <a:lumMod val="99000"/>
+                <a:satMod val="120000"/>
+                <a:shade val="78000"/>
               </a:schemeClr>
             </a:gs>
           </a:gsLst>
-          <a:lin ang="16200000" scaled="0"/>
+          <a:lin ang="5400000" scaled="0"/>
         </a:gradFill>
       </a:fillStyleLst>
       <a:lnStyleLst>
-        <a:ln w="9525" cap="flat" cmpd="sng" algn="ctr">
-          <a:solidFill>
-            <a:schemeClr val="phClr">
-              <a:shade val="95000"/>
-              <a:satMod val="105000"/>
-            </a:schemeClr>
-          </a:solidFill>
-          <a:prstDash val="solid"/>
-        </a:ln>
-        <a:ln w="25400" cap="flat" cmpd="sng" algn="ctr">
+        <a:ln w="6350" cap="flat" cmpd="sng" algn="ctr">
           <a:solidFill>
             <a:schemeClr val="phClr"/>
           </a:solidFill>
           <a:prstDash val="solid"/>
+          <a:miter lim="800000"/>
         </a:ln>
-        <a:ln w="38100" cap="flat" cmpd="sng" algn="ctr">
+        <a:ln w="12700" cap="flat" cmpd="sng" algn="ctr">
           <a:solidFill>
             <a:schemeClr val="phClr"/>
           </a:solidFill>
           <a:prstDash val="solid"/>
+          <a:miter lim="800000"/>
+        </a:ln>
+        <a:ln w="19050" cap="flat" cmpd="sng" algn="ctr">
+          <a:solidFill>
+            <a:schemeClr val="phClr"/>
+          </a:solidFill>
+          <a:prstDash val="solid"/>
+          <a:miter lim="800000"/>
         </a:ln>
       </a:lnStyleLst>
       <a:effectStyleLst>
         <a:effectStyle>
+          <a:effectLst/>
+        </a:effectStyle>
+        <a:effectStyle>
+          <a:effectLst/>
+        </a:effectStyle>
+        <a:effectStyle>
           <a:effectLst>
-            <a:outerShdw blurRad="40000" dist="20000" dir="5400000" rotWithShape="0">
+            <a:outerShdw blurRad="57150" dist="19050" dir="5400000" algn="ctr" rotWithShape="0">
               <a:srgbClr val="000000">
-                <a:alpha val="38000"/>
+                <a:alpha val="63000"/>
               </a:srgbClr>
             </a:outerShdw>
           </a:effectLst>
-        </a:effectStyle>
-        <a:effectStyle>
-          <a:effectLst>
-            <a:outerShdw blurRad="40000" dist="23000" dir="5400000" rotWithShape="0">
-              <a:srgbClr val="000000">
-                <a:alpha val="35000"/>
-              </a:srgbClr>
-            </a:outerShdw>
-          </a:effectLst>
-        </a:effectStyle>
-        <a:effectStyle>
-          <a:effectLst>
-            <a:outerShdw blurRad="40000" dist="23000" dir="5400000" rotWithShape="0">
-              <a:srgbClr val="000000">
-                <a:alpha val="35000"/>
-              </a:srgbClr>
-            </a:outerShdw>
-          </a:effectLst>
-          <a:scene3d>
-            <a:camera prst="orthographicFront">
-              <a:rot lat="0" lon="0" rev="0"/>
-            </a:camera>
-            <a:lightRig rig="threePt" dir="t">
-              <a:rot lat="0" lon="0" rev="1200000"/>
-            </a:lightRig>
-          </a:scene3d>
-          <a:sp3d>
-            <a:bevelT w="63500" h="25400"/>
-          </a:sp3d>
         </a:effectStyle>
       </a:effectStyleLst>
       <a:bgFillStyleLst>
         <a:solidFill>
           <a:schemeClr val="phClr"/>
         </a:solidFill>
+        <a:solidFill>
+          <a:schemeClr val="phClr">
+            <a:tint val="95000"/>
+            <a:satMod val="170000"/>
+          </a:schemeClr>
+        </a:solidFill>
         <a:gradFill rotWithShape="1">
           <a:gsLst>
             <a:gs pos="0">
               <a:schemeClr val="phClr">
-                <a:tint val="40000"/>
-                <a:satMod val="350000"/>
+                <a:tint val="93000"/>
+                <a:satMod val="150000"/>
+                <a:shade val="98000"/>
+                <a:lumMod val="102000"/>
               </a:schemeClr>
             </a:gs>
-            <a:gs pos="40000">
+            <a:gs pos="50000">
               <a:schemeClr val="phClr">
-                <a:tint val="45000"/>
-                <a:shade val="99000"/>
-                <a:satMod val="350000"/>
+                <a:tint val="98000"/>
+                <a:satMod val="130000"/>
+                <a:shade val="90000"/>
+                <a:lumMod val="103000"/>
               </a:schemeClr>
             </a:gs>
             <a:gs pos="100000">
               <a:schemeClr val="phClr">
-                <a:shade val="20000"/>
-                <a:satMod val="255000"/>
+                <a:shade val="63000"/>
+                <a:satMod val="120000"/>
               </a:schemeClr>
             </a:gs>
           </a:gsLst>
-          <a:path path="circle">
-            <a:fillToRect l="50000" t="-80000" r="50000" b="180000"/>
-          </a:path>
-        </a:gradFill>
-        <a:gradFill rotWithShape="1">
-          <a:gsLst>
-            <a:gs pos="0">
-              <a:schemeClr val="phClr">
-                <a:tint val="80000"/>
-                <a:satMod val="300000"/>
-              </a:schemeClr>
-            </a:gs>
-            <a:gs pos="100000">
-              <a:schemeClr val="phClr">
-                <a:shade val="30000"/>
-                <a:satMod val="200000"/>
-              </a:schemeClr>
-            </a:gs>
-          </a:gsLst>
-          <a:path path="circle">
-            <a:fillToRect l="50000" t="50000" r="50000" b="50000"/>
-          </a:path>
+          <a:lin ang="5400000" scaled="0"/>
         </a:gradFill>
       </a:bgFillStyleLst>
     </a:fmtScheme>
   </a:themeElements>
   <a:objectDefaults/>
   <a:extraClrSchemeLst/>
+  <a:extLst>
+    <a:ext uri="{05A4C25C-085E-4340-85A3-A5531E510DB2}">
+      <thm15:themeFamily xmlns:thm15="http://schemas.microsoft.com/office/thememl/2012/main" name="Office Theme" id="{62F939B6-93AF-4DB8-9C6B-D6C7DFDC589F}" vid="{4A3C46E8-61CC-4603-A589-7422A47A8E4A}"/>
+    </a:ext>
+  </a:extLst>
 </a:theme>
 </file>
--- a/demo_site/files/slides/lecture27_fiveworlds.pptx
+++ b/demo_site/files/slides/lecture27_fiveworlds.pptx
@@ -3939,16 +3939,12 @@
               <a:rPr lang="en-US" dirty="0"/>
             </a:br>
             <a:r>
+              <a:rPr lang="en-US" dirty="0"/>
+              <a:t>Lecture 27: </a:t>
+            </a:r>
+            <a:r>
               <a:rPr lang="en-US"/>
-              <a:t>Lecture 26: </a:t>
-            </a:r>
-            <a:r>
-              <a:rPr lang="en-US" dirty="0"/>
-              <a:t>P </a:t>
-            </a:r>
-            <a:r>
-              <a:rPr lang="en-US"/>
-              <a:t>and NP 2</a:t>
+              <a:t>Five Worlds</a:t>
             </a:r>
             <a:endParaRPr lang="en-US" dirty="0"/>
           </a:p>
@@ -4271,8 +4267,8 @@
           </a:p>
         </p:txBody>
       </p:sp>
-      <mc:AlternateContent xmlns:mc="http://schemas.openxmlformats.org/markup-compatibility/2006">
-        <mc:Choice xmlns:a14="http://schemas.microsoft.com/office/drawing/2010/main" Requires="a14">
+      <mc:AlternateContent xmlns:mc="http://schemas.openxmlformats.org/markup-compatibility/2006" xmlns:a14="http://schemas.microsoft.com/office/drawing/2010/main">
+        <mc:Choice Requires="a14">
           <p:sp>
             <p:nvSpPr>
               <p:cNvPr id="3" name="Content Placeholder 2">
@@ -5011,7 +5007,7 @@
             </p:txBody>
           </p:sp>
         </mc:Choice>
-        <mc:Fallback>
+        <mc:Fallback xmlns="">
           <p:sp>
             <p:nvSpPr>
               <p:cNvPr id="3" name="Content Placeholder 2">
